--- a/deck/UBS_Pitch_Deck_AUTO.pptx
+++ b/deck/UBS_Pitch_Deck_AUTO.pptx
@@ -3664,7 +3664,7 @@
               </a:defRPr>
             </a:pPr>
             <a:r>
-              <a:t>Thesis support score: 0.177 | Moderate support for variant thesis | Grid signal share: 16%</a:t>
+              <a:t>Thesis support score: 0.182 | Moderate support for variant thesis | Grid signal share: 11%</a:t>
             </a:r>
           </a:p>
         </p:txBody>

--- a/deck/UBS_Pitch_Deck_AUTO.pptx
+++ b/deck/UBS_Pitch_Deck_AUTO.pptx
@@ -29,6 +29,7 @@
     <p:sldId id="277" r:id="rId28"/>
     <p:sldId id="278" r:id="rId29"/>
     <p:sldId id="279" r:id="rId30"/>
+    <p:sldId id="280" r:id="rId31"/>
   </p:sldIdLst>
   <p:sldSz cx="12191695" cy="6858000" type="screen4x3"/>
   <p:notesSz cx="6858000" cy="9144000"/>
@@ -3219,7 +3220,7 @@
               </a:defRPr>
             </a:pPr>
             <a:r>
-              <a:t>Energy security is moving from barrels to electrons  |  Long Sieyuan Electric (601126.SS) / Short Halliburton (HAL)</a:t>
+              <a:t>Energy security is moving from barrels to electrons  |  Long Dongfang Electric (1072.HK) / Short Yantai Jereh (002353.SZ)</a:t>
             </a:r>
           </a:p>
         </p:txBody>
@@ -3394,7 +3395,7 @@
                             <a:srgbClr val="1A1A1A"/>
                           </a:solidFill>
                         </a:rPr>
-                        <a:t>Low</a:t>
+                        <a:t>Medium</a:t>
                       </a:r>
                     </a:p>
                   </a:txBody>
@@ -3447,7 +3448,7 @@
                             <a:srgbClr val="1A1A1A"/>
                           </a:solidFill>
                         </a:rPr>
-                        <a:t>Low</a:t>
+                        <a:t>High</a:t>
                       </a:r>
                     </a:p>
                   </a:txBody>
@@ -3500,7 +3501,7 @@
                             <a:srgbClr val="1A1A1A"/>
                           </a:solidFill>
                         </a:rPr>
-                        <a:t>Low</a:t>
+                        <a:t>Medium</a:t>
                       </a:r>
                     </a:p>
                   </a:txBody>
@@ -3623,7 +3624,7 @@
                             <a:srgbClr val="1A1A1A"/>
                           </a:solidFill>
                         </a:rPr>
-                        <a:t>High</a:t>
+                        <a:t>Low</a:t>
                       </a:r>
                     </a:p>
                   </a:txBody>
@@ -3664,7 +3665,7 @@
               </a:defRPr>
             </a:pPr>
             <a:r>
-              <a:t>Thesis support score: 0.182 | Moderate support for variant thesis | Grid signal share: 11%</a:t>
+              <a:t>Thesis support score: 0.2 | Moderate support for variant thesis | Grid signal share: 60%</a:t>
             </a:r>
           </a:p>
         </p:txBody>
@@ -3755,7 +3756,7 @@
               </a:defRPr>
             </a:pPr>
             <a:r>
-              <a:t>"These estimates do not take into account the coordinated emergency release in March 2026 by member countries of the International Energy Agency following Iran’s de facto closure of the Strait of Hormuz. United States The U.S."</a:t>
+              <a:t>"AI-assisted classification separated policy-backed grid capex signals from oilfield margin-risk signals, then human review selected the investment-relevant evidence."</a:t>
             </a:r>
           </a:p>
           <a:p>
@@ -3770,7 +3771,7 @@
               </a:defRPr>
             </a:pPr>
             <a:r>
-              <a:t>  — China the United States and Japan hold most strategic oil inventories in 2025  |  Oil Supply Disruption  |  conf 0.95</a:t>
+              <a:t>  — DOC Pair Analysis Dongfang Jereh 2025  |  Policy-Backed Capex  |  conf 0.96</a:t>
             </a:r>
           </a:p>
           <a:p>
@@ -3785,7 +3786,7 @@
               </a:defRPr>
             </a:pPr>
             <a:r>
-              <a:t>"Q4 international revenue -- Up 7% sequentially, led by Europe/Africa (+12% to $928 million), Middle East/Asia (+3% to $1.5 billion), and Latin America (+7% to $1.1 billion). Q4 North America revenue -- $2.2 billion, down 7% sequentially, due to lower stimulation and fluid service"</a:t>
+              <a:t>"The strongest pair signal is not generic energy demand; it is earnings-quality divergence between Dongfang margin expansion and Jereh margin compression."</a:t>
             </a:r>
           </a:p>
           <a:p>
@@ -3800,7 +3801,7 @@
               </a:defRPr>
             </a:pPr>
             <a:r>
-              <a:t>  — hal Q4 2025 transcript  |  Oilfield Cost Pressure  |  conf 0.85</a:t>
+              <a:t>  — DOC Pair Analysis Dongfang Jereh 2025  |  Margin/Earnings Risk  |  conf 0.95</a:t>
             </a:r>
           </a:p>
         </p:txBody>
@@ -4092,7 +4093,7 @@
         </p:nvGraphicFramePr>
         <p:xfrm>
           <a:off x="640080" y="1188720"/>
-          <a:ext cx="10972800" cy="4389120"/>
+          <a:ext cx="10972800" cy="3291840"/>
         </p:xfrm>
         <a:graphic>
           <a:graphicData uri="http://schemas.openxmlformats.org/drawingml/2006/table">
@@ -4110,7 +4111,7 @@
                 <a:gridCol w="1371600"/>
                 <a:gridCol w="1371600"/>
               </a:tblGrid>
-              <a:tr h="399010">
+              <a:tr h="411480">
                 <a:tc>
                   <a:txBody>
                     <a:bodyPr/>
@@ -4280,36 +4281,36 @@
                   </a:tcPr>
                 </a:tc>
               </a:tr>
-              <a:tr h="399010">
-                <a:tc>
-                  <a:txBody>
-                    <a:bodyPr/>
-                    <a:lstStyle/>
-                    <a:p>
-                      <a:r>
-                        <a:rPr sz="1100">
-                          <a:solidFill>
-                            <a:srgbClr val="1A1A1A"/>
-                          </a:solidFill>
-                        </a:rPr>
-                        <a:t>SIEYUAN ELECTRIC CO LTD</a:t>
-                      </a:r>
-                    </a:p>
-                  </a:txBody>
-                  <a:tcPr/>
-                </a:tc>
-                <a:tc>
-                  <a:txBody>
-                    <a:bodyPr/>
-                    <a:lstStyle/>
-                    <a:p>
-                      <a:r>
-                        <a:rPr sz="1100">
-                          <a:solidFill>
-                            <a:srgbClr val="1A1A1A"/>
-                          </a:solidFill>
-                        </a:rPr>
-                        <a:t>002028.SZ</a:t>
+              <a:tr h="411480">
+                <a:tc>
+                  <a:txBody>
+                    <a:bodyPr/>
+                    <a:lstStyle/>
+                    <a:p>
+                      <a:r>
+                        <a:rPr sz="1100">
+                          <a:solidFill>
+                            <a:srgbClr val="1A1A1A"/>
+                          </a:solidFill>
+                        </a:rPr>
+                        <a:t>DONGFANG ELEC</a:t>
+                      </a:r>
+                    </a:p>
+                  </a:txBody>
+                  <a:tcPr/>
+                </a:tc>
+                <a:tc>
+                  <a:txBody>
+                    <a:bodyPr/>
+                    <a:lstStyle/>
+                    <a:p>
+                      <a:r>
+                        <a:rPr sz="1100">
+                          <a:solidFill>
+                            <a:srgbClr val="1A1A1A"/>
+                          </a:solidFill>
+                        </a:rPr>
+                        <a:t>1072.HK</a:t>
                       </a:r>
                     </a:p>
                   </a:txBody>
@@ -4343,24 +4344,24 @@
                             <a:srgbClr val="1A1A1A"/>
                           </a:solidFill>
                         </a:rPr>
-                        <a:t>47.0x</a:t>
-                      </a:r>
-                    </a:p>
-                  </a:txBody>
-                  <a:tcPr/>
-                </a:tc>
-                <a:tc>
-                  <a:txBody>
-                    <a:bodyPr/>
-                    <a:lstStyle/>
-                    <a:p>
-                      <a:r>
-                        <a:rPr sz="1100">
-                          <a:solidFill>
-                            <a:srgbClr val="1A1A1A"/>
-                          </a:solidFill>
-                        </a:rPr>
-                        <a:t>40.0x</a:t>
+                        <a:t>29.1x</a:t>
+                      </a:r>
+                    </a:p>
+                  </a:txBody>
+                  <a:tcPr/>
+                </a:tc>
+                <a:tc>
+                  <a:txBody>
+                    <a:bodyPr/>
+                    <a:lstStyle/>
+                    <a:p>
+                      <a:r>
+                        <a:rPr sz="1100">
+                          <a:solidFill>
+                            <a:srgbClr val="1A1A1A"/>
+                          </a:solidFill>
+                        </a:rPr>
+                        <a:t>34.0x</a:t>
                       </a:r>
                     </a:p>
                   </a:txBody>
@@ -4385,31 +4386,31 @@
                             <a:srgbClr val="1A1A1A"/>
                           </a:solidFill>
                         </a:rPr>
-                        <a:t>41.6%</a:t>
-                      </a:r>
-                    </a:p>
-                  </a:txBody>
-                  <a:tcPr/>
-                </a:tc>
-                <a:tc>
-                  <a:txBody>
-                    <a:bodyPr/>
-                    <a:lstStyle/>
-                    <a:p>
-                      <a:r>
-                        <a:rPr sz="1100">
-                          <a:solidFill>
-                            <a:srgbClr val="1A1A1A"/>
-                          </a:solidFill>
-                        </a:rPr>
-                        <a:t>14.2%</a:t>
+                        <a:t>5.9%</a:t>
+                      </a:r>
+                    </a:p>
+                  </a:txBody>
+                  <a:tcPr/>
+                </a:tc>
+                <a:tc>
+                  <a:txBody>
+                    <a:bodyPr/>
+                    <a:lstStyle/>
+                    <a:p>
+                      <a:r>
+                        <a:rPr sz="1100">
+                          <a:solidFill>
+                            <a:srgbClr val="1A1A1A"/>
+                          </a:solidFill>
+                        </a:rPr>
+                        <a:t>4.9%</a:t>
                       </a:r>
                     </a:p>
                   </a:txBody>
                   <a:tcPr/>
                 </a:tc>
               </a:tr>
-              <a:tr h="399010">
+              <a:tr h="411480">
                 <a:tc>
                   <a:txBody>
                     <a:bodyPr/>
@@ -4472,24 +4473,24 @@
                             <a:srgbClr val="1A1A1A"/>
                           </a:solidFill>
                         </a:rPr>
-                        <a:t>32.8x</a:t>
-                      </a:r>
-                    </a:p>
-                  </a:txBody>
-                  <a:tcPr/>
-                </a:tc>
-                <a:tc>
-                  <a:txBody>
-                    <a:bodyPr/>
-                    <a:lstStyle/>
-                    <a:p>
-                      <a:r>
-                        <a:rPr sz="1100">
-                          <a:solidFill>
-                            <a:srgbClr val="1A1A1A"/>
-                          </a:solidFill>
-                        </a:rPr>
-                        <a:t>86.7x</a:t>
+                        <a:t>31.1x</a:t>
+                      </a:r>
+                    </a:p>
+                  </a:txBody>
+                  <a:tcPr/>
+                </a:tc>
+                <a:tc>
+                  <a:txBody>
+                    <a:bodyPr/>
+                    <a:lstStyle/>
+                    <a:p>
+                      <a:r>
+                        <a:rPr sz="1100">
+                          <a:solidFill>
+                            <a:srgbClr val="1A1A1A"/>
+                          </a:solidFill>
+                        </a:rPr>
+                        <a:t>82.2x</a:t>
                       </a:r>
                     </a:p>
                   </a:txBody>
@@ -4538,7 +4539,7 @@
                   <a:tcPr/>
                 </a:tc>
               </a:tr>
-              <a:tr h="399010">
+              <a:tr h="411480">
                 <a:tc>
                   <a:txBody>
                     <a:bodyPr/>
@@ -4601,24 +4602,24 @@
                             <a:srgbClr val="1A1A1A"/>
                           </a:solidFill>
                         </a:rPr>
-                        <a:t>93.4x</a:t>
-                      </a:r>
-                    </a:p>
-                  </a:txBody>
-                  <a:tcPr/>
-                </a:tc>
-                <a:tc>
-                  <a:txBody>
-                    <a:bodyPr/>
-                    <a:lstStyle/>
-                    <a:p>
-                      <a:r>
-                        <a:rPr sz="1100">
-                          <a:solidFill>
-                            <a:srgbClr val="1A1A1A"/>
-                          </a:solidFill>
-                        </a:rPr>
-                        <a:t>40.6x</a:t>
+                        <a:t>92.6x</a:t>
+                      </a:r>
+                    </a:p>
+                  </a:txBody>
+                  <a:tcPr/>
+                </a:tc>
+                <a:tc>
+                  <a:txBody>
+                    <a:bodyPr/>
+                    <a:lstStyle/>
+                    <a:p>
+                      <a:r>
+                        <a:rPr sz="1100">
+                          <a:solidFill>
+                            <a:srgbClr val="1A1A1A"/>
+                          </a:solidFill>
+                        </a:rPr>
+                        <a:t>40.1x</a:t>
                       </a:r>
                     </a:p>
                   </a:txBody>
@@ -4667,7 +4668,7 @@
                   <a:tcPr/>
                 </a:tc>
               </a:tr>
-              <a:tr h="399010">
+              <a:tr h="411480">
                 <a:tc>
                   <a:txBody>
                     <a:bodyPr/>
@@ -4730,24 +4731,24 @@
                             <a:srgbClr val="1A1A1A"/>
                           </a:solidFill>
                         </a:rPr>
-                        <a:t>39.8x</a:t>
-                      </a:r>
-                    </a:p>
-                  </a:txBody>
-                  <a:tcPr/>
-                </a:tc>
-                <a:tc>
-                  <a:txBody>
-                    <a:bodyPr/>
-                    <a:lstStyle/>
-                    <a:p>
-                      <a:r>
-                        <a:rPr sz="1100">
-                          <a:solidFill>
-                            <a:srgbClr val="1A1A1A"/>
-                          </a:solidFill>
-                        </a:rPr>
-                        <a:t>27.2x</a:t>
+                        <a:t>39.4x</a:t>
+                      </a:r>
+                    </a:p>
+                  </a:txBody>
+                  <a:tcPr/>
+                </a:tc>
+                <a:tc>
+                  <a:txBody>
+                    <a:bodyPr/>
+                    <a:lstStyle/>
+                    <a:p>
+                      <a:r>
+                        <a:rPr sz="1100">
+                          <a:solidFill>
+                            <a:srgbClr val="1A1A1A"/>
+                          </a:solidFill>
+                        </a:rPr>
+                        <a:t>26.8x</a:t>
                       </a:r>
                     </a:p>
                   </a:txBody>
@@ -4796,7 +4797,7 @@
                   <a:tcPr/>
                 </a:tc>
               </a:tr>
-              <a:tr h="399010">
+              <a:tr h="411480">
                 <a:tc>
                   <a:txBody>
                     <a:bodyPr/>
@@ -4889,7 +4890,7 @@
                   <a:tcPr/>
                 </a:tc>
               </a:tr>
-              <a:tr h="399010">
+              <a:tr h="411480">
                 <a:tc>
                   <a:txBody>
                     <a:bodyPr/>
@@ -4952,24 +4953,24 @@
                             <a:srgbClr val="1A1A1A"/>
                           </a:solidFill>
                         </a:rPr>
-                        <a:t>33.8x</a:t>
-                      </a:r>
-                    </a:p>
-                  </a:txBody>
-                  <a:tcPr/>
-                </a:tc>
-                <a:tc>
-                  <a:txBody>
-                    <a:bodyPr/>
-                    <a:lstStyle/>
-                    <a:p>
-                      <a:r>
-                        <a:rPr sz="1100">
-                          <a:solidFill>
-                            <a:srgbClr val="1A1A1A"/>
-                          </a:solidFill>
-                        </a:rPr>
-                        <a:t>21.5x</a:t>
+                        <a:t>34.0x</a:t>
+                      </a:r>
+                    </a:p>
+                  </a:txBody>
+                  <a:tcPr/>
+                </a:tc>
+                <a:tc>
+                  <a:txBody>
+                    <a:bodyPr/>
+                    <a:lstStyle/>
+                    <a:p>
+                      <a:r>
+                        <a:rPr sz="1100">
+                          <a:solidFill>
+                            <a:srgbClr val="1A1A1A"/>
+                          </a:solidFill>
+                        </a:rPr>
+                        <a:t>21.2x</a:t>
                       </a:r>
                     </a:p>
                   </a:txBody>
@@ -5018,36 +5019,36 @@
                   <a:tcPr/>
                 </a:tc>
               </a:tr>
-              <a:tr h="399010">
-                <a:tc>
-                  <a:txBody>
-                    <a:bodyPr/>
-                    <a:lstStyle/>
-                    <a:p>
-                      <a:r>
-                        <a:rPr sz="1100">
-                          <a:solidFill>
-                            <a:srgbClr val="1A1A1A"/>
-                          </a:solidFill>
-                        </a:rPr>
-                        <a:t>Halliburton Company</a:t>
-                      </a:r>
-                    </a:p>
-                  </a:txBody>
-                  <a:tcPr/>
-                </a:tc>
-                <a:tc>
-                  <a:txBody>
-                    <a:bodyPr/>
-                    <a:lstStyle/>
-                    <a:p>
-                      <a:r>
-                        <a:rPr sz="1100">
-                          <a:solidFill>
-                            <a:srgbClr val="1A1A1A"/>
-                          </a:solidFill>
-                        </a:rPr>
-                        <a:t>HAL</a:t>
+              <a:tr h="411480">
+                <a:tc>
+                  <a:txBody>
+                    <a:bodyPr/>
+                    <a:lstStyle/>
+                    <a:p>
+                      <a:r>
+                        <a:rPr sz="1100">
+                          <a:solidFill>
+                            <a:srgbClr val="1A1A1A"/>
+                          </a:solidFill>
+                        </a:rPr>
+                        <a:t>YANTAI JEREH OILFIELD SERVICES </a:t>
+                      </a:r>
+                    </a:p>
+                  </a:txBody>
+                  <a:tcPr/>
+                </a:tc>
+                <a:tc>
+                  <a:txBody>
+                    <a:bodyPr/>
+                    <a:lstStyle/>
+                    <a:p>
+                      <a:r>
+                        <a:rPr sz="1100">
+                          <a:solidFill>
+                            <a:srgbClr val="1A1A1A"/>
+                          </a:solidFill>
+                        </a:rPr>
+                        <a:t>002353.SZ</a:t>
                       </a:r>
                     </a:p>
                   </a:txBody>
@@ -5081,24 +5082,24 @@
                             <a:srgbClr val="1A1A1A"/>
                           </a:solidFill>
                         </a:rPr>
-                        <a:t>22.2x</a:t>
-                      </a:r>
-                    </a:p>
-                  </a:txBody>
-                  <a:tcPr/>
-                </a:tc>
-                <a:tc>
-                  <a:txBody>
-                    <a:bodyPr/>
-                    <a:lstStyle/>
-                    <a:p>
-                      <a:r>
-                        <a:rPr sz="1100">
-                          <a:solidFill>
-                            <a:srgbClr val="1A1A1A"/>
-                          </a:solidFill>
-                        </a:rPr>
-                        <a:t>9.6x</a:t>
+                        <a:t>45.0x</a:t>
+                      </a:r>
+                    </a:p>
+                  </a:txBody>
+                  <a:tcPr/>
+                </a:tc>
+                <a:tc>
+                  <a:txBody>
+                    <a:bodyPr/>
+                    <a:lstStyle/>
+                    <a:p>
+                      <a:r>
+                        <a:rPr sz="1100">
+                          <a:solidFill>
+                            <a:srgbClr val="1A1A1A"/>
+                          </a:solidFill>
+                        </a:rPr>
+                        <a:t>28.3x</a:t>
                       </a:r>
                     </a:p>
                   </a:txBody>
@@ -5123,411 +5124,24 @@
                             <a:srgbClr val="1A1A1A"/>
                           </a:solidFill>
                         </a:rPr>
-                        <a:t>-0.3%</a:t>
-                      </a:r>
-                    </a:p>
-                  </a:txBody>
-                  <a:tcPr/>
-                </a:tc>
-                <a:tc>
-                  <a:txBody>
-                    <a:bodyPr/>
-                    <a:lstStyle/>
-                    <a:p>
-                      <a:r>
-                        <a:rPr sz="1100">
-                          <a:solidFill>
-                            <a:srgbClr val="1A1A1A"/>
-                          </a:solidFill>
-                        </a:rPr>
-                        <a:t>6.9%</a:t>
-                      </a:r>
-                    </a:p>
-                  </a:txBody>
-                  <a:tcPr/>
-                </a:tc>
-              </a:tr>
-              <a:tr h="399010">
-                <a:tc>
-                  <a:txBody>
-                    <a:bodyPr/>
-                    <a:lstStyle/>
-                    <a:p>
-                      <a:r>
-                        <a:rPr sz="1100">
-                          <a:solidFill>
-                            <a:srgbClr val="1A1A1A"/>
-                          </a:solidFill>
-                        </a:rPr>
-                        <a:t>SLB Limited</a:t>
-                      </a:r>
-                    </a:p>
-                  </a:txBody>
-                  <a:tcPr/>
-                </a:tc>
-                <a:tc>
-                  <a:txBody>
-                    <a:bodyPr/>
-                    <a:lstStyle/>
-                    <a:p>
-                      <a:r>
-                        <a:rPr sz="1100">
-                          <a:solidFill>
-                            <a:srgbClr val="1A1A1A"/>
-                          </a:solidFill>
-                        </a:rPr>
-                        <a:t>SLB</a:t>
-                      </a:r>
-                    </a:p>
-                  </a:txBody>
-                  <a:tcPr/>
-                </a:tc>
-                <a:tc>
-                  <a:txBody>
-                    <a:bodyPr/>
-                    <a:lstStyle/>
-                    <a:p>
-                      <a:r>
-                        <a:rPr sz="1100">
-                          <a:solidFill>
-                            <a:srgbClr val="1A1A1A"/>
-                          </a:solidFill>
-                        </a:rPr>
-                        <a:t>Oilfield Services</a:t>
-                      </a:r>
-                    </a:p>
-                  </a:txBody>
-                  <a:tcPr/>
-                </a:tc>
-                <a:tc>
-                  <a:txBody>
-                    <a:bodyPr/>
-                    <a:lstStyle/>
-                    <a:p>
-                      <a:r>
-                        <a:rPr sz="1100">
-                          <a:solidFill>
-                            <a:srgbClr val="1A1A1A"/>
-                          </a:solidFill>
-                        </a:rPr>
-                        <a:t>24.3x</a:t>
-                      </a:r>
-                    </a:p>
-                  </a:txBody>
-                  <a:tcPr/>
-                </a:tc>
-                <a:tc>
-                  <a:txBody>
-                    <a:bodyPr/>
-                    <a:lstStyle/>
-                    <a:p>
-                      <a:r>
-                        <a:rPr sz="1100">
-                          <a:solidFill>
-                            <a:srgbClr val="1A1A1A"/>
-                          </a:solidFill>
-                        </a:rPr>
-                        <a:t>12.3x</a:t>
-                      </a:r>
-                    </a:p>
-                  </a:txBody>
-                  <a:tcPr/>
-                </a:tc>
-                <a:tc>
-                  <a:txBody>
-                    <a:bodyPr/>
-                    <a:lstStyle/>
-                    <a:p/>
-                  </a:txBody>
-                  <a:tcPr/>
-                </a:tc>
-                <a:tc>
-                  <a:txBody>
-                    <a:bodyPr/>
-                    <a:lstStyle/>
-                    <a:p>
-                      <a:r>
-                        <a:rPr sz="1100">
-                          <a:solidFill>
-                            <a:srgbClr val="1A1A1A"/>
-                          </a:solidFill>
-                        </a:rPr>
-                        <a:t>2.7%</a:t>
-                      </a:r>
-                    </a:p>
-                  </a:txBody>
-                  <a:tcPr/>
-                </a:tc>
-                <a:tc>
-                  <a:txBody>
-                    <a:bodyPr/>
-                    <a:lstStyle/>
-                    <a:p>
-                      <a:r>
-                        <a:rPr sz="1100">
-                          <a:solidFill>
-                            <a:srgbClr val="1A1A1A"/>
-                          </a:solidFill>
-                        </a:rPr>
-                        <a:t>9.3%</a:t>
-                      </a:r>
-                    </a:p>
-                  </a:txBody>
-                  <a:tcPr/>
-                </a:tc>
-              </a:tr>
-              <a:tr h="399010">
-                <a:tc>
-                  <a:txBody>
-                    <a:bodyPr/>
-                    <a:lstStyle/>
-                    <a:p>
-                      <a:r>
-                        <a:rPr sz="1100">
-                          <a:solidFill>
-                            <a:srgbClr val="1A1A1A"/>
-                          </a:solidFill>
-                        </a:rPr>
-                        <a:t>Baker Hughes Company</a:t>
-                      </a:r>
-                    </a:p>
-                  </a:txBody>
-                  <a:tcPr/>
-                </a:tc>
-                <a:tc>
-                  <a:txBody>
-                    <a:bodyPr/>
-                    <a:lstStyle/>
-                    <a:p>
-                      <a:r>
-                        <a:rPr sz="1100">
-                          <a:solidFill>
-                            <a:srgbClr val="1A1A1A"/>
-                          </a:solidFill>
-                        </a:rPr>
-                        <a:t>BKR</a:t>
-                      </a:r>
-                    </a:p>
-                  </a:txBody>
-                  <a:tcPr/>
-                </a:tc>
-                <a:tc>
-                  <a:txBody>
-                    <a:bodyPr/>
-                    <a:lstStyle/>
-                    <a:p>
-                      <a:r>
-                        <a:rPr sz="1100">
-                          <a:solidFill>
-                            <a:srgbClr val="1A1A1A"/>
-                          </a:solidFill>
-                        </a:rPr>
-                        <a:t>Oilfield Services</a:t>
-                      </a:r>
-                    </a:p>
-                  </a:txBody>
-                  <a:tcPr/>
-                </a:tc>
-                <a:tc>
-                  <a:txBody>
-                    <a:bodyPr/>
-                    <a:lstStyle/>
-                    <a:p>
-                      <a:r>
-                        <a:rPr sz="1100">
-                          <a:solidFill>
-                            <a:srgbClr val="1A1A1A"/>
-                          </a:solidFill>
-                        </a:rPr>
-                        <a:t>21.8x</a:t>
-                      </a:r>
-                    </a:p>
-                  </a:txBody>
-                  <a:tcPr/>
-                </a:tc>
-                <a:tc>
-                  <a:txBody>
-                    <a:bodyPr/>
-                    <a:lstStyle/>
-                    <a:p>
-                      <a:r>
-                        <a:rPr sz="1100">
-                          <a:solidFill>
-                            <a:srgbClr val="1A1A1A"/>
-                          </a:solidFill>
-                        </a:rPr>
-                        <a:t>14.2x</a:t>
-                      </a:r>
-                    </a:p>
-                  </a:txBody>
-                  <a:tcPr/>
-                </a:tc>
-                <a:tc>
-                  <a:txBody>
-                    <a:bodyPr/>
-                    <a:lstStyle/>
-                    <a:p/>
-                  </a:txBody>
-                  <a:tcPr/>
-                </a:tc>
-                <a:tc>
-                  <a:txBody>
-                    <a:bodyPr/>
-                    <a:lstStyle/>
-                    <a:p>
-                      <a:r>
-                        <a:rPr sz="1100">
-                          <a:solidFill>
-                            <a:srgbClr val="1A1A1A"/>
-                          </a:solidFill>
-                        </a:rPr>
-                        <a:t>2.5%</a:t>
-                      </a:r>
-                    </a:p>
-                  </a:txBody>
-                  <a:tcPr/>
-                </a:tc>
-                <a:tc>
-                  <a:txBody>
-                    <a:bodyPr/>
-                    <a:lstStyle/>
-                    <a:p>
-                      <a:r>
-                        <a:rPr sz="1100">
-                          <a:solidFill>
-                            <a:srgbClr val="1A1A1A"/>
-                          </a:solidFill>
-                        </a:rPr>
-                        <a:t>11.2%</a:t>
-                      </a:r>
-                    </a:p>
-                  </a:txBody>
-                  <a:tcPr/>
-                </a:tc>
-              </a:tr>
-              <a:tr h="399020">
-                <a:tc>
-                  <a:txBody>
-                    <a:bodyPr/>
-                    <a:lstStyle/>
-                    <a:p>
-                      <a:r>
-                        <a:rPr sz="1100">
-                          <a:solidFill>
-                            <a:srgbClr val="1A1A1A"/>
-                          </a:solidFill>
-                        </a:rPr>
-                        <a:t>NOV Inc.</a:t>
-                      </a:r>
-                    </a:p>
-                  </a:txBody>
-                  <a:tcPr/>
-                </a:tc>
-                <a:tc>
-                  <a:txBody>
-                    <a:bodyPr/>
-                    <a:lstStyle/>
-                    <a:p>
-                      <a:r>
-                        <a:rPr sz="1100">
-                          <a:solidFill>
-                            <a:srgbClr val="1A1A1A"/>
-                          </a:solidFill>
-                        </a:rPr>
-                        <a:t>NOV</a:t>
-                      </a:r>
-                    </a:p>
-                  </a:txBody>
-                  <a:tcPr/>
-                </a:tc>
-                <a:tc>
-                  <a:txBody>
-                    <a:bodyPr/>
-                    <a:lstStyle/>
-                    <a:p>
-                      <a:r>
-                        <a:rPr sz="1100">
-                          <a:solidFill>
-                            <a:srgbClr val="1A1A1A"/>
-                          </a:solidFill>
-                        </a:rPr>
-                        <a:t>Oilfield Services</a:t>
-                      </a:r>
-                    </a:p>
-                  </a:txBody>
-                  <a:tcPr/>
-                </a:tc>
-                <a:tc>
-                  <a:txBody>
-                    <a:bodyPr/>
-                    <a:lstStyle/>
-                    <a:p>
-                      <a:r>
-                        <a:rPr sz="1100">
-                          <a:solidFill>
-                            <a:srgbClr val="1A1A1A"/>
-                          </a:solidFill>
-                        </a:rPr>
-                        <a:t>53.4x</a:t>
-                      </a:r>
-                    </a:p>
-                  </a:txBody>
-                  <a:tcPr/>
-                </a:tc>
-                <a:tc>
-                  <a:txBody>
-                    <a:bodyPr/>
-                    <a:lstStyle/>
-                    <a:p>
-                      <a:r>
-                        <a:rPr sz="1100">
-                          <a:solidFill>
-                            <a:srgbClr val="1A1A1A"/>
-                          </a:solidFill>
-                        </a:rPr>
-                        <a:t>9.2x</a:t>
-                      </a:r>
-                    </a:p>
-                  </a:txBody>
-                  <a:tcPr/>
-                </a:tc>
-                <a:tc>
-                  <a:txBody>
-                    <a:bodyPr/>
-                    <a:lstStyle/>
-                    <a:p/>
-                  </a:txBody>
-                  <a:tcPr/>
-                </a:tc>
-                <a:tc>
-                  <a:txBody>
-                    <a:bodyPr/>
-                    <a:lstStyle/>
-                    <a:p>
-                      <a:r>
-                        <a:rPr sz="1100">
-                          <a:solidFill>
-                            <a:srgbClr val="1A1A1A"/>
-                          </a:solidFill>
-                        </a:rPr>
-                        <a:t>-2.4%</a:t>
-                      </a:r>
-                    </a:p>
-                  </a:txBody>
-                  <a:tcPr/>
-                </a:tc>
-                <a:tc>
-                  <a:txBody>
-                    <a:bodyPr/>
-                    <a:lstStyle/>
-                    <a:p>
-                      <a:r>
-                        <a:rPr sz="1100">
-                          <a:solidFill>
-                            <a:srgbClr val="1A1A1A"/>
-                          </a:solidFill>
-                        </a:rPr>
-                        <a:t>1.0%</a:t>
+                        <a:t>22.5%</a:t>
+                      </a:r>
+                    </a:p>
+                  </a:txBody>
+                  <a:tcPr/>
+                </a:tc>
+                <a:tc>
+                  <a:txBody>
+                    <a:bodyPr/>
+                    <a:lstStyle/>
+                    <a:p>
+                      <a:r>
+                        <a:rPr sz="1100">
+                          <a:solidFill>
+                            <a:srgbClr val="1A1A1A"/>
+                          </a:solidFill>
+                        </a:rPr>
+                        <a:t>16.7%</a:t>
                       </a:r>
                     </a:p>
                   </a:txBody>
@@ -5621,7 +5235,573 @@
               </a:defRPr>
             </a:pPr>
             <a:r>
-              <a:t>Long Scenarios: Sieyuan Electric</a:t>
+              <a:t>Valuation: DCF Cross-Check</a:t>
+            </a:r>
+          </a:p>
+        </p:txBody>
+      </p:sp>
+      <p:graphicFrame>
+        <p:nvGraphicFramePr>
+          <p:cNvPr id="3" name="Table 2"/>
+          <p:cNvGraphicFramePr>
+            <a:graphicFrameLocks noGrp="1"/>
+          </p:cNvGraphicFramePr>
+          <p:nvPr/>
+        </p:nvGraphicFramePr>
+        <p:xfrm>
+          <a:off x="640080" y="1188720"/>
+          <a:ext cx="10972800" cy="1463040"/>
+        </p:xfrm>
+        <a:graphic>
+          <a:graphicData uri="http://schemas.openxmlformats.org/drawingml/2006/table">
+            <a:tbl>
+              <a:tblPr firstRow="1" bandRow="1">
+                <a:tableStyleId>{5C22544A-7EE6-4342-B048-85BDC9FD1C3A}</a:tableStyleId>
+              </a:tblPr>
+              <a:tblGrid>
+                <a:gridCol w="1371600"/>
+                <a:gridCol w="1371600"/>
+                <a:gridCol w="1371600"/>
+                <a:gridCol w="1371600"/>
+                <a:gridCol w="1371600"/>
+                <a:gridCol w="1371600"/>
+                <a:gridCol w="1371600"/>
+                <a:gridCol w="1371600"/>
+              </a:tblGrid>
+              <a:tr h="487680">
+                <a:tc>
+                  <a:txBody>
+                    <a:bodyPr/>
+                    <a:lstStyle/>
+                    <a:p>
+                      <a:r>
+                        <a:rPr sz="1200" b="1">
+                          <a:solidFill>
+                            <a:srgbClr val="FFFFFF"/>
+                          </a:solidFill>
+                        </a:rPr>
+                        <a:t>Company</a:t>
+                      </a:r>
+                    </a:p>
+                  </a:txBody>
+                  <a:tcPr>
+                    <a:solidFill>
+                      <a:srgbClr val="002F5D"/>
+                    </a:solidFill>
+                  </a:tcPr>
+                </a:tc>
+                <a:tc>
+                  <a:txBody>
+                    <a:bodyPr/>
+                    <a:lstStyle/>
+                    <a:p>
+                      <a:r>
+                        <a:rPr sz="1200" b="1">
+                          <a:solidFill>
+                            <a:srgbClr val="FFFFFF"/>
+                          </a:solidFill>
+                        </a:rPr>
+                        <a:t>Fcf0 Rmb Bn</a:t>
+                      </a:r>
+                    </a:p>
+                  </a:txBody>
+                  <a:tcPr>
+                    <a:solidFill>
+                      <a:srgbClr val="002F5D"/>
+                    </a:solidFill>
+                  </a:tcPr>
+                </a:tc>
+                <a:tc>
+                  <a:txBody>
+                    <a:bodyPr/>
+                    <a:lstStyle/>
+                    <a:p>
+                      <a:r>
+                        <a:rPr sz="1200" b="1">
+                          <a:solidFill>
+                            <a:srgbClr val="FFFFFF"/>
+                          </a:solidFill>
+                        </a:rPr>
+                        <a:t>Growth Rate Pct</a:t>
+                      </a:r>
+                    </a:p>
+                  </a:txBody>
+                  <a:tcPr>
+                    <a:solidFill>
+                      <a:srgbClr val="002F5D"/>
+                    </a:solidFill>
+                  </a:tcPr>
+                </a:tc>
+                <a:tc>
+                  <a:txBody>
+                    <a:bodyPr/>
+                    <a:lstStyle/>
+                    <a:p>
+                      <a:r>
+                        <a:rPr sz="1200" b="1">
+                          <a:solidFill>
+                            <a:srgbClr val="FFFFFF"/>
+                          </a:solidFill>
+                        </a:rPr>
+                        <a:t>Terminal Growth Pct</a:t>
+                      </a:r>
+                    </a:p>
+                  </a:txBody>
+                  <a:tcPr>
+                    <a:solidFill>
+                      <a:srgbClr val="002F5D"/>
+                    </a:solidFill>
+                  </a:tcPr>
+                </a:tc>
+                <a:tc>
+                  <a:txBody>
+                    <a:bodyPr/>
+                    <a:lstStyle/>
+                    <a:p>
+                      <a:r>
+                        <a:rPr sz="1200" b="1">
+                          <a:solidFill>
+                            <a:srgbClr val="FFFFFF"/>
+                          </a:solidFill>
+                        </a:rPr>
+                        <a:t>Wacc Pct</a:t>
+                      </a:r>
+                    </a:p>
+                  </a:txBody>
+                  <a:tcPr>
+                    <a:solidFill>
+                      <a:srgbClr val="002F5D"/>
+                    </a:solidFill>
+                  </a:tcPr>
+                </a:tc>
+                <a:tc>
+                  <a:txBody>
+                    <a:bodyPr/>
+                    <a:lstStyle/>
+                    <a:p>
+                      <a:r>
+                        <a:rPr sz="1200" b="1">
+                          <a:solidFill>
+                            <a:srgbClr val="FFFFFF"/>
+                          </a:solidFill>
+                        </a:rPr>
+                        <a:t>Years</a:t>
+                      </a:r>
+                    </a:p>
+                  </a:txBody>
+                  <a:tcPr>
+                    <a:solidFill>
+                      <a:srgbClr val="002F5D"/>
+                    </a:solidFill>
+                  </a:tcPr>
+                </a:tc>
+                <a:tc>
+                  <a:txBody>
+                    <a:bodyPr/>
+                    <a:lstStyle/>
+                    <a:p>
+                      <a:r>
+                        <a:rPr sz="1200" b="1">
+                          <a:solidFill>
+                            <a:srgbClr val="FFFFFF"/>
+                          </a:solidFill>
+                        </a:rPr>
+                        <a:t>Enterprise Value Rmb Bn</a:t>
+                      </a:r>
+                    </a:p>
+                  </a:txBody>
+                  <a:tcPr>
+                    <a:solidFill>
+                      <a:srgbClr val="002F5D"/>
+                    </a:solidFill>
+                  </a:tcPr>
+                </a:tc>
+                <a:tc>
+                  <a:txBody>
+                    <a:bodyPr/>
+                    <a:lstStyle/>
+                    <a:p>
+                      <a:r>
+                        <a:rPr sz="1200" b="1">
+                          <a:solidFill>
+                            <a:srgbClr val="FFFFFF"/>
+                          </a:solidFill>
+                        </a:rPr>
+                        <a:t>Implied Value Per Share Rmb</a:t>
+                      </a:r>
+                    </a:p>
+                  </a:txBody>
+                  <a:tcPr>
+                    <a:solidFill>
+                      <a:srgbClr val="002F5D"/>
+                    </a:solidFill>
+                  </a:tcPr>
+                </a:tc>
+              </a:tr>
+              <a:tr h="487680">
+                <a:tc>
+                  <a:txBody>
+                    <a:bodyPr/>
+                    <a:lstStyle/>
+                    <a:p>
+                      <a:r>
+                        <a:rPr sz="1100">
+                          <a:solidFill>
+                            <a:srgbClr val="1A1A1A"/>
+                          </a:solidFill>
+                        </a:rPr>
+                        <a:t>Dongfang Electric</a:t>
+                      </a:r>
+                    </a:p>
+                  </a:txBody>
+                  <a:tcPr/>
+                </a:tc>
+                <a:tc>
+                  <a:txBody>
+                    <a:bodyPr/>
+                    <a:lstStyle/>
+                    <a:p>
+                      <a:r>
+                        <a:rPr sz="1100">
+                          <a:solidFill>
+                            <a:srgbClr val="1A1A1A"/>
+                          </a:solidFill>
+                        </a:rPr>
+                        <a:t>3.4</a:t>
+                      </a:r>
+                    </a:p>
+                  </a:txBody>
+                  <a:tcPr/>
+                </a:tc>
+                <a:tc>
+                  <a:txBody>
+                    <a:bodyPr/>
+                    <a:lstStyle/>
+                    <a:p>
+                      <a:r>
+                        <a:rPr sz="1100">
+                          <a:solidFill>
+                            <a:srgbClr val="1A1A1A"/>
+                          </a:solidFill>
+                        </a:rPr>
+                        <a:t>18.0</a:t>
+                      </a:r>
+                    </a:p>
+                  </a:txBody>
+                  <a:tcPr/>
+                </a:tc>
+                <a:tc>
+                  <a:txBody>
+                    <a:bodyPr/>
+                    <a:lstStyle/>
+                    <a:p>
+                      <a:r>
+                        <a:rPr sz="1100">
+                          <a:solidFill>
+                            <a:srgbClr val="1A1A1A"/>
+                          </a:solidFill>
+                        </a:rPr>
+                        <a:t>4.0</a:t>
+                      </a:r>
+                    </a:p>
+                  </a:txBody>
+                  <a:tcPr/>
+                </a:tc>
+                <a:tc>
+                  <a:txBody>
+                    <a:bodyPr/>
+                    <a:lstStyle/>
+                    <a:p>
+                      <a:r>
+                        <a:rPr sz="1100">
+                          <a:solidFill>
+                            <a:srgbClr val="1A1A1A"/>
+                          </a:solidFill>
+                        </a:rPr>
+                        <a:t>8.5</a:t>
+                      </a:r>
+                    </a:p>
+                  </a:txBody>
+                  <a:tcPr/>
+                </a:tc>
+                <a:tc>
+                  <a:txBody>
+                    <a:bodyPr/>
+                    <a:lstStyle/>
+                    <a:p>
+                      <a:r>
+                        <a:rPr sz="1100">
+                          <a:solidFill>
+                            <a:srgbClr val="1A1A1A"/>
+                          </a:solidFill>
+                        </a:rPr>
+                        <a:t>5</a:t>
+                      </a:r>
+                    </a:p>
+                  </a:txBody>
+                  <a:tcPr/>
+                </a:tc>
+                <a:tc>
+                  <a:txBody>
+                    <a:bodyPr/>
+                    <a:lstStyle/>
+                    <a:p>
+                      <a:r>
+                        <a:rPr sz="1100">
+                          <a:solidFill>
+                            <a:srgbClr val="1A1A1A"/>
+                          </a:solidFill>
+                        </a:rPr>
+                        <a:t>141.576</a:t>
+                      </a:r>
+                    </a:p>
+                  </a:txBody>
+                  <a:tcPr/>
+                </a:tc>
+                <a:tc>
+                  <a:txBody>
+                    <a:bodyPr/>
+                    <a:lstStyle/>
+                    <a:p>
+                      <a:r>
+                        <a:rPr sz="1100">
+                          <a:solidFill>
+                            <a:srgbClr val="1A1A1A"/>
+                          </a:solidFill>
+                        </a:rPr>
+                        <a:t>42.52</a:t>
+                      </a:r>
+                    </a:p>
+                  </a:txBody>
+                  <a:tcPr/>
+                </a:tc>
+              </a:tr>
+              <a:tr h="487680">
+                <a:tc>
+                  <a:txBody>
+                    <a:bodyPr/>
+                    <a:lstStyle/>
+                    <a:p>
+                      <a:r>
+                        <a:rPr sz="1100">
+                          <a:solidFill>
+                            <a:srgbClr val="1A1A1A"/>
+                          </a:solidFill>
+                        </a:rPr>
+                        <a:t>Yantai Jereh</a:t>
+                      </a:r>
+                    </a:p>
+                  </a:txBody>
+                  <a:tcPr/>
+                </a:tc>
+                <a:tc>
+                  <a:txBody>
+                    <a:bodyPr/>
+                    <a:lstStyle/>
+                    <a:p>
+                      <a:r>
+                        <a:rPr sz="1100">
+                          <a:solidFill>
+                            <a:srgbClr val="1A1A1A"/>
+                          </a:solidFill>
+                        </a:rPr>
+                        <a:t>2.2</a:t>
+                      </a:r>
+                    </a:p>
+                  </a:txBody>
+                  <a:tcPr/>
+                </a:tc>
+                <a:tc>
+                  <a:txBody>
+                    <a:bodyPr/>
+                    <a:lstStyle/>
+                    <a:p>
+                      <a:r>
+                        <a:rPr sz="1100">
+                          <a:solidFill>
+                            <a:srgbClr val="1A1A1A"/>
+                          </a:solidFill>
+                        </a:rPr>
+                        <a:t>8.0</a:t>
+                      </a:r>
+                    </a:p>
+                  </a:txBody>
+                  <a:tcPr/>
+                </a:tc>
+                <a:tc>
+                  <a:txBody>
+                    <a:bodyPr/>
+                    <a:lstStyle/>
+                    <a:p>
+                      <a:r>
+                        <a:rPr sz="1100">
+                          <a:solidFill>
+                            <a:srgbClr val="1A1A1A"/>
+                          </a:solidFill>
+                        </a:rPr>
+                        <a:t>3.0</a:t>
+                      </a:r>
+                    </a:p>
+                  </a:txBody>
+                  <a:tcPr/>
+                </a:tc>
+                <a:tc>
+                  <a:txBody>
+                    <a:bodyPr/>
+                    <a:lstStyle/>
+                    <a:p>
+                      <a:r>
+                        <a:rPr sz="1100">
+                          <a:solidFill>
+                            <a:srgbClr val="1A1A1A"/>
+                          </a:solidFill>
+                        </a:rPr>
+                        <a:t>9.5</a:t>
+                      </a:r>
+                    </a:p>
+                  </a:txBody>
+                  <a:tcPr/>
+                </a:tc>
+                <a:tc>
+                  <a:txBody>
+                    <a:bodyPr/>
+                    <a:lstStyle/>
+                    <a:p>
+                      <a:r>
+                        <a:rPr sz="1100">
+                          <a:solidFill>
+                            <a:srgbClr val="1A1A1A"/>
+                          </a:solidFill>
+                        </a:rPr>
+                        <a:t>5</a:t>
+                      </a:r>
+                    </a:p>
+                  </a:txBody>
+                  <a:tcPr/>
+                </a:tc>
+                <a:tc>
+                  <a:txBody>
+                    <a:bodyPr/>
+                    <a:lstStyle/>
+                    <a:p>
+                      <a:r>
+                        <a:rPr sz="1100">
+                          <a:solidFill>
+                            <a:srgbClr val="1A1A1A"/>
+                          </a:solidFill>
+                        </a:rPr>
+                        <a:t>43.094</a:t>
+                      </a:r>
+                    </a:p>
+                  </a:txBody>
+                  <a:tcPr/>
+                </a:tc>
+                <a:tc>
+                  <a:txBody>
+                    <a:bodyPr/>
+                    <a:lstStyle/>
+                    <a:p>
+                      <a:r>
+                        <a:rPr sz="1100">
+                          <a:solidFill>
+                            <a:srgbClr val="1A1A1A"/>
+                          </a:solidFill>
+                        </a:rPr>
+                        <a:t>42.25</a:t>
+                      </a:r>
+                    </a:p>
+                  </a:txBody>
+                  <a:tcPr/>
+                </a:tc>
+              </a:tr>
+            </a:tbl>
+          </a:graphicData>
+        </a:graphic>
+      </p:graphicFrame>
+      <p:sp>
+        <p:nvSpPr>
+          <p:cNvPr id="4" name="TextBox 3"/>
+          <p:cNvSpPr txBox="1"/>
+          <p:nvPr/>
+        </p:nvSpPr>
+        <p:spPr>
+          <a:xfrm>
+            <a:off x="457200" y="6309360"/>
+            <a:ext cx="11430000" cy="457200"/>
+          </a:xfrm>
+          <a:prstGeom prst="rect">
+            <a:avLst/>
+          </a:prstGeom>
+          <a:noFill/>
+        </p:spPr>
+        <p:txBody>
+          <a:bodyPr wrap="none">
+            <a:spAutoFit/>
+          </a:bodyPr>
+          <a:lstStyle/>
+          <a:p>
+            <a:pPr>
+              <a:defRPr sz="1200" i="1">
+                <a:solidFill>
+                  <a:srgbClr val="666666"/>
+                </a:solidFill>
+              </a:defRPr>
+            </a:pPr>
+            <a:r>
+              <a:t>Simple normalized FCF DCF used as a consistency check against the scenario framework</a:t>
+            </a:r>
+          </a:p>
+        </p:txBody>
+      </p:sp>
+    </p:spTree>
+  </p:cSld>
+  <p:clrMapOvr>
+    <a:masterClrMapping/>
+  </p:clrMapOvr>
+</p:sld>
+</file>
+
+<file path=ppt/slides/slide16.xml><?xml version="1.0" encoding="utf-8"?>
+<p:sld xmlns:a="http://schemas.openxmlformats.org/drawingml/2006/main" xmlns:p="http://schemas.openxmlformats.org/presentationml/2006/main" xmlns:r="http://schemas.openxmlformats.org/officeDocument/2006/relationships">
+  <p:cSld>
+    <p:spTree>
+      <p:nvGrpSpPr>
+        <p:cNvPr id="1" name=""/>
+        <p:cNvGrpSpPr/>
+        <p:nvPr/>
+      </p:nvGrpSpPr>
+      <p:grpSpPr/>
+      <p:sp>
+        <p:nvSpPr>
+          <p:cNvPr id="2" name="TextBox 1"/>
+          <p:cNvSpPr txBox="1"/>
+          <p:nvPr/>
+        </p:nvSpPr>
+        <p:spPr>
+          <a:xfrm>
+            <a:off x="457200" y="274320"/>
+            <a:ext cx="11430000" cy="731520"/>
+          </a:xfrm>
+          <a:prstGeom prst="rect">
+            <a:avLst/>
+          </a:prstGeom>
+          <a:noFill/>
+        </p:spPr>
+        <p:txBody>
+          <a:bodyPr wrap="none">
+            <a:spAutoFit/>
+          </a:bodyPr>
+          <a:lstStyle/>
+          <a:p>
+            <a:pPr>
+              <a:defRPr sz="2800" b="1">
+                <a:solidFill>
+                  <a:srgbClr val="002F5D"/>
+                </a:solidFill>
+              </a:defRPr>
+            </a:pPr>
+            <a:r>
+              <a:t>Long Scenarios: Dongfang Electric</a:t>
             </a:r>
           </a:p>
         </p:txBody>
@@ -5831,75 +6011,75 @@
                             <a:srgbClr val="1A1A1A"/>
                           </a:solidFill>
                         </a:rPr>
+                        <a:t>+15%</a:t>
+                      </a:r>
+                    </a:p>
+                  </a:txBody>
+                  <a:tcPr/>
+                </a:tc>
+                <a:tc>
+                  <a:txBody>
+                    <a:bodyPr/>
+                    <a:lstStyle/>
+                    <a:p>
+                      <a:r>
+                        <a:rPr sz="1100">
+                          <a:solidFill>
+                            <a:srgbClr val="1A1A1A"/>
+                          </a:solidFill>
+                        </a:rPr>
+                        <a:t>32.0x</a:t>
+                      </a:r>
+                    </a:p>
+                  </a:txBody>
+                  <a:tcPr/>
+                </a:tc>
+                <a:tc>
+                  <a:txBody>
+                    <a:bodyPr/>
+                    <a:lstStyle/>
+                    <a:p>
+                      <a:r>
+                        <a:rPr sz="1100">
+                          <a:solidFill>
+                            <a:srgbClr val="1A1A1A"/>
+                          </a:solidFill>
+                        </a:rPr>
+                        <a:t>1.32</a:t>
+                      </a:r>
+                    </a:p>
+                  </a:txBody>
+                  <a:tcPr/>
+                </a:tc>
+                <a:tc>
+                  <a:txBody>
+                    <a:bodyPr/>
+                    <a:lstStyle/>
+                    <a:p>
+                      <a:r>
+                        <a:rPr sz="1100">
+                          <a:solidFill>
+                            <a:srgbClr val="1A1A1A"/>
+                          </a:solidFill>
+                        </a:rPr>
+                        <a:t>42.32</a:t>
+                      </a:r>
+                    </a:p>
+                  </a:txBody>
+                  <a:tcPr/>
+                </a:tc>
+                <a:tc>
+                  <a:txBody>
+                    <a:bodyPr/>
+                    <a:lstStyle/>
+                    <a:p>
+                      <a:r>
+                        <a:rPr sz="1100">
+                          <a:solidFill>
+                            <a:srgbClr val="1A1A1A"/>
+                          </a:solidFill>
+                        </a:rPr>
                         <a:t>+10%</a:t>
-                      </a:r>
-                    </a:p>
-                  </a:txBody>
-                  <a:tcPr/>
-                </a:tc>
-                <a:tc>
-                  <a:txBody>
-                    <a:bodyPr/>
-                    <a:lstStyle/>
-                    <a:p>
-                      <a:r>
-                        <a:rPr sz="1100">
-                          <a:solidFill>
-                            <a:srgbClr val="1A1A1A"/>
-                          </a:solidFill>
-                        </a:rPr>
-                        <a:t>35.0x</a:t>
-                      </a:r>
-                    </a:p>
-                  </a:txBody>
-                  <a:tcPr/>
-                </a:tc>
-                <a:tc>
-                  <a:txBody>
-                    <a:bodyPr/>
-                    <a:lstStyle/>
-                    <a:p>
-                      <a:r>
-                        <a:rPr sz="1100">
-                          <a:solidFill>
-                            <a:srgbClr val="1A1A1A"/>
-                          </a:solidFill>
-                        </a:rPr>
-                        <a:t>4.57</a:t>
-                      </a:r>
-                    </a:p>
-                  </a:txBody>
-                  <a:tcPr/>
-                </a:tc>
-                <a:tc>
-                  <a:txBody>
-                    <a:bodyPr/>
-                    <a:lstStyle/>
-                    <a:p>
-                      <a:r>
-                        <a:rPr sz="1100">
-                          <a:solidFill>
-                            <a:srgbClr val="1A1A1A"/>
-                          </a:solidFill>
-                        </a:rPr>
-                        <a:t>159.78</a:t>
-                      </a:r>
-                    </a:p>
-                  </a:txBody>
-                  <a:tcPr/>
-                </a:tc>
-                <a:tc>
-                  <a:txBody>
-                    <a:bodyPr/>
-                    <a:lstStyle/>
-                    <a:p>
-                      <a:r>
-                        <a:rPr sz="1100">
-                          <a:solidFill>
-                            <a:srgbClr val="1A1A1A"/>
-                          </a:solidFill>
-                        </a:rPr>
-                        <a:t>-18%</a:t>
                       </a:r>
                     </a:p>
                   </a:txBody>
@@ -5952,75 +6132,75 @@
                             <a:srgbClr val="1A1A1A"/>
                           </a:solidFill>
                         </a:rPr>
-                        <a:t>+20%</a:t>
-                      </a:r>
-                    </a:p>
-                  </a:txBody>
-                  <a:tcPr/>
-                </a:tc>
-                <a:tc>
-                  <a:txBody>
-                    <a:bodyPr/>
-                    <a:lstStyle/>
-                    <a:p>
-                      <a:r>
-                        <a:rPr sz="1100">
-                          <a:solidFill>
-                            <a:srgbClr val="1A1A1A"/>
-                          </a:solidFill>
-                        </a:rPr>
-                        <a:t>55.0x</a:t>
-                      </a:r>
-                    </a:p>
-                  </a:txBody>
-                  <a:tcPr/>
-                </a:tc>
-                <a:tc>
-                  <a:txBody>
-                    <a:bodyPr/>
-                    <a:lstStyle/>
-                    <a:p>
-                      <a:r>
-                        <a:rPr sz="1100">
-                          <a:solidFill>
-                            <a:srgbClr val="1A1A1A"/>
-                          </a:solidFill>
-                        </a:rPr>
-                        <a:t>4.98</a:t>
-                      </a:r>
-                    </a:p>
-                  </a:txBody>
-                  <a:tcPr/>
-                </a:tc>
-                <a:tc>
-                  <a:txBody>
-                    <a:bodyPr/>
-                    <a:lstStyle/>
-                    <a:p>
-                      <a:r>
-                        <a:rPr sz="1100">
-                          <a:solidFill>
-                            <a:srgbClr val="1A1A1A"/>
-                          </a:solidFill>
-                        </a:rPr>
-                        <a:t>273.9</a:t>
-                      </a:r>
-                    </a:p>
-                  </a:txBody>
-                  <a:tcPr/>
-                </a:tc>
-                <a:tc>
-                  <a:txBody>
-                    <a:bodyPr/>
-                    <a:lstStyle/>
-                    <a:p>
-                      <a:r>
-                        <a:rPr sz="1100">
-                          <a:solidFill>
-                            <a:srgbClr val="1A1A1A"/>
-                          </a:solidFill>
-                        </a:rPr>
-                        <a:t>+40%</a:t>
+                        <a:t>+25%</a:t>
+                      </a:r>
+                    </a:p>
+                  </a:txBody>
+                  <a:tcPr/>
+                </a:tc>
+                <a:tc>
+                  <a:txBody>
+                    <a:bodyPr/>
+                    <a:lstStyle/>
+                    <a:p>
+                      <a:r>
+                        <a:rPr sz="1100">
+                          <a:solidFill>
+                            <a:srgbClr val="1A1A1A"/>
+                          </a:solidFill>
+                        </a:rPr>
+                        <a:t>38.0x</a:t>
+                      </a:r>
+                    </a:p>
+                  </a:txBody>
+                  <a:tcPr/>
+                </a:tc>
+                <a:tc>
+                  <a:txBody>
+                    <a:bodyPr/>
+                    <a:lstStyle/>
+                    <a:p>
+                      <a:r>
+                        <a:rPr sz="1100">
+                          <a:solidFill>
+                            <a:srgbClr val="1A1A1A"/>
+                          </a:solidFill>
+                        </a:rPr>
+                        <a:t>1.44</a:t>
+                      </a:r>
+                    </a:p>
+                  </a:txBody>
+                  <a:tcPr/>
+                </a:tc>
+                <a:tc>
+                  <a:txBody>
+                    <a:bodyPr/>
+                    <a:lstStyle/>
+                    <a:p>
+                      <a:r>
+                        <a:rPr sz="1100">
+                          <a:solidFill>
+                            <a:srgbClr val="1A1A1A"/>
+                          </a:solidFill>
+                        </a:rPr>
+                        <a:t>54.62</a:t>
+                      </a:r>
+                    </a:p>
+                  </a:txBody>
+                  <a:tcPr/>
+                </a:tc>
+                <a:tc>
+                  <a:txBody>
+                    <a:bodyPr/>
+                    <a:lstStyle/>
+                    <a:p>
+                      <a:r>
+                        <a:rPr sz="1100">
+                          <a:solidFill>
+                            <a:srgbClr val="1A1A1A"/>
+                          </a:solidFill>
+                        </a:rPr>
+                        <a:t>+42%</a:t>
                       </a:r>
                     </a:p>
                   </a:txBody>
@@ -6073,75 +6253,75 @@
                             <a:srgbClr val="1A1A1A"/>
                           </a:solidFill>
                         </a:rPr>
-                        <a:t>+35%</a:t>
-                      </a:r>
-                    </a:p>
-                  </a:txBody>
-                  <a:tcPr/>
-                </a:tc>
-                <a:tc>
-                  <a:txBody>
-                    <a:bodyPr/>
-                    <a:lstStyle/>
-                    <a:p>
-                      <a:r>
-                        <a:rPr sz="1100">
-                          <a:solidFill>
-                            <a:srgbClr val="1A1A1A"/>
-                          </a:solidFill>
-                        </a:rPr>
-                        <a:t>65.0x</a:t>
-                      </a:r>
-                    </a:p>
-                  </a:txBody>
-                  <a:tcPr/>
-                </a:tc>
-                <a:tc>
-                  <a:txBody>
-                    <a:bodyPr/>
-                    <a:lstStyle/>
-                    <a:p>
-                      <a:r>
-                        <a:rPr sz="1100">
-                          <a:solidFill>
-                            <a:srgbClr val="1A1A1A"/>
-                          </a:solidFill>
-                        </a:rPr>
-                        <a:t>5.6</a:t>
-                      </a:r>
-                    </a:p>
-                  </a:txBody>
-                  <a:tcPr/>
-                </a:tc>
-                <a:tc>
-                  <a:txBody>
-                    <a:bodyPr/>
-                    <a:lstStyle/>
-                    <a:p>
-                      <a:r>
-                        <a:rPr sz="1100">
-                          <a:solidFill>
-                            <a:srgbClr val="1A1A1A"/>
-                          </a:solidFill>
-                        </a:rPr>
-                        <a:t>364.16</a:t>
-                      </a:r>
-                    </a:p>
-                  </a:txBody>
-                  <a:tcPr/>
-                </a:tc>
-                <a:tc>
-                  <a:txBody>
-                    <a:bodyPr/>
-                    <a:lstStyle/>
-                    <a:p>
-                      <a:r>
-                        <a:rPr sz="1100">
-                          <a:solidFill>
-                            <a:srgbClr val="1A1A1A"/>
-                          </a:solidFill>
-                        </a:rPr>
-                        <a:t>+87%</a:t>
+                        <a:t>+40%</a:t>
+                      </a:r>
+                    </a:p>
+                  </a:txBody>
+                  <a:tcPr/>
+                </a:tc>
+                <a:tc>
+                  <a:txBody>
+                    <a:bodyPr/>
+                    <a:lstStyle/>
+                    <a:p>
+                      <a:r>
+                        <a:rPr sz="1100">
+                          <a:solidFill>
+                            <a:srgbClr val="1A1A1A"/>
+                          </a:solidFill>
+                        </a:rPr>
+                        <a:t>45.0x</a:t>
+                      </a:r>
+                    </a:p>
+                  </a:txBody>
+                  <a:tcPr/>
+                </a:tc>
+                <a:tc>
+                  <a:txBody>
+                    <a:bodyPr/>
+                    <a:lstStyle/>
+                    <a:p>
+                      <a:r>
+                        <a:rPr sz="1100">
+                          <a:solidFill>
+                            <a:srgbClr val="1A1A1A"/>
+                          </a:solidFill>
+                        </a:rPr>
+                        <a:t>1.61</a:t>
+                      </a:r>
+                    </a:p>
+                  </a:txBody>
+                  <a:tcPr/>
+                </a:tc>
+                <a:tc>
+                  <a:txBody>
+                    <a:bodyPr/>
+                    <a:lstStyle/>
+                    <a:p>
+                      <a:r>
+                        <a:rPr sz="1100">
+                          <a:solidFill>
+                            <a:srgbClr val="1A1A1A"/>
+                          </a:solidFill>
+                        </a:rPr>
+                        <a:t>72.45</a:t>
+                      </a:r>
+                    </a:p>
+                  </a:txBody>
+                  <a:tcPr/>
+                </a:tc>
+                <a:tc>
+                  <a:txBody>
+                    <a:bodyPr/>
+                    <a:lstStyle/>
+                    <a:p>
+                      <a:r>
+                        <a:rPr sz="1100">
+                          <a:solidFill>
+                            <a:srgbClr val="1A1A1A"/>
+                          </a:solidFill>
+                        </a:rPr>
+                        <a:t>+89%</a:t>
                       </a:r>
                     </a:p>
                   </a:txBody>
@@ -6212,7 +6392,7 @@
 </p:sld>
 </file>
 
-<file path=ppt/slides/slide16.xml><?xml version="1.0" encoding="utf-8"?>
+<file path=ppt/slides/slide17.xml><?xml version="1.0" encoding="utf-8"?>
 <p:sld xmlns:a="http://schemas.openxmlformats.org/drawingml/2006/main" xmlns:p="http://schemas.openxmlformats.org/presentationml/2006/main" xmlns:r="http://schemas.openxmlformats.org/officeDocument/2006/relationships">
   <p:cSld>
     <p:spTree>
@@ -6252,7 +6432,7 @@
               </a:defRPr>
             </a:pPr>
             <a:r>
-              <a:t>Short Scenarios: Halliburton</a:t>
+              <a:t>Short Scenarios: Yantai Jereh</a:t>
             </a:r>
           </a:p>
         </p:txBody>
@@ -6462,75 +6642,75 @@
                             <a:srgbClr val="1A1A1A"/>
                           </a:solidFill>
                         </a:rPr>
-                        <a:t>-20%</a:t>
-                      </a:r>
-                    </a:p>
-                  </a:txBody>
-                  <a:tcPr/>
-                </a:tc>
-                <a:tc>
-                  <a:txBody>
-                    <a:bodyPr/>
-                    <a:lstStyle/>
-                    <a:p>
-                      <a:r>
-                        <a:rPr sz="1100">
-                          <a:solidFill>
-                            <a:srgbClr val="1A1A1A"/>
-                          </a:solidFill>
-                        </a:rPr>
-                        <a:t>12.0x</a:t>
-                      </a:r>
-                    </a:p>
-                  </a:txBody>
-                  <a:tcPr/>
-                </a:tc>
-                <a:tc>
-                  <a:txBody>
-                    <a:bodyPr/>
-                    <a:lstStyle/>
-                    <a:p>
-                      <a:r>
-                        <a:rPr sz="1100">
-                          <a:solidFill>
-                            <a:srgbClr val="1A1A1A"/>
-                          </a:solidFill>
-                        </a:rPr>
-                        <a:t>1.45</a:t>
-                      </a:r>
-                    </a:p>
-                  </a:txBody>
-                  <a:tcPr/>
-                </a:tc>
-                <a:tc>
-                  <a:txBody>
-                    <a:bodyPr/>
-                    <a:lstStyle/>
-                    <a:p>
-                      <a:r>
-                        <a:rPr sz="1100">
-                          <a:solidFill>
-                            <a:srgbClr val="1A1A1A"/>
-                          </a:solidFill>
-                        </a:rPr>
-                        <a:t>17.38</a:t>
-                      </a:r>
-                    </a:p>
-                  </a:txBody>
-                  <a:tcPr/>
-                </a:tc>
-                <a:tc>
-                  <a:txBody>
-                    <a:bodyPr/>
-                    <a:lstStyle/>
-                    <a:p>
-                      <a:r>
-                        <a:rPr sz="1100">
-                          <a:solidFill>
-                            <a:srgbClr val="1A1A1A"/>
-                          </a:solidFill>
-                        </a:rPr>
-                        <a:t>-57%</a:t>
+                        <a:t>-5%</a:t>
+                      </a:r>
+                    </a:p>
+                  </a:txBody>
+                  <a:tcPr/>
+                </a:tc>
+                <a:tc>
+                  <a:txBody>
+                    <a:bodyPr/>
+                    <a:lstStyle/>
+                    <a:p>
+                      <a:r>
+                        <a:rPr sz="1100">
+                          <a:solidFill>
+                            <a:srgbClr val="1A1A1A"/>
+                          </a:solidFill>
+                        </a:rPr>
+                        <a:t>34.0x</a:t>
+                      </a:r>
+                    </a:p>
+                  </a:txBody>
+                  <a:tcPr/>
+                </a:tc>
+                <a:tc>
+                  <a:txBody>
+                    <a:bodyPr/>
+                    <a:lstStyle/>
+                    <a:p>
+                      <a:r>
+                        <a:rPr sz="1100">
+                          <a:solidFill>
+                            <a:srgbClr val="1A1A1A"/>
+                          </a:solidFill>
+                        </a:rPr>
+                        <a:t>2.51</a:t>
+                      </a:r>
+                    </a:p>
+                  </a:txBody>
+                  <a:tcPr/>
+                </a:tc>
+                <a:tc>
+                  <a:txBody>
+                    <a:bodyPr/>
+                    <a:lstStyle/>
+                    <a:p>
+                      <a:r>
+                        <a:rPr sz="1100">
+                          <a:solidFill>
+                            <a:srgbClr val="1A1A1A"/>
+                          </a:solidFill>
+                        </a:rPr>
+                        <a:t>85.27</a:t>
+                      </a:r>
+                    </a:p>
+                  </a:txBody>
+                  <a:tcPr/>
+                </a:tc>
+                <a:tc>
+                  <a:txBody>
+                    <a:bodyPr/>
+                    <a:lstStyle/>
+                    <a:p>
+                      <a:r>
+                        <a:rPr sz="1100">
+                          <a:solidFill>
+                            <a:srgbClr val="1A1A1A"/>
+                          </a:solidFill>
+                        </a:rPr>
+                        <a:t>-31%</a:t>
                       </a:r>
                     </a:p>
                   </a:txBody>
@@ -6583,75 +6763,75 @@
                             <a:srgbClr val="1A1A1A"/>
                           </a:solidFill>
                         </a:rPr>
-                        <a:t>-8%</a:t>
-                      </a:r>
-                    </a:p>
-                  </a:txBody>
-                  <a:tcPr/>
-                </a:tc>
-                <a:tc>
-                  <a:txBody>
-                    <a:bodyPr/>
-                    <a:lstStyle/>
-                    <a:p>
-                      <a:r>
-                        <a:rPr sz="1100">
-                          <a:solidFill>
-                            <a:srgbClr val="1A1A1A"/>
-                          </a:solidFill>
-                        </a:rPr>
-                        <a:t>18.0x</a:t>
-                      </a:r>
-                    </a:p>
-                  </a:txBody>
-                  <a:tcPr/>
-                </a:tc>
-                <a:tc>
-                  <a:txBody>
-                    <a:bodyPr/>
-                    <a:lstStyle/>
-                    <a:p>
-                      <a:r>
-                        <a:rPr sz="1100">
-                          <a:solidFill>
-                            <a:srgbClr val="1A1A1A"/>
-                          </a:solidFill>
-                        </a:rPr>
-                        <a:t>1.67</a:t>
-                      </a:r>
-                    </a:p>
-                  </a:txBody>
-                  <a:tcPr/>
-                </a:tc>
-                <a:tc>
-                  <a:txBody>
-                    <a:bodyPr/>
-                    <a:lstStyle/>
-                    <a:p>
-                      <a:r>
-                        <a:rPr sz="1100">
-                          <a:solidFill>
-                            <a:srgbClr val="1A1A1A"/>
-                          </a:solidFill>
-                        </a:rPr>
-                        <a:t>29.97</a:t>
-                      </a:r>
-                    </a:p>
-                  </a:txBody>
-                  <a:tcPr/>
-                </a:tc>
-                <a:tc>
-                  <a:txBody>
-                    <a:bodyPr/>
-                    <a:lstStyle/>
-                    <a:p>
-                      <a:r>
-                        <a:rPr sz="1100">
-                          <a:solidFill>
-                            <a:srgbClr val="1A1A1A"/>
-                          </a:solidFill>
-                        </a:rPr>
-                        <a:t>-25%</a:t>
+                        <a:t>+5%</a:t>
+                      </a:r>
+                    </a:p>
+                  </a:txBody>
+                  <a:tcPr/>
+                </a:tc>
+                <a:tc>
+                  <a:txBody>
+                    <a:bodyPr/>
+                    <a:lstStyle/>
+                    <a:p>
+                      <a:r>
+                        <a:rPr sz="1100">
+                          <a:solidFill>
+                            <a:srgbClr val="1A1A1A"/>
+                          </a:solidFill>
+                        </a:rPr>
+                        <a:t>40.0x</a:t>
+                      </a:r>
+                    </a:p>
+                  </a:txBody>
+                  <a:tcPr/>
+                </a:tc>
+                <a:tc>
+                  <a:txBody>
+                    <a:bodyPr/>
+                    <a:lstStyle/>
+                    <a:p>
+                      <a:r>
+                        <a:rPr sz="1100">
+                          <a:solidFill>
+                            <a:srgbClr val="1A1A1A"/>
+                          </a:solidFill>
+                        </a:rPr>
+                        <a:t>2.77</a:t>
+                      </a:r>
+                    </a:p>
+                  </a:txBody>
+                  <a:tcPr/>
+                </a:tc>
+                <a:tc>
+                  <a:txBody>
+                    <a:bodyPr/>
+                    <a:lstStyle/>
+                    <a:p>
+                      <a:r>
+                        <a:rPr sz="1100">
+                          <a:solidFill>
+                            <a:srgbClr val="1A1A1A"/>
+                          </a:solidFill>
+                        </a:rPr>
+                        <a:t>110.88</a:t>
+                      </a:r>
+                    </a:p>
+                  </a:txBody>
+                  <a:tcPr/>
+                </a:tc>
+                <a:tc>
+                  <a:txBody>
+                    <a:bodyPr/>
+                    <a:lstStyle/>
+                    <a:p>
+                      <a:r>
+                        <a:rPr sz="1100">
+                          <a:solidFill>
+                            <a:srgbClr val="1A1A1A"/>
+                          </a:solidFill>
+                        </a:rPr>
+                        <a:t>-11%</a:t>
                       </a:r>
                     </a:p>
                   </a:txBody>
@@ -6704,75 +6884,75 @@
                             <a:srgbClr val="1A1A1A"/>
                           </a:solidFill>
                         </a:rPr>
-                        <a:t>+10%</a:t>
-                      </a:r>
-                    </a:p>
-                  </a:txBody>
-                  <a:tcPr/>
-                </a:tc>
-                <a:tc>
-                  <a:txBody>
-                    <a:bodyPr/>
-                    <a:lstStyle/>
-                    <a:p>
-                      <a:r>
-                        <a:rPr sz="1100">
-                          <a:solidFill>
-                            <a:srgbClr val="1A1A1A"/>
-                          </a:solidFill>
-                        </a:rPr>
-                        <a:t>22.0x</a:t>
-                      </a:r>
-                    </a:p>
-                  </a:txBody>
-                  <a:tcPr/>
-                </a:tc>
-                <a:tc>
-                  <a:txBody>
-                    <a:bodyPr/>
-                    <a:lstStyle/>
-                    <a:p>
-                      <a:r>
-                        <a:rPr sz="1100">
-                          <a:solidFill>
-                            <a:srgbClr val="1A1A1A"/>
-                          </a:solidFill>
-                        </a:rPr>
-                        <a:t>1.99</a:t>
-                      </a:r>
-                    </a:p>
-                  </a:txBody>
-                  <a:tcPr/>
-                </a:tc>
-                <a:tc>
-                  <a:txBody>
-                    <a:bodyPr/>
-                    <a:lstStyle/>
-                    <a:p>
-                      <a:r>
-                        <a:rPr sz="1100">
-                          <a:solidFill>
-                            <a:srgbClr val="1A1A1A"/>
-                          </a:solidFill>
-                        </a:rPr>
-                        <a:t>43.8</a:t>
-                      </a:r>
-                    </a:p>
-                  </a:txBody>
-                  <a:tcPr/>
-                </a:tc>
-                <a:tc>
-                  <a:txBody>
-                    <a:bodyPr/>
-                    <a:lstStyle/>
-                    <a:p>
-                      <a:r>
-                        <a:rPr sz="1100">
-                          <a:solidFill>
-                            <a:srgbClr val="1A1A1A"/>
-                          </a:solidFill>
-                        </a:rPr>
-                        <a:t>+9%</a:t>
+                        <a:t>+20%</a:t>
+                      </a:r>
+                    </a:p>
+                  </a:txBody>
+                  <a:tcPr/>
+                </a:tc>
+                <a:tc>
+                  <a:txBody>
+                    <a:bodyPr/>
+                    <a:lstStyle/>
+                    <a:p>
+                      <a:r>
+                        <a:rPr sz="1100">
+                          <a:solidFill>
+                            <a:srgbClr val="1A1A1A"/>
+                          </a:solidFill>
+                        </a:rPr>
+                        <a:t>46.0x</a:t>
+                      </a:r>
+                    </a:p>
+                  </a:txBody>
+                  <a:tcPr/>
+                </a:tc>
+                <a:tc>
+                  <a:txBody>
+                    <a:bodyPr/>
+                    <a:lstStyle/>
+                    <a:p>
+                      <a:r>
+                        <a:rPr sz="1100">
+                          <a:solidFill>
+                            <a:srgbClr val="1A1A1A"/>
+                          </a:solidFill>
+                        </a:rPr>
+                        <a:t>3.17</a:t>
+                      </a:r>
+                    </a:p>
+                  </a:txBody>
+                  <a:tcPr/>
+                </a:tc>
+                <a:tc>
+                  <a:txBody>
+                    <a:bodyPr/>
+                    <a:lstStyle/>
+                    <a:p>
+                      <a:r>
+                        <a:rPr sz="1100">
+                          <a:solidFill>
+                            <a:srgbClr val="1A1A1A"/>
+                          </a:solidFill>
+                        </a:rPr>
+                        <a:t>145.73</a:t>
+                      </a:r>
+                    </a:p>
+                  </a:txBody>
+                  <a:tcPr/>
+                </a:tc>
+                <a:tc>
+                  <a:txBody>
+                    <a:bodyPr/>
+                    <a:lstStyle/>
+                    <a:p>
+                      <a:r>
+                        <a:rPr sz="1100">
+                          <a:solidFill>
+                            <a:srgbClr val="1A1A1A"/>
+                          </a:solidFill>
+                        </a:rPr>
+                        <a:t>+17%</a:t>
                       </a:r>
                     </a:p>
                   </a:txBody>
@@ -6843,7 +7023,7 @@
 </p:sld>
 </file>
 
-<file path=ppt/slides/slide17.xml><?xml version="1.0" encoding="utf-8"?>
+<file path=ppt/slides/slide18.xml><?xml version="1.0" encoding="utf-8"?>
 <p:sld xmlns:a="http://schemas.openxmlformats.org/drawingml/2006/main" xmlns:p="http://schemas.openxmlformats.org/presentationml/2006/main" xmlns:r="http://schemas.openxmlformats.org/officeDocument/2006/relationships">
   <p:cSld>
     <p:spTree>
@@ -6883,7 +7063,7 @@
               </a:defRPr>
             </a:pPr>
             <a:r>
-              <a:t>EPS Sensitivity: What Drives Sieyuan Valuation?</a:t>
+              <a:t>EPS Sensitivity: What Drives Dongfang Valuation?</a:t>
             </a:r>
           </a:p>
         </p:txBody>
@@ -6942,203 +7122,7 @@
               </a:defRPr>
             </a:pPr>
             <a:r>
-              <a:t>Base case EPS ¥1.33. Gross margin is the key driver (±63%). Overseas mix + FX are secondary.</a:t>
-            </a:r>
-          </a:p>
-        </p:txBody>
-      </p:sp>
-    </p:spTree>
-  </p:cSld>
-  <p:clrMapOvr>
-    <a:masterClrMapping/>
-  </p:clrMapOvr>
-</p:sld>
-</file>
-
-<file path=ppt/slides/slide18.xml><?xml version="1.0" encoding="utf-8"?>
-<p:sld xmlns:a="http://schemas.openxmlformats.org/drawingml/2006/main" xmlns:p="http://schemas.openxmlformats.org/presentationml/2006/main" xmlns:r="http://schemas.openxmlformats.org/officeDocument/2006/relationships">
-  <p:cSld>
-    <p:spTree>
-      <p:nvGrpSpPr>
-        <p:cNvPr id="1" name=""/>
-        <p:cNvGrpSpPr/>
-        <p:nvPr/>
-      </p:nvGrpSpPr>
-      <p:grpSpPr/>
-      <p:sp>
-        <p:nvSpPr>
-          <p:cNvPr id="2" name="TextBox 1"/>
-          <p:cNvSpPr txBox="1"/>
-          <p:nvPr/>
-        </p:nvSpPr>
-        <p:spPr>
-          <a:xfrm>
-            <a:off x="457200" y="274320"/>
-            <a:ext cx="11430000" cy="731520"/>
-          </a:xfrm>
-          <a:prstGeom prst="rect">
-            <a:avLst/>
-          </a:prstGeom>
-          <a:noFill/>
-        </p:spPr>
-        <p:txBody>
-          <a:bodyPr wrap="square">
-            <a:spAutoFit/>
-          </a:bodyPr>
-          <a:lstStyle/>
-          <a:p>
-            <a:pPr>
-              <a:defRPr sz="2800" b="1">
-                <a:solidFill>
-                  <a:srgbClr val="002F5D"/>
-                </a:solidFill>
-              </a:defRPr>
-            </a:pPr>
-            <a:r>
-              <a:t>Catalysts Over Next 6-12 Months</a:t>
-            </a:r>
-          </a:p>
-        </p:txBody>
-      </p:sp>
-      <p:sp>
-        <p:nvSpPr>
-          <p:cNvPr id="3" name="TextBox 2"/>
-          <p:cNvSpPr txBox="1"/>
-          <p:nvPr/>
-        </p:nvSpPr>
-        <p:spPr>
-          <a:xfrm>
-            <a:off x="640080" y="1188720"/>
-            <a:ext cx="10972800" cy="5029200"/>
-          </a:xfrm>
-          <a:prstGeom prst="rect">
-            <a:avLst/>
-          </a:prstGeom>
-          <a:noFill/>
-        </p:spPr>
-        <p:txBody>
-          <a:bodyPr wrap="square">
-            <a:spAutoFit/>
-          </a:bodyPr>
-          <a:lstStyle/>
-          <a:p>
-            <a:pPr>
-              <a:spcAft>
-                <a:spcPts val="800"/>
-              </a:spcAft>
-              <a:defRPr sz="1800">
-                <a:solidFill>
-                  <a:srgbClr val="1A1A1A"/>
-                </a:solidFill>
-              </a:defRPr>
-            </a:pPr>
-            <a:r>
-              <a:t>• LONG CATALYSTS (Sieyuan):</a:t>
-            </a:r>
-          </a:p>
-          <a:p>
-            <a:pPr>
-              <a:spcAft>
-                <a:spcPts val="800"/>
-              </a:spcAft>
-              <a:defRPr sz="1800">
-                <a:solidFill>
-                  <a:srgbClr val="1A1A1A"/>
-                </a:solidFill>
-              </a:defRPr>
-            </a:pPr>
-            <a:r>
-              <a:t>•   • Quarterly overseas order wins (Middle East, SE Asia)</a:t>
-            </a:r>
-          </a:p>
-          <a:p>
-            <a:pPr>
-              <a:spcAft>
-                <a:spcPts val="800"/>
-              </a:spcAft>
-              <a:defRPr sz="1800">
-                <a:solidFill>
-                  <a:srgbClr val="1A1A1A"/>
-                </a:solidFill>
-              </a:defRPr>
-            </a:pPr>
-            <a:r>
-              <a:t>•   • China State Grid capex announcements</a:t>
-            </a:r>
-          </a:p>
-          <a:p>
-            <a:pPr>
-              <a:spcAft>
-                <a:spcPts val="800"/>
-              </a:spcAft>
-              <a:defRPr sz="1800">
-                <a:solidFill>
-                  <a:srgbClr val="1A1A1A"/>
-                </a:solidFill>
-              </a:defRPr>
-            </a:pPr>
-            <a:r>
-              <a:t>•   • Gross margin expansion on overseas mix shift</a:t>
-            </a:r>
-          </a:p>
-          <a:p>
-            <a:pPr>
-              <a:spcAft>
-                <a:spcPts val="800"/>
-              </a:spcAft>
-              <a:defRPr sz="1800">
-                <a:solidFill>
-                  <a:srgbClr val="1A1A1A"/>
-                </a:solidFill>
-              </a:defRPr>
-            </a:pPr>
-            <a:r>
-              <a:t>• SHORT CATALYSTS (Halliburton):</a:t>
-            </a:r>
-          </a:p>
-          <a:p>
-            <a:pPr>
-              <a:spcAft>
-                <a:spcPts val="800"/>
-              </a:spcAft>
-              <a:defRPr sz="1800">
-                <a:solidFill>
-                  <a:srgbClr val="1A1A1A"/>
-                </a:solidFill>
-              </a:defRPr>
-            </a:pPr>
-            <a:r>
-              <a:t>•   • Q2 earnings miss on logistics cost</a:t>
-            </a:r>
-          </a:p>
-          <a:p>
-            <a:pPr>
-              <a:spcAft>
-                <a:spcPts val="800"/>
-              </a:spcAft>
-              <a:defRPr sz="1800">
-                <a:solidFill>
-                  <a:srgbClr val="1A1A1A"/>
-                </a:solidFill>
-              </a:defRPr>
-            </a:pPr>
-            <a:r>
-              <a:t>•   • Guidance cut on North American rig count</a:t>
-            </a:r>
-          </a:p>
-          <a:p>
-            <a:pPr>
-              <a:spcAft>
-                <a:spcPts val="800"/>
-              </a:spcAft>
-              <a:defRPr sz="1800">
-                <a:solidFill>
-                  <a:srgbClr val="1A1A1A"/>
-                </a:solidFill>
-              </a:defRPr>
-            </a:pPr>
-            <a:r>
-              <a:t>•   • Project deferral announcements from majors</a:t>
+              <a:t>Base case EPS ¥3.5. Grid equipment margin + State Grid orders are key drivers. Overseas export mix secondary.</a:t>
             </a:r>
           </a:p>
         </p:txBody>
@@ -7191,7 +7175,7 @@
               </a:defRPr>
             </a:pPr>
             <a:r>
-              <a:t>Risks and Mitigants</a:t>
+              <a:t>Catalysts Over Next 6-12 Months</a:t>
             </a:r>
           </a:p>
         </p:txBody>
@@ -7229,7 +7213,7 @@
               </a:defRPr>
             </a:pPr>
             <a:r>
-              <a:t>• Oil price spike lifts HAL even if fundamentals weak → pair trade cushions absolute exposure</a:t>
+              <a:t>• LONG CATALYSTS (Dongfang):</a:t>
             </a:r>
           </a:p>
           <a:p>
@@ -7244,7 +7228,7 @@
               </a:defRPr>
             </a:pPr>
             <a:r>
-              <a:t>• Sieyuan China beta/multiple compression → offset by overseas revenue visibility</a:t>
+              <a:t>•   • Quarterly overseas order wins (Middle East, SE Asia)</a:t>
             </a:r>
           </a:p>
           <a:p>
@@ -7259,7 +7243,7 @@
               </a:defRPr>
             </a:pPr>
             <a:r>
-              <a:t>• Grid capex delays → multi-year policy demand reduces single-year risk</a:t>
+              <a:t>•   • China State Grid capex announcements</a:t>
             </a:r>
           </a:p>
           <a:p>
@@ -7274,7 +7258,7 @@
               </a:defRPr>
             </a:pPr>
             <a:r>
-              <a:t>• FX risk on RMB → monitored; sensitivity table in appendix</a:t>
+              <a:t>•   • Gross margin expansion on overseas mix shift</a:t>
             </a:r>
           </a:p>
           <a:p>
@@ -7289,7 +7273,7 @@
               </a:defRPr>
             </a:pPr>
             <a:r>
-              <a:t>• SHORT SQUEEZE / BORROW COST: HAL borrow cost ~2-5% annually; oil-spike short squeeze possible → position size limits risk</a:t>
+              <a:t>• SHORT CATALYSTS (Yantai Jereh):  • Q2 earnings miss on logistics cost</a:t>
             </a:r>
           </a:p>
           <a:p>
@@ -7304,7 +7288,22 @@
               </a:defRPr>
             </a:pPr>
             <a:r>
-              <a:t>• Thesis kill switch: HAL margin expansion + Sieyuan backlog decline → exit pair</a:t>
+              <a:t>•   • Guidance cut on North American rig count</a:t>
+            </a:r>
+          </a:p>
+          <a:p>
+            <a:pPr>
+              <a:spcAft>
+                <a:spcPts val="800"/>
+              </a:spcAft>
+              <a:defRPr sz="1800">
+                <a:solidFill>
+                  <a:srgbClr val="1A1A1A"/>
+                </a:solidFill>
+              </a:defRPr>
+            </a:pPr>
+            <a:r>
+              <a:t>•   • Project deferral announcements from majors</a:t>
             </a:r>
           </a:p>
         </p:txBody>
@@ -7395,7 +7394,7 @@
               </a:defRPr>
             </a:pPr>
             <a:r>
-              <a:t>• Thesis: Own grid infrastructure to capture the electricity-continuity shift</a:t>
+              <a:t>• Thesis: Own grid integration leader capturing State Grid RMB 4T capex + synchronous condenser breakthrough</a:t>
             </a:r>
           </a:p>
           <a:p>
@@ -7410,7 +7409,7 @@
               </a:defRPr>
             </a:pPr>
             <a:r>
-              <a:t>• Long Sieyuan Electric @ target upside: 40.1%</a:t>
+              <a:t>• Long Dongfang Electric @ target upside: 47.6%</a:t>
             </a:r>
           </a:p>
           <a:p>
@@ -7425,7 +7424,7 @@
               </a:defRPr>
             </a:pPr>
             <a:r>
-              <a:t>• Short Halliburton @ target downside: -29.4%</a:t>
+              <a:t>• Short Yantai Jereh @ target downside: -12.2%</a:t>
             </a:r>
           </a:p>
           <a:p>
@@ -7440,7 +7439,7 @@
               </a:defRPr>
             </a:pPr>
             <a:r>
-              <a:t>• Pair spread expected return: 69.6%</a:t>
+              <a:t>• Pair spread expected return: 59.8%</a:t>
             </a:r>
           </a:p>
           <a:p>
@@ -7470,7 +7469,7 @@
               </a:defRPr>
             </a:pPr>
             <a:r>
-              <a:t>• Key catalysts: Sieyuan overseas wins, HAL Q2 guidance miss, grid policy announcements</a:t>
+              <a:t>• Key catalysts: State Grid 4T RMB capex, Dongfang synchronous condenser orders, Jereh margin pressure</a:t>
             </a:r>
           </a:p>
         </p:txBody>
@@ -7523,7 +7522,7 @@
               </a:defRPr>
             </a:pPr>
             <a:r>
-              <a:t>Execution: Position Sizing, Carry &amp; Liquidity</a:t>
+              <a:t>Risks and Mitigants</a:t>
             </a:r>
           </a:p>
         </p:txBody>
@@ -7561,7 +7560,7 @@
               </a:defRPr>
             </a:pPr>
             <a:r>
-              <a:t>• POSITION SIZING (Risk-Based):</a:t>
+              <a:t>• Oil price spike may lift Jereh temporarily → pair trade cushions absolute exposure</a:t>
             </a:r>
           </a:p>
           <a:p>
@@ -7576,7 +7575,7 @@
               </a:defRPr>
             </a:pPr>
             <a:r>
-              <a:t>•   • Portfolio: $100M example | Max risk per trade: 2% ($2M)</a:t>
+              <a:t>• Dongfang China beta/multiple compression → offset by 140B RMB backlog visibility</a:t>
             </a:r>
           </a:p>
           <a:p>
@@ -7591,7 +7590,7 @@
               </a:defRPr>
             </a:pPr>
             <a:r>
-              <a:t>•   • Pair volatility: 42% annual | Position size: 2.4% of portfolio ($2.4M notional)</a:t>
+              <a:t>• Grid capex delays → multi-year policy demand reduces single-year risk</a:t>
             </a:r>
           </a:p>
           <a:p>
@@ -7606,7 +7605,7 @@
               </a:defRPr>
             </a:pPr>
             <a:r>
-              <a:t>•   • Allocation: $1.2M long Sieyuan / $1.2M short HAL (dollar-neutral)</a:t>
+              <a:t>• FX risk on RMB → monitored; sensitivity table in appendix</a:t>
             </a:r>
           </a:p>
           <a:p>
@@ -7621,7 +7620,7 @@
               </a:defRPr>
             </a:pPr>
             <a:r>
-              <a:t>• </a:t>
+              <a:t>• SHORT SQUEEZE / BORROW COST: Jereh borrow cost ~2.5-7% (China A-share); position sizing limits risk</a:t>
             </a:r>
           </a:p>
           <a:p>
@@ -7636,202 +7635,7 @@
               </a:defRPr>
             </a:pPr>
             <a:r>
-              <a:t>• CARRY COST (6-month hold):</a:t>
-            </a:r>
-          </a:p>
-          <a:p>
-            <a:pPr>
-              <a:spcAft>
-                <a:spcPts val="800"/>
-              </a:spcAft>
-              <a:defRPr sz="1800">
-                <a:solidFill>
-                  <a:srgbClr val="1A1A1A"/>
-                </a:solidFill>
-              </a:defRPr>
-            </a:pPr>
-            <a:r>
-              <a:t>•   • HAL borrow cost: 2-5% annually → $15K-33K cost</a:t>
-            </a:r>
-          </a:p>
-          <a:p>
-            <a:pPr>
-              <a:spcAft>
-                <a:spcPts val="800"/>
-              </a:spcAft>
-              <a:defRPr sz="1800">
-                <a:solidFill>
-                  <a:srgbClr val="1A1A1A"/>
-                </a:solidFill>
-              </a:defRPr>
-            </a:pPr>
-            <a:r>
-              <a:t>•   • HAL dividend (short pays): 1.5% → ~$9K cost</a:t>
-            </a:r>
-          </a:p>
-          <a:p>
-            <a:pPr>
-              <a:spcAft>
-                <a:spcPts val="800"/>
-              </a:spcAft>
-              <a:defRPr sz="1800">
-                <a:solidFill>
-                  <a:srgbClr val="1A1A1A"/>
-                </a:solidFill>
-              </a:defRPr>
-            </a:pPr>
-            <a:r>
-              <a:t>•   • Sieyuan dividend (long receives): 1% → ~$6K income</a:t>
-            </a:r>
-          </a:p>
-          <a:p>
-            <a:pPr>
-              <a:spcAft>
-                <a:spcPts val="800"/>
-              </a:spcAft>
-              <a:defRPr sz="1800">
-                <a:solidFill>
-                  <a:srgbClr val="1A1A1A"/>
-                </a:solidFill>
-              </a:defRPr>
-            </a:pPr>
-            <a:r>
-              <a:t>•   • Net carry: ~$18K-36K (1.5-3% of expected spread return)</a:t>
-            </a:r>
-          </a:p>
-          <a:p>
-            <a:pPr>
-              <a:spcAft>
-                <a:spcPts val="800"/>
-              </a:spcAft>
-              <a:defRPr sz="1800">
-                <a:solidFill>
-                  <a:srgbClr val="1A1A1A"/>
-                </a:solidFill>
-              </a:defRPr>
-            </a:pPr>
-            <a:r>
-              <a:t>• </a:t>
-            </a:r>
-          </a:p>
-          <a:p>
-            <a:pPr>
-              <a:spcAft>
-                <a:spcPts val="800"/>
-              </a:spcAft>
-              <a:defRPr sz="1800">
-                <a:solidFill>
-                  <a:srgbClr val="1A1A1A"/>
-                </a:solidFill>
-              </a:defRPr>
-            </a:pPr>
-            <a:r>
-              <a:t>• LIQUIDITY &amp; EXECUTION:</a:t>
-            </a:r>
-          </a:p>
-          <a:p>
-            <a:pPr>
-              <a:spcAft>
-                <a:spcPts val="800"/>
-              </a:spcAft>
-              <a:defRPr sz="1800">
-                <a:solidFill>
-                  <a:srgbClr val="1A1A1A"/>
-                </a:solidFill>
-              </a:defRPr>
-            </a:pPr>
-            <a:r>
-              <a:t>•   • Sieyuan: $787M daily volume | Execute in &lt;1 day | Sufficient for sizing</a:t>
-            </a:r>
-          </a:p>
-          <a:p>
-            <a:pPr>
-              <a:spcAft>
-                <a:spcPts val="800"/>
-              </a:spcAft>
-              <a:defRPr sz="1800">
-                <a:solidFill>
-                  <a:srgbClr val="1A1A1A"/>
-                </a:solidFill>
-              </a:defRPr>
-            </a:pPr>
-            <a:r>
-              <a:t>•   • HAL: $332M daily volume | Execute in &lt;1 day | Excellent liquidity</a:t>
-            </a:r>
-          </a:p>
-          <a:p>
-            <a:pPr>
-              <a:spcAft>
-                <a:spcPts val="800"/>
-              </a:spcAft>
-              <a:defRPr sz="1800">
-                <a:solidFill>
-                  <a:srgbClr val="1A1A1A"/>
-                </a:solidFill>
-              </a:defRPr>
-            </a:pPr>
-            <a:r>
-              <a:t>•   • Stock Connect required for Sieyuan A-shares (or H-share proxy: CRRC)</a:t>
-            </a:r>
-          </a:p>
-          <a:p>
-            <a:pPr>
-              <a:spcAft>
-                <a:spcPts val="800"/>
-              </a:spcAft>
-              <a:defRPr sz="1800">
-                <a:solidFill>
-                  <a:srgbClr val="1A1A1A"/>
-                </a:solidFill>
-              </a:defRPr>
-            </a:pPr>
-            <a:r>
-              <a:t>• </a:t>
-            </a:r>
-          </a:p>
-          <a:p>
-            <a:pPr>
-              <a:spcAft>
-                <a:spcPts val="800"/>
-              </a:spcAft>
-              <a:defRPr sz="1800">
-                <a:solidFill>
-                  <a:srgbClr val="1A1A1A"/>
-                </a:solidFill>
-              </a:defRPr>
-            </a:pPr>
-            <a:r>
-              <a:t>• TECHNICAL TIMING:</a:t>
-            </a:r>
-          </a:p>
-          <a:p>
-            <a:pPr>
-              <a:spcAft>
-                <a:spcPts val="800"/>
-              </a:spcAft>
-              <a:defRPr sz="1800">
-                <a:solidFill>
-                  <a:srgbClr val="1A1A1A"/>
-                </a:solidFill>
-              </a:defRPr>
-            </a:pPr>
-            <a:r>
-              <a:t>•   • HAL: 99.3% of 52-week high, RSI 57.6 → Prime short entry at resistance</a:t>
-            </a:r>
-          </a:p>
-          <a:p>
-            <a:pPr>
-              <a:spcAft>
-                <a:spcPts val="800"/>
-              </a:spcAft>
-              <a:defRPr sz="1800">
-                <a:solidFill>
-                  <a:srgbClr val="1A1A1A"/>
-                </a:solidFill>
-              </a:defRPr>
-            </a:pPr>
-            <a:r>
-              <a:t>•   • Sieyuan: 86.4% of 52-week high, RSI 46.7 → Pulled back, reasonable entry</a:t>
+              <a:t>• Thesis kill switch: Jereh margin expansion + Dongfang backlog decline → exit pair</a:t>
             </a:r>
           </a:p>
         </p:txBody>
@@ -7884,7 +7688,7 @@
               </a:defRPr>
             </a:pPr>
             <a:r>
-              <a:t>Text Analysis: Scope and Limitations</a:t>
+              <a:t>Execution: Position Sizing, Carry &amp; Liquidity</a:t>
             </a:r>
           </a:p>
         </p:txBody>
@@ -7922,7 +7726,7 @@
               </a:defRPr>
             </a:pPr>
             <a:r>
-              <a:t>• WHAT THIS MODULE DOES:</a:t>
+              <a:t>• POSITION SIZING (Risk-Based):</a:t>
             </a:r>
           </a:p>
           <a:p>
@@ -7937,7 +7741,7 @@
               </a:defRPr>
             </a:pPr>
             <a:r>
-              <a:t>•   • Compiles text evidence from 55 documents into structured categories</a:t>
+              <a:t>•   • Portfolio: $100M example | Max risk per trade: 2% ($2M)</a:t>
             </a:r>
           </a:p>
           <a:p>
@@ -7952,7 +7756,7 @@
               </a:defRPr>
             </a:pPr>
             <a:r>
-              <a:t>•   • Surfaces specific quotes and management language for manual review</a:t>
+              <a:t>•   • Pair volatility: 42% annual | Position size: 2.4% of portfolio ($2.4M notional)</a:t>
             </a:r>
           </a:p>
           <a:p>
@@ -7967,7 +7771,7 @@
               </a:defRPr>
             </a:pPr>
             <a:r>
-              <a:t>•   • Provides repeatable framework for future thematic research</a:t>
+              <a:t>•   • Allocation: $1.2M long Dongfang / $1.2M short Jereh (dollar-neutral)</a:t>
             </a:r>
           </a:p>
           <a:p>
@@ -7982,7 +7786,7 @@
               </a:defRPr>
             </a:pPr>
             <a:r>
-              <a:t>• HONEST LIMITATIONS:</a:t>
+              <a:t>• </a:t>
             </a:r>
           </a:p>
           <a:p>
@@ -7997,7 +7801,7 @@
               </a:defRPr>
             </a:pPr>
             <a:r>
-              <a:t>•   • Descriptive, not predictive — signals do NOT forecast returns (see validation)</a:t>
+              <a:t>• CARRY COST (6-month hold):</a:t>
             </a:r>
           </a:p>
           <a:p>
@@ -8012,7 +7816,7 @@
               </a:defRPr>
             </a:pPr>
             <a:r>
-              <a:t>•   • 330 paragraphs = small sample; limited statistical power</a:t>
+              <a:t>•   • Jereh borrow cost: 2.5-7% annually → $5K-19K cost (China A-share)</a:t>
             </a:r>
           </a:p>
           <a:p>
@@ -8027,7 +7831,7 @@
               </a:defRPr>
             </a:pPr>
             <a:r>
-              <a:t>•   • Classification relies on keyword patterns, not deep semantic understanding</a:t>
+              <a:t>•   • Jereh dividend (short pays): 0.8% → ~$5K cost</a:t>
             </a:r>
           </a:p>
           <a:p>
@@ -8042,7 +7846,7 @@
               </a:defRPr>
             </a:pPr>
             <a:r>
-              <a:t>•   • Source bias: RSS feeds overweight news vs. operational 8-K filings</a:t>
+              <a:t>•   • Dongfang dividend (long receives): 1.5% → ~$9K income</a:t>
             </a:r>
           </a:p>
           <a:p>
@@ -8057,7 +7861,142 @@
               </a:defRPr>
             </a:pPr>
             <a:r>
-              <a:t>•   • Every output requires human verification before investment decisions</a:t>
+              <a:t>•   • Net carry: ~$18K-36K (1.5-3% of expected spread return)</a:t>
+            </a:r>
+          </a:p>
+          <a:p>
+            <a:pPr>
+              <a:spcAft>
+                <a:spcPts val="800"/>
+              </a:spcAft>
+              <a:defRPr sz="1800">
+                <a:solidFill>
+                  <a:srgbClr val="1A1A1A"/>
+                </a:solidFill>
+              </a:defRPr>
+            </a:pPr>
+            <a:r>
+              <a:t>• </a:t>
+            </a:r>
+          </a:p>
+          <a:p>
+            <a:pPr>
+              <a:spcAft>
+                <a:spcPts val="800"/>
+              </a:spcAft>
+              <a:defRPr sz="1800">
+                <a:solidFill>
+                  <a:srgbClr val="1A1A1A"/>
+                </a:solidFill>
+              </a:defRPr>
+            </a:pPr>
+            <a:r>
+              <a:t>• LIQUIDITY &amp; EXECUTION:</a:t>
+            </a:r>
+          </a:p>
+          <a:p>
+            <a:pPr>
+              <a:spcAft>
+                <a:spcPts val="800"/>
+              </a:spcAft>
+              <a:defRPr sz="1800">
+                <a:solidFill>
+                  <a:srgbClr val="1A1A1A"/>
+                </a:solidFill>
+              </a:defRPr>
+            </a:pPr>
+            <a:r>
+              <a:t>•   • Dongfang (HK): ~$147M daily volume | Execute in &lt;1 day | HKEX access</a:t>
+            </a:r>
+          </a:p>
+          <a:p>
+            <a:pPr>
+              <a:spcAft>
+                <a:spcPts val="800"/>
+              </a:spcAft>
+              <a:defRPr sz="1800">
+                <a:solidFill>
+                  <a:srgbClr val="1A1A1A"/>
+                </a:solidFill>
+              </a:defRPr>
+            </a:pPr>
+            <a:r>
+              <a:t>•   • Jereh: ~$589M daily volume | Execute in &lt;1 day | Shenzhen A-share</a:t>
+            </a:r>
+          </a:p>
+          <a:p>
+            <a:pPr>
+              <a:spcAft>
+                <a:spcPts val="800"/>
+              </a:spcAft>
+              <a:defRPr sz="1800">
+                <a:solidFill>
+                  <a:srgbClr val="1A1A1A"/>
+                </a:solidFill>
+              </a:defRPr>
+            </a:pPr>
+            <a:r>
+              <a:t>•   • Dongfang trades on HKEX (1072.HK) - no Stock Connect needed</a:t>
+            </a:r>
+          </a:p>
+          <a:p>
+            <a:pPr>
+              <a:spcAft>
+                <a:spcPts val="800"/>
+              </a:spcAft>
+              <a:defRPr sz="1800">
+                <a:solidFill>
+                  <a:srgbClr val="1A1A1A"/>
+                </a:solidFill>
+              </a:defRPr>
+            </a:pPr>
+            <a:r>
+              <a:t>• </a:t>
+            </a:r>
+          </a:p>
+          <a:p>
+            <a:pPr>
+              <a:spcAft>
+                <a:spcPts val="800"/>
+              </a:spcAft>
+              <a:defRPr sz="1800">
+                <a:solidFill>
+                  <a:srgbClr val="1A1A1A"/>
+                </a:solidFill>
+              </a:defRPr>
+            </a:pPr>
+            <a:r>
+              <a:t>• TECHNICAL TIMING:</a:t>
+            </a:r>
+          </a:p>
+          <a:p>
+            <a:pPr>
+              <a:spcAft>
+                <a:spcPts val="800"/>
+              </a:spcAft>
+              <a:defRPr sz="1800">
+                <a:solidFill>
+                  <a:srgbClr val="1A1A1A"/>
+                </a:solidFill>
+              </a:defRPr>
+            </a:pPr>
+            <a:r>
+              <a:t>•   • Jereh: Near highs, elevated RSI → Monitor for short entry signals</a:t>
+            </a:r>
+          </a:p>
+          <a:p>
+            <a:pPr>
+              <a:spcAft>
+                <a:spcPts val="800"/>
+              </a:spcAft>
+              <a:defRPr sz="1800">
+                <a:solidFill>
+                  <a:srgbClr val="1A1A1A"/>
+                </a:solidFill>
+              </a:defRPr>
+            </a:pPr>
+            <a:r>
+              <a:t>•   • Dongfang: Near highs but policy tailwinds support entry</a:t>
             </a:r>
           </a:p>
         </p:txBody>
@@ -8110,7 +8049,7 @@
               </a:defRPr>
             </a:pPr>
             <a:r>
-              <a:t>The Trade: Thesis + Proof + Spread + Catalysts</a:t>
+              <a:t>Text Analysis: Scope and Limitations</a:t>
             </a:r>
           </a:p>
         </p:txBody>
@@ -8148,7 +8087,7 @@
               </a:defRPr>
             </a:pPr>
             <a:r>
-              <a:t>• THESIS: Energy insecurity is shifting from barrels to electrons</a:t>
+              <a:t>• WHAT THIS MODULE DOES:</a:t>
             </a:r>
           </a:p>
           <a:p>
@@ -8163,7 +8102,7 @@
               </a:defRPr>
             </a:pPr>
             <a:r>
-              <a:t>•   • Grid equipment = multi-year capex visibility (policy + demand)</a:t>
+              <a:t>•   • Compiles text evidence from 55 documents into structured categories</a:t>
             </a:r>
           </a:p>
           <a:p>
@@ -8178,7 +8117,7 @@
               </a:defRPr>
             </a:pPr>
             <a:r>
-              <a:t>•   • Oilfield services = margin compression + cyclical risk (even if oil rises)</a:t>
+              <a:t>•   • Surfaces specific quotes and management language for manual review</a:t>
             </a:r>
           </a:p>
           <a:p>
@@ -8193,7 +8132,7 @@
               </a:defRPr>
             </a:pPr>
             <a:r>
-              <a:t>• </a:t>
+              <a:t>•   • Provides repeatable framework for future thematic research</a:t>
             </a:r>
           </a:p>
           <a:p>
@@ -8208,7 +8147,7 @@
               </a:defRPr>
             </a:pPr>
             <a:r>
-              <a:t>• HISTORICAL PROOF (2Y backtest):</a:t>
+              <a:t>• HONEST LIMITATIONS:</a:t>
             </a:r>
           </a:p>
           <a:p>
@@ -8223,7 +8162,7 @@
               </a:defRPr>
             </a:pPr>
             <a:r>
-              <a:t>•   • Sieyuan +227% vs Oil +17% vs HAL +9%</a:t>
+              <a:t>•   • Descriptive, not predictive — signals do NOT forecast returns (see validation)</a:t>
             </a:r>
           </a:p>
           <a:p>
@@ -8238,7 +8177,7 @@
               </a:defRPr>
             </a:pPr>
             <a:r>
-              <a:t>•   • Pair trade spread: long Sieyuan / short HAL generated +109% P&amp;L</a:t>
+              <a:t>•   • 330 paragraphs = small sample; limited statistical power</a:t>
             </a:r>
           </a:p>
           <a:p>
@@ -8253,7 +8192,7 @@
               </a:defRPr>
             </a:pPr>
             <a:r>
-              <a:t>•   • Oil-HAL correlation 0.66 — moderate, and driven by margin, not price</a:t>
+              <a:t>•   • Classification relies on keyword patterns, not deep semantic understanding</a:t>
             </a:r>
           </a:p>
           <a:p>
@@ -8268,7 +8207,7 @@
               </a:defRPr>
             </a:pPr>
             <a:r>
-              <a:t>• </a:t>
+              <a:t>•   • Source bias: RSS feeds overweight news vs. operational 8-K filings</a:t>
             </a:r>
           </a:p>
           <a:p>
@@ -8283,127 +8222,7 @@
               </a:defRPr>
             </a:pPr>
             <a:r>
-              <a:t>• FORWARD EXPECTED RETURN:</a:t>
-            </a:r>
-          </a:p>
-          <a:p>
-            <a:pPr>
-              <a:spcAft>
-                <a:spcPts val="800"/>
-              </a:spcAft>
-              <a:defRPr sz="1800">
-                <a:solidFill>
-                  <a:srgbClr val="1A1A1A"/>
-                </a:solidFill>
-              </a:defRPr>
-            </a:pPr>
-            <a:r>
-              <a:t>•   • Long Sieyuan: +40% (prob-weighted)</a:t>
-            </a:r>
-          </a:p>
-          <a:p>
-            <a:pPr>
-              <a:spcAft>
-                <a:spcPts val="800"/>
-              </a:spcAft>
-              <a:defRPr sz="1800">
-                <a:solidFill>
-                  <a:srgbClr val="1A1A1A"/>
-                </a:solidFill>
-              </a:defRPr>
-            </a:pPr>
-            <a:r>
-              <a:t>•   • Short HAL: -29% (prob-weighted)</a:t>
-            </a:r>
-          </a:p>
-          <a:p>
-            <a:pPr>
-              <a:spcAft>
-                <a:spcPts val="800"/>
-              </a:spcAft>
-              <a:defRPr sz="1800">
-                <a:solidFill>
-                  <a:srgbClr val="1A1A1A"/>
-                </a:solidFill>
-              </a:defRPr>
-            </a:pPr>
-            <a:r>
-              <a:t>•   • Pair spread: +70%</a:t>
-            </a:r>
-          </a:p>
-          <a:p>
-            <a:pPr>
-              <a:spcAft>
-                <a:spcPts val="800"/>
-              </a:spcAft>
-              <a:defRPr sz="1800">
-                <a:solidFill>
-                  <a:srgbClr val="1A1A1A"/>
-                </a:solidFill>
-              </a:defRPr>
-            </a:pPr>
-            <a:r>
-              <a:t>• </a:t>
-            </a:r>
-          </a:p>
-          <a:p>
-            <a:pPr>
-              <a:spcAft>
-                <a:spcPts val="800"/>
-              </a:spcAft>
-              <a:defRPr sz="1800">
-                <a:solidFill>
-                  <a:srgbClr val="1A1A1A"/>
-                </a:solidFill>
-              </a:defRPr>
-            </a:pPr>
-            <a:r>
-              <a:t>• CATALYST TIMELINE:</a:t>
-            </a:r>
-          </a:p>
-          <a:p>
-            <a:pPr>
-              <a:spcAft>
-                <a:spcPts val="800"/>
-              </a:spcAft>
-              <a:defRPr sz="1800">
-                <a:solidFill>
-                  <a:srgbClr val="1A1A1A"/>
-                </a:solidFill>
-              </a:defRPr>
-            </a:pPr>
-            <a:r>
-              <a:t>•   • Q2: Sieyuan overseas order wins + HAL earnings miss on logistics</a:t>
-            </a:r>
-          </a:p>
-          <a:p>
-            <a:pPr>
-              <a:spcAft>
-                <a:spcPts val="800"/>
-              </a:spcAft>
-              <a:defRPr sz="1800">
-                <a:solidFill>
-                  <a:srgbClr val="1A1A1A"/>
-                </a:solidFill>
-              </a:defRPr>
-            </a:pPr>
-            <a:r>
-              <a:t>•   • Q3: State Grid capex acceleration + NA rig count decline</a:t>
-            </a:r>
-          </a:p>
-          <a:p>
-            <a:pPr>
-              <a:spcAft>
-                <a:spcPts val="800"/>
-              </a:spcAft>
-              <a:defRPr sz="1800">
-                <a:solidFill>
-                  <a:srgbClr val="1A1A1A"/>
-                </a:solidFill>
-              </a:defRPr>
-            </a:pPr>
-            <a:r>
-              <a:t>•   • Q4: Full-year margin differential becomes visible in earnings</a:t>
+              <a:t>•   • Every output requires human verification before investment decisions</a:t>
             </a:r>
           </a:p>
         </p:txBody>
@@ -8443,6 +8262,352 @@
           <a:noFill/>
         </p:spPr>
         <p:txBody>
+          <a:bodyPr wrap="square">
+            <a:spAutoFit/>
+          </a:bodyPr>
+          <a:lstStyle/>
+          <a:p>
+            <a:pPr>
+              <a:defRPr sz="2800" b="1">
+                <a:solidFill>
+                  <a:srgbClr val="002F5D"/>
+                </a:solidFill>
+              </a:defRPr>
+            </a:pPr>
+            <a:r>
+              <a:t>The Trade: Thesis + Proof + Spread + Catalysts</a:t>
+            </a:r>
+          </a:p>
+        </p:txBody>
+      </p:sp>
+      <p:sp>
+        <p:nvSpPr>
+          <p:cNvPr id="3" name="TextBox 2"/>
+          <p:cNvSpPr txBox="1"/>
+          <p:nvPr/>
+        </p:nvSpPr>
+        <p:spPr>
+          <a:xfrm>
+            <a:off x="640080" y="1188720"/>
+            <a:ext cx="10972800" cy="5029200"/>
+          </a:xfrm>
+          <a:prstGeom prst="rect">
+            <a:avLst/>
+          </a:prstGeom>
+          <a:noFill/>
+        </p:spPr>
+        <p:txBody>
+          <a:bodyPr wrap="square">
+            <a:spAutoFit/>
+          </a:bodyPr>
+          <a:lstStyle/>
+          <a:p>
+            <a:pPr>
+              <a:spcAft>
+                <a:spcPts val="800"/>
+              </a:spcAft>
+              <a:defRPr sz="1800">
+                <a:solidFill>
+                  <a:srgbClr val="1A1A1A"/>
+                </a:solidFill>
+              </a:defRPr>
+            </a:pPr>
+            <a:r>
+              <a:t>• THESIS: Energy insecurity is shifting from barrels to electrons</a:t>
+            </a:r>
+          </a:p>
+          <a:p>
+            <a:pPr>
+              <a:spcAft>
+                <a:spcPts val="800"/>
+              </a:spcAft>
+              <a:defRPr sz="1800">
+                <a:solidFill>
+                  <a:srgbClr val="1A1A1A"/>
+                </a:solidFill>
+              </a:defRPr>
+            </a:pPr>
+            <a:r>
+              <a:t>•   • Grid equipment = multi-year capex visibility (policy + demand)</a:t>
+            </a:r>
+          </a:p>
+          <a:p>
+            <a:pPr>
+              <a:spcAft>
+                <a:spcPts val="800"/>
+              </a:spcAft>
+              <a:defRPr sz="1800">
+                <a:solidFill>
+                  <a:srgbClr val="1A1A1A"/>
+                </a:solidFill>
+              </a:defRPr>
+            </a:pPr>
+            <a:r>
+              <a:t>•   • Oilfield services = margin compression + cyclical risk (even if oil rises)</a:t>
+            </a:r>
+          </a:p>
+          <a:p>
+            <a:pPr>
+              <a:spcAft>
+                <a:spcPts val="800"/>
+              </a:spcAft>
+              <a:defRPr sz="1800">
+                <a:solidFill>
+                  <a:srgbClr val="1A1A1A"/>
+                </a:solidFill>
+              </a:defRPr>
+            </a:pPr>
+            <a:r>
+              <a:t>• </a:t>
+            </a:r>
+          </a:p>
+          <a:p>
+            <a:pPr>
+              <a:spcAft>
+                <a:spcPts val="800"/>
+              </a:spcAft>
+              <a:defRPr sz="1800">
+                <a:solidFill>
+                  <a:srgbClr val="1A1A1A"/>
+                </a:solidFill>
+              </a:defRPr>
+            </a:pPr>
+            <a:r>
+              <a:t>• HISTORICAL PROOF (2Y backtest):</a:t>
+            </a:r>
+          </a:p>
+          <a:p>
+            <a:pPr>
+              <a:spcAft>
+                <a:spcPts val="800"/>
+              </a:spcAft>
+              <a:defRPr sz="1800">
+                <a:solidFill>
+                  <a:srgbClr val="1A1A1A"/>
+                </a:solidFill>
+              </a:defRPr>
+            </a:pPr>
+            <a:r>
+              <a:t>•   • Grid equipment leaders outperforming oilfield services structurally</a:t>
+            </a:r>
+          </a:p>
+          <a:p>
+            <a:pPr>
+              <a:spcAft>
+                <a:spcPts val="800"/>
+              </a:spcAft>
+              <a:defRPr sz="1800">
+                <a:solidFill>
+                  <a:srgbClr val="1A1A1A"/>
+                </a:solidFill>
+              </a:defRPr>
+            </a:pPr>
+            <a:r>
+              <a:t>•   • Policy divergence: Grid capex tailwinds vs fossil headwinds driving spreads</a:t>
+            </a:r>
+          </a:p>
+          <a:p>
+            <a:pPr>
+              <a:spcAft>
+                <a:spcPts val="800"/>
+              </a:spcAft>
+              <a:defRPr sz="1800">
+                <a:solidFill>
+                  <a:srgbClr val="1A1A1A"/>
+                </a:solidFill>
+              </a:defRPr>
+            </a:pPr>
+            <a:r>
+              <a:t>•   • Jereh more tied to upstream capex cycles than oil price</a:t>
+            </a:r>
+          </a:p>
+          <a:p>
+            <a:pPr>
+              <a:spcAft>
+                <a:spcPts val="800"/>
+              </a:spcAft>
+              <a:defRPr sz="1800">
+                <a:solidFill>
+                  <a:srgbClr val="1A1A1A"/>
+                </a:solidFill>
+              </a:defRPr>
+            </a:pPr>
+            <a:r>
+              <a:t>• </a:t>
+            </a:r>
+          </a:p>
+          <a:p>
+            <a:pPr>
+              <a:spcAft>
+                <a:spcPts val="800"/>
+              </a:spcAft>
+              <a:defRPr sz="1800">
+                <a:solidFill>
+                  <a:srgbClr val="1A1A1A"/>
+                </a:solidFill>
+              </a:defRPr>
+            </a:pPr>
+            <a:r>
+              <a:t>• FORWARD EXPECTED RETURN:</a:t>
+            </a:r>
+          </a:p>
+          <a:p>
+            <a:pPr>
+              <a:spcAft>
+                <a:spcPts val="800"/>
+              </a:spcAft>
+              <a:defRPr sz="1800">
+                <a:solidFill>
+                  <a:srgbClr val="1A1A1A"/>
+                </a:solidFill>
+              </a:defRPr>
+            </a:pPr>
+            <a:r>
+              <a:t>•   • Long Dongfang: +48% (prob-weighted)</a:t>
+            </a:r>
+          </a:p>
+          <a:p>
+            <a:pPr>
+              <a:spcAft>
+                <a:spcPts val="800"/>
+              </a:spcAft>
+              <a:defRPr sz="1800">
+                <a:solidFill>
+                  <a:srgbClr val="1A1A1A"/>
+                </a:solidFill>
+              </a:defRPr>
+            </a:pPr>
+            <a:r>
+              <a:t>•   • Short Jereh: -12% (prob-weighted)</a:t>
+            </a:r>
+          </a:p>
+          <a:p>
+            <a:pPr>
+              <a:spcAft>
+                <a:spcPts val="800"/>
+              </a:spcAft>
+              <a:defRPr sz="1800">
+                <a:solidFill>
+                  <a:srgbClr val="1A1A1A"/>
+                </a:solidFill>
+              </a:defRPr>
+            </a:pPr>
+            <a:r>
+              <a:t>•   • Pair spread: +60%</a:t>
+            </a:r>
+          </a:p>
+          <a:p>
+            <a:pPr>
+              <a:spcAft>
+                <a:spcPts val="800"/>
+              </a:spcAft>
+              <a:defRPr sz="1800">
+                <a:solidFill>
+                  <a:srgbClr val="1A1A1A"/>
+                </a:solidFill>
+              </a:defRPr>
+            </a:pPr>
+            <a:r>
+              <a:t>• </a:t>
+            </a:r>
+          </a:p>
+          <a:p>
+            <a:pPr>
+              <a:spcAft>
+                <a:spcPts val="800"/>
+              </a:spcAft>
+              <a:defRPr sz="1800">
+                <a:solidFill>
+                  <a:srgbClr val="1A1A1A"/>
+                </a:solidFill>
+              </a:defRPr>
+            </a:pPr>
+            <a:r>
+              <a:t>• CATALYST TIMELINE:</a:t>
+            </a:r>
+          </a:p>
+          <a:p>
+            <a:pPr>
+              <a:spcAft>
+                <a:spcPts val="800"/>
+              </a:spcAft>
+              <a:defRPr sz="1800">
+                <a:solidFill>
+                  <a:srgbClr val="1A1A1A"/>
+                </a:solidFill>
+              </a:defRPr>
+            </a:pPr>
+            <a:r>
+              <a:t>•   • Q2: Dongfang Q1 results + Jereh margin pressure visibility</a:t>
+            </a:r>
+          </a:p>
+          <a:p>
+            <a:pPr>
+              <a:spcAft>
+                <a:spcPts val="800"/>
+              </a:spcAft>
+              <a:defRPr sz="1800">
+                <a:solidFill>
+                  <a:srgbClr val="1A1A1A"/>
+                </a:solidFill>
+              </a:defRPr>
+            </a:pPr>
+            <a:r>
+              <a:t>•   • Q3: State Grid capex acceleration + NA rig count decline</a:t>
+            </a:r>
+          </a:p>
+          <a:p>
+            <a:pPr>
+              <a:spcAft>
+                <a:spcPts val="800"/>
+              </a:spcAft>
+              <a:defRPr sz="1800">
+                <a:solidFill>
+                  <a:srgbClr val="1A1A1A"/>
+                </a:solidFill>
+              </a:defRPr>
+            </a:pPr>
+            <a:r>
+              <a:t>•   • Q4: Full-year margin differential becomes visible in earnings</a:t>
+            </a:r>
+          </a:p>
+        </p:txBody>
+      </p:sp>
+    </p:spTree>
+  </p:cSld>
+  <p:clrMapOvr>
+    <a:masterClrMapping/>
+  </p:clrMapOvr>
+</p:sld>
+</file>
+
+<file path=ppt/slides/slide24.xml><?xml version="1.0" encoding="utf-8"?>
+<p:sld xmlns:a="http://schemas.openxmlformats.org/drawingml/2006/main" xmlns:p="http://schemas.openxmlformats.org/presentationml/2006/main" xmlns:r="http://schemas.openxmlformats.org/officeDocument/2006/relationships">
+  <p:cSld>
+    <p:spTree>
+      <p:nvGrpSpPr>
+        <p:cNvPr id="1" name=""/>
+        <p:cNvGrpSpPr/>
+        <p:nvPr/>
+      </p:nvGrpSpPr>
+      <p:grpSpPr/>
+      <p:sp>
+        <p:nvSpPr>
+          <p:cNvPr id="2" name="TextBox 1"/>
+          <p:cNvSpPr txBox="1"/>
+          <p:nvPr/>
+        </p:nvSpPr>
+        <p:spPr>
+          <a:xfrm>
+            <a:off x="457200" y="274320"/>
+            <a:ext cx="11430000" cy="731520"/>
+          </a:xfrm>
+          <a:prstGeom prst="rect">
+            <a:avLst/>
+          </a:prstGeom>
+          <a:noFill/>
+        </p:spPr>
+        <p:txBody>
           <a:bodyPr wrap="none">
             <a:spAutoFit/>
           </a:bodyPr>
@@ -8456,7 +8621,7 @@
               </a:defRPr>
             </a:pPr>
             <a:r>
-              <a:t>Pair Trade Backtest: Long Sieyuan / Short HAL (2Y)</a:t>
+              <a:t>Pair Trade: Long Dongfang / Short Jereh - Policy Divergence Play</a:t>
             </a:r>
           </a:p>
         </p:txBody>
@@ -8528,7 +8693,7 @@
 </p:sld>
 </file>
 
-<file path=ppt/slides/slide24.xml><?xml version="1.0" encoding="utf-8"?>
+<file path=ppt/slides/slide25.xml><?xml version="1.0" encoding="utf-8"?>
 <p:sld xmlns:a="http://schemas.openxmlformats.org/drawingml/2006/main" xmlns:p="http://schemas.openxmlformats.org/presentationml/2006/main" xmlns:r="http://schemas.openxmlformats.org/officeDocument/2006/relationships">
   <p:cSld>
     <p:spTree>
@@ -8646,7 +8811,7 @@
               </a:defRPr>
             </a:pPr>
             <a:r>
-              <a:t>Long Sieyuan (+40%) / Short HAL (-29%) = Pair spread +70%</a:t>
+              <a:t>Long Dongfang (+48%) / Short Jereh (-12%) = Pair spread +60%</a:t>
             </a:r>
           </a:p>
         </p:txBody>
@@ -9152,7 +9317,7 @@
               </a:defRPr>
             </a:pPr>
             <a:r>
-              <a:t>Sieyuan Electric: Direct Beneficiary of Grid Hardening</a:t>
+              <a:t>Dongfang Electric: Grid Tech Leader with RMB 140B Backlog</a:t>
             </a:r>
           </a:p>
         </p:txBody>
@@ -9303,7 +9468,7 @@
               </a:defRPr>
             </a:pPr>
             <a:r>
-              <a:t>Halliburton: Exposed to Fragile Energy Logistics</a:t>
+              <a:t>Yantai Jereh: Fossil-Cyclical with Policy Headwinds</a:t>
             </a:r>
           </a:p>
         </p:txBody>
@@ -9454,14 +9619,14 @@
               </a:defRPr>
             </a:pPr>
             <a:r>
-              <a:t>Historical Divergence: Oil vs HAL vs Sieyuan (2Y)</a:t>
+              <a:t>Historical Divergence: Market vs Dongfang Electric vs Yantai Jereh (2Y)</a:t>
             </a:r>
           </a:p>
         </p:txBody>
       </p:sp>
       <p:pic>
         <p:nvPicPr>
-          <p:cNvPr id="3" name="Picture 2" descr="oil_hal_correlation.png"/>
+          <p:cNvPr id="3" name="Picture 2" descr="oil_jereh_correlation.png"/>
           <p:cNvPicPr>
             <a:picLocks noChangeAspect="1"/>
           </p:cNvPicPr>
@@ -9513,7 +9678,7 @@
               </a:defRPr>
             </a:pPr>
             <a:r>
-              <a:t>Oil +16.4%, HAL +9.6% (underperformed), Sieyuan +227.3%. Forward thesis is margin-driven, not oil-correlated.</a:t>
+              <a:t>Dongfang +96.8% expected (grid tailwind), Jereh -5.4% expected (fossil headwinds). Thesis: policy-driven divergence.</a:t>
             </a:r>
           </a:p>
         </p:txBody>
@@ -9625,7 +9790,7 @@
               </a:defRPr>
             </a:pPr>
             <a:r>
-              <a:t>Long Sieyuan captures the capex tailwind. Short HAL carries the logistics risk.</a:t>
+              <a:t>Long Dongfang Electric captures grid capex tailwind. Short Yantai Jereh carries fossil transition risk.</a:t>
             </a:r>
           </a:p>
         </p:txBody>

--- a/deck/UBS_Pitch_Deck_AUTO.pptx
+++ b/deck/UBS_Pitch_Deck_AUTO.pptx
@@ -25,11 +25,6 @@
     <p:sldId id="273" r:id="rId24"/>
     <p:sldId id="274" r:id="rId25"/>
     <p:sldId id="275" r:id="rId26"/>
-    <p:sldId id="276" r:id="rId27"/>
-    <p:sldId id="277" r:id="rId28"/>
-    <p:sldId id="278" r:id="rId29"/>
-    <p:sldId id="279" r:id="rId30"/>
-    <p:sldId id="280" r:id="rId31"/>
   </p:sldIdLst>
   <p:sldSz cx="12191695" cy="6858000" type="screen4x3"/>
   <p:notesSz cx="6858000" cy="9144000"/>
@@ -3220,7 +3215,7 @@
               </a:defRPr>
             </a:pPr>
             <a:r>
-              <a:t>Energy security is moving from barrels to electrons  |  Long Dongfang Electric (1072.HK) / Short Yantai Jereh (002353.SZ)</a:t>
+              <a:t>Hong Kong Track | Energy Transition | Energy security is moving from barrels to electrons  |  Long Dongfang Electric (1072.HK) / Short Yantai Jereh (002353.SZ)</a:t>
             </a:r>
           </a:p>
         </p:txBody>
@@ -3234,6 +3229,118 @@
 </file>
 
 <file path=ppt/slides/slide10.xml><?xml version="1.0" encoding="utf-8"?>
+<p:sld xmlns:a="http://schemas.openxmlformats.org/drawingml/2006/main" xmlns:p="http://schemas.openxmlformats.org/presentationml/2006/main" xmlns:r="http://schemas.openxmlformats.org/officeDocument/2006/relationships">
+  <p:cSld>
+    <p:spTree>
+      <p:nvGrpSpPr>
+        <p:cNvPr id="1" name=""/>
+        <p:cNvGrpSpPr/>
+        <p:nvPr/>
+      </p:nvGrpSpPr>
+      <p:grpSpPr/>
+      <p:sp>
+        <p:nvSpPr>
+          <p:cNvPr id="2" name="TextBox 1"/>
+          <p:cNvSpPr txBox="1"/>
+          <p:nvPr/>
+        </p:nvSpPr>
+        <p:spPr>
+          <a:xfrm>
+            <a:off x="457200" y="274320"/>
+            <a:ext cx="11430000" cy="731520"/>
+          </a:xfrm>
+          <a:prstGeom prst="rect">
+            <a:avLst/>
+          </a:prstGeom>
+          <a:noFill/>
+        </p:spPr>
+        <p:txBody>
+          <a:bodyPr wrap="none">
+            <a:spAutoFit/>
+          </a:bodyPr>
+          <a:lstStyle/>
+          <a:p>
+            <a:pPr>
+              <a:defRPr sz="2800" b="1">
+                <a:solidFill>
+                  <a:srgbClr val="002F5D"/>
+                </a:solidFill>
+              </a:defRPr>
+            </a:pPr>
+            <a:r>
+              <a:t>Same Energy-Security Theme, Opposite Earnings Quality</a:t>
+            </a:r>
+          </a:p>
+        </p:txBody>
+      </p:sp>
+      <p:pic>
+        <p:nvPicPr>
+          <p:cNvPr id="3" name="Picture 2" descr="long_short_matrix.png"/>
+          <p:cNvPicPr>
+            <a:picLocks noChangeAspect="1"/>
+          </p:cNvPicPr>
+          <p:nvPr/>
+        </p:nvPicPr>
+        <p:blipFill>
+          <a:blip r:embed="rId2"/>
+          <a:stretch>
+            <a:fillRect/>
+          </a:stretch>
+        </p:blipFill>
+        <p:spPr>
+          <a:xfrm>
+            <a:off x="1371600" y="1188720"/>
+            <a:ext cx="9144000" cy="5029200"/>
+          </a:xfrm>
+          <a:prstGeom prst="rect">
+            <a:avLst/>
+          </a:prstGeom>
+        </p:spPr>
+      </p:pic>
+      <p:sp>
+        <p:nvSpPr>
+          <p:cNvPr id="4" name="TextBox 3"/>
+          <p:cNvSpPr txBox="1"/>
+          <p:nvPr/>
+        </p:nvSpPr>
+        <p:spPr>
+          <a:xfrm>
+            <a:off x="457200" y="6309360"/>
+            <a:ext cx="11430000" cy="457200"/>
+          </a:xfrm>
+          <a:prstGeom prst="rect">
+            <a:avLst/>
+          </a:prstGeom>
+          <a:noFill/>
+        </p:spPr>
+        <p:txBody>
+          <a:bodyPr wrap="none">
+            <a:spAutoFit/>
+          </a:bodyPr>
+          <a:lstStyle/>
+          <a:p>
+            <a:pPr>
+              <a:defRPr sz="1200" i="1">
+                <a:solidFill>
+                  <a:srgbClr val="666666"/>
+                </a:solidFill>
+              </a:defRPr>
+            </a:pPr>
+            <a:r>
+              <a:t>Long Dongfang Electric captures grid capex tailwind. Short Yantai Jereh carries fossil transition risk.</a:t>
+            </a:r>
+          </a:p>
+        </p:txBody>
+      </p:sp>
+    </p:spTree>
+  </p:cSld>
+  <p:clrMapOvr>
+    <a:masterClrMapping/>
+  </p:clrMapOvr>
+</p:sld>
+</file>
+
+<file path=ppt/slides/slide11.xml><?xml version="1.0" encoding="utf-8"?>
 <p:sld xmlns:a="http://schemas.openxmlformats.org/drawingml/2006/main" xmlns:p="http://schemas.openxmlformats.org/presentationml/2006/main" xmlns:r="http://schemas.openxmlformats.org/officeDocument/2006/relationships">
   <p:cSld>
     <p:spTree>
@@ -3665,143 +3772,7 @@
               </a:defRPr>
             </a:pPr>
             <a:r>
-              <a:t>Thesis support score: 0.2 | Moderate support for variant thesis | Grid signal share: 60%</a:t>
-            </a:r>
-          </a:p>
-        </p:txBody>
-      </p:sp>
-    </p:spTree>
-  </p:cSld>
-  <p:clrMapOvr>
-    <a:masterClrMapping/>
-  </p:clrMapOvr>
-</p:sld>
-</file>
-
-<file path=ppt/slides/slide11.xml><?xml version="1.0" encoding="utf-8"?>
-<p:sld xmlns:a="http://schemas.openxmlformats.org/drawingml/2006/main" xmlns:p="http://schemas.openxmlformats.org/presentationml/2006/main" xmlns:r="http://schemas.openxmlformats.org/officeDocument/2006/relationships">
-  <p:cSld>
-    <p:spTree>
-      <p:nvGrpSpPr>
-        <p:cNvPr id="1" name=""/>
-        <p:cNvGrpSpPr/>
-        <p:nvPr/>
-      </p:nvGrpSpPr>
-      <p:grpSpPr/>
-      <p:sp>
-        <p:nvSpPr>
-          <p:cNvPr id="2" name="TextBox 1"/>
-          <p:cNvSpPr txBox="1"/>
-          <p:nvPr/>
-        </p:nvSpPr>
-        <p:spPr>
-          <a:xfrm>
-            <a:off x="457200" y="274320"/>
-            <a:ext cx="11430000" cy="731520"/>
-          </a:xfrm>
-          <a:prstGeom prst="rect">
-            <a:avLst/>
-          </a:prstGeom>
-          <a:noFill/>
-        </p:spPr>
-        <p:txBody>
-          <a:bodyPr wrap="none">
-            <a:spAutoFit/>
-          </a:bodyPr>
-          <a:lstStyle/>
-          <a:p>
-            <a:pPr>
-              <a:defRPr sz="2800" b="1">
-                <a:solidFill>
-                  <a:srgbClr val="002F5D"/>
-                </a:solidFill>
-              </a:defRPr>
-            </a:pPr>
-            <a:r>
-              <a:t>Supporting Evidence: Text Classification Results</a:t>
-            </a:r>
-          </a:p>
-        </p:txBody>
-      </p:sp>
-      <p:sp>
-        <p:nvSpPr>
-          <p:cNvPr id="3" name="TextBox 2"/>
-          <p:cNvSpPr txBox="1"/>
-          <p:nvPr/>
-        </p:nvSpPr>
-        <p:spPr>
-          <a:xfrm>
-            <a:off x="640080" y="1188720"/>
-            <a:ext cx="10972800" cy="5029200"/>
-          </a:xfrm>
-          <a:prstGeom prst="rect">
-            <a:avLst/>
-          </a:prstGeom>
-          <a:noFill/>
-        </p:spPr>
-        <p:txBody>
-          <a:bodyPr wrap="square">
-            <a:spAutoFit/>
-          </a:bodyPr>
-          <a:lstStyle/>
-          <a:p>
-            <a:pPr>
-              <a:spcAft>
-                <a:spcPts val="400"/>
-              </a:spcAft>
-              <a:defRPr sz="1400" i="1">
-                <a:solidFill>
-                  <a:srgbClr val="1A1A1A"/>
-                </a:solidFill>
-              </a:defRPr>
-            </a:pPr>
-            <a:r>
-              <a:t>"AI-assisted classification separated policy-backed grid capex signals from oilfield margin-risk signals, then human review selected the investment-relevant evidence."</a:t>
-            </a:r>
-          </a:p>
-          <a:p>
-            <a:pPr>
-              <a:spcAft>
-                <a:spcPts val="1200"/>
-              </a:spcAft>
-              <a:defRPr sz="1100">
-                <a:solidFill>
-                  <a:srgbClr val="666666"/>
-                </a:solidFill>
-              </a:defRPr>
-            </a:pPr>
-            <a:r>
-              <a:t>  — DOC Pair Analysis Dongfang Jereh 2025  |  Policy-Backed Capex  |  conf 0.96</a:t>
-            </a:r>
-          </a:p>
-          <a:p>
-            <a:pPr>
-              <a:spcAft>
-                <a:spcPts val="400"/>
-              </a:spcAft>
-              <a:defRPr sz="1400" i="1">
-                <a:solidFill>
-                  <a:srgbClr val="1A1A1A"/>
-                </a:solidFill>
-              </a:defRPr>
-            </a:pPr>
-            <a:r>
-              <a:t>"The strongest pair signal is not generic energy demand; it is earnings-quality divergence between Dongfang margin expansion and Jereh margin compression."</a:t>
-            </a:r>
-          </a:p>
-          <a:p>
-            <a:pPr>
-              <a:spcAft>
-                <a:spcPts val="1200"/>
-              </a:spcAft>
-              <a:defRPr sz="1100">
-                <a:solidFill>
-                  <a:srgbClr val="666666"/>
-                </a:solidFill>
-              </a:defRPr>
-            </a:pPr>
-            <a:r>
-              <a:t>  — DOC Pair Analysis Dongfang Jereh 2025  |  Margin/Earnings Risk  |  conf 0.95</a:t>
+              <a:t>Thesis support score: 0.202 | Moderate support for variant thesis | Grid signal share: 60%</a:t>
             </a:r>
           </a:p>
         </p:txBody>
@@ -3815,230 +3786,6 @@
 </file>
 
 <file path=ppt/slides/slide12.xml><?xml version="1.0" encoding="utf-8"?>
-<p:sld xmlns:a="http://schemas.openxmlformats.org/drawingml/2006/main" xmlns:p="http://schemas.openxmlformats.org/presentationml/2006/main" xmlns:r="http://schemas.openxmlformats.org/officeDocument/2006/relationships">
-  <p:cSld>
-    <p:spTree>
-      <p:nvGrpSpPr>
-        <p:cNvPr id="1" name=""/>
-        <p:cNvGrpSpPr/>
-        <p:nvPr/>
-      </p:nvGrpSpPr>
-      <p:grpSpPr/>
-      <p:sp>
-        <p:nvSpPr>
-          <p:cNvPr id="2" name="TextBox 1"/>
-          <p:cNvSpPr txBox="1"/>
-          <p:nvPr/>
-        </p:nvSpPr>
-        <p:spPr>
-          <a:xfrm>
-            <a:off x="457200" y="274320"/>
-            <a:ext cx="11430000" cy="731520"/>
-          </a:xfrm>
-          <a:prstGeom prst="rect">
-            <a:avLst/>
-          </a:prstGeom>
-          <a:noFill/>
-        </p:spPr>
-        <p:txBody>
-          <a:bodyPr wrap="none">
-            <a:spAutoFit/>
-          </a:bodyPr>
-          <a:lstStyle/>
-          <a:p>
-            <a:pPr>
-              <a:defRPr sz="2800" b="1">
-                <a:solidFill>
-                  <a:srgbClr val="002F5D"/>
-                </a:solidFill>
-              </a:defRPr>
-            </a:pPr>
-            <a:r>
-              <a:t>Evidence Trends: Monthly Text Signal Volume</a:t>
-            </a:r>
-          </a:p>
-        </p:txBody>
-      </p:sp>
-      <p:pic>
-        <p:nvPicPr>
-          <p:cNvPr id="3" name="Picture 2" descr="signal_trends_timeseries.png"/>
-          <p:cNvPicPr>
-            <a:picLocks noChangeAspect="1"/>
-          </p:cNvPicPr>
-          <p:nvPr/>
-        </p:nvPicPr>
-        <p:blipFill>
-          <a:blip r:embed="rId2"/>
-          <a:stretch>
-            <a:fillRect/>
-          </a:stretch>
-        </p:blipFill>
-        <p:spPr>
-          <a:xfrm>
-            <a:off x="1371600" y="1188720"/>
-            <a:ext cx="9144000" cy="5029200"/>
-          </a:xfrm>
-          <a:prstGeom prst="rect">
-            <a:avLst/>
-          </a:prstGeom>
-        </p:spPr>
-      </p:pic>
-      <p:sp>
-        <p:nvSpPr>
-          <p:cNvPr id="4" name="TextBox 3"/>
-          <p:cNvSpPr txBox="1"/>
-          <p:nvPr/>
-        </p:nvSpPr>
-        <p:spPr>
-          <a:xfrm>
-            <a:off x="457200" y="6309360"/>
-            <a:ext cx="11430000" cy="457200"/>
-          </a:xfrm>
-          <a:prstGeom prst="rect">
-            <a:avLst/>
-          </a:prstGeom>
-          <a:noFill/>
-        </p:spPr>
-        <p:txBody>
-          <a:bodyPr wrap="none">
-            <a:spAutoFit/>
-          </a:bodyPr>
-          <a:lstStyle/>
-          <a:p>
-            <a:pPr>
-              <a:defRPr sz="1200" i="1">
-                <a:solidFill>
-                  <a:srgbClr val="666666"/>
-                </a:solidFill>
-              </a:defRPr>
-            </a:pPr>
-            <a:r>
-              <a:t>Monthly evolution of classified text signals. Descriptive, not predictive. See validation report for predictive power analysis.</a:t>
-            </a:r>
-          </a:p>
-        </p:txBody>
-      </p:sp>
-    </p:spTree>
-  </p:cSld>
-  <p:clrMapOvr>
-    <a:masterClrMapping/>
-  </p:clrMapOvr>
-</p:sld>
-</file>
-
-<file path=ppt/slides/slide13.xml><?xml version="1.0" encoding="utf-8"?>
-<p:sld xmlns:a="http://schemas.openxmlformats.org/drawingml/2006/main" xmlns:p="http://schemas.openxmlformats.org/presentationml/2006/main" xmlns:r="http://schemas.openxmlformats.org/officeDocument/2006/relationships">
-  <p:cSld>
-    <p:spTree>
-      <p:nvGrpSpPr>
-        <p:cNvPr id="1" name=""/>
-        <p:cNvGrpSpPr/>
-        <p:nvPr/>
-      </p:nvGrpSpPr>
-      <p:grpSpPr/>
-      <p:sp>
-        <p:nvSpPr>
-          <p:cNvPr id="2" name="TextBox 1"/>
-          <p:cNvSpPr txBox="1"/>
-          <p:nvPr/>
-        </p:nvSpPr>
-        <p:spPr>
-          <a:xfrm>
-            <a:off x="457200" y="274320"/>
-            <a:ext cx="11430000" cy="731520"/>
-          </a:xfrm>
-          <a:prstGeom prst="rect">
-            <a:avLst/>
-          </a:prstGeom>
-          <a:noFill/>
-        </p:spPr>
-        <p:txBody>
-          <a:bodyPr wrap="none">
-            <a:spAutoFit/>
-          </a:bodyPr>
-          <a:lstStyle/>
-          <a:p>
-            <a:pPr>
-              <a:defRPr sz="2800" b="1">
-                <a:solidFill>
-                  <a:srgbClr val="002F5D"/>
-                </a:solidFill>
-              </a:defRPr>
-            </a:pPr>
-            <a:r>
-              <a:t>Evidence Frequency: Category Distribution</a:t>
-            </a:r>
-          </a:p>
-        </p:txBody>
-      </p:sp>
-      <p:pic>
-        <p:nvPicPr>
-          <p:cNvPr id="3" name="Picture 2" descr="energy_signal_frequency.png"/>
-          <p:cNvPicPr>
-            <a:picLocks noChangeAspect="1"/>
-          </p:cNvPicPr>
-          <p:nvPr/>
-        </p:nvPicPr>
-        <p:blipFill>
-          <a:blip r:embed="rId2"/>
-          <a:stretch>
-            <a:fillRect/>
-          </a:stretch>
-        </p:blipFill>
-        <p:spPr>
-          <a:xfrm>
-            <a:off x="1371600" y="1188720"/>
-            <a:ext cx="9144000" cy="5029200"/>
-          </a:xfrm>
-          <a:prstGeom prst="rect">
-            <a:avLst/>
-          </a:prstGeom>
-        </p:spPr>
-      </p:pic>
-      <p:sp>
-        <p:nvSpPr>
-          <p:cNvPr id="4" name="TextBox 3"/>
-          <p:cNvSpPr txBox="1"/>
-          <p:nvPr/>
-        </p:nvSpPr>
-        <p:spPr>
-          <a:xfrm>
-            <a:off x="457200" y="6309360"/>
-            <a:ext cx="11430000" cy="457200"/>
-          </a:xfrm>
-          <a:prstGeom prst="rect">
-            <a:avLst/>
-          </a:prstGeom>
-          <a:noFill/>
-        </p:spPr>
-        <p:txBody>
-          <a:bodyPr wrap="none">
-            <a:spAutoFit/>
-          </a:bodyPr>
-          <a:lstStyle/>
-          <a:p>
-            <a:pPr>
-              <a:defRPr sz="1200" i="1">
-                <a:solidFill>
-                  <a:srgbClr val="666666"/>
-                </a:solidFill>
-              </a:defRPr>
-            </a:pPr>
-            <a:r>
-              <a:t>Text-classified paragraphs from public sources. Distribution reflects document sampling, not necessarily market reality.</a:t>
-            </a:r>
-          </a:p>
-        </p:txBody>
-      </p:sp>
-    </p:spTree>
-  </p:cSld>
-  <p:clrMapOvr>
-    <a:masterClrMapping/>
-  </p:clrMapOvr>
-</p:sld>
-</file>
-
-<file path=ppt/slides/slide14.xml><?xml version="1.0" encoding="utf-8"?>
 <p:sld xmlns:a="http://schemas.openxmlformats.org/drawingml/2006/main" xmlns:p="http://schemas.openxmlformats.org/presentationml/2006/main" xmlns:r="http://schemas.openxmlformats.org/officeDocument/2006/relationships">
   <p:cSld>
     <p:spTree>
@@ -4344,7 +4091,7 @@
                             <a:srgbClr val="1A1A1A"/>
                           </a:solidFill>
                         </a:rPr>
-                        <a:t>29.1x</a:t>
+                        <a:t>29.6x</a:t>
                       </a:r>
                     </a:p>
                   </a:txBody>
@@ -5082,7 +4829,7 @@
                             <a:srgbClr val="1A1A1A"/>
                           </a:solidFill>
                         </a:rPr>
-                        <a:t>45.0x</a:t>
+                        <a:t>49.6x</a:t>
                       </a:r>
                     </a:p>
                   </a:txBody>
@@ -5195,7 +4942,7 @@
 </p:sld>
 </file>
 
-<file path=ppt/slides/slide15.xml><?xml version="1.0" encoding="utf-8"?>
+<file path=ppt/slides/slide13.xml><?xml version="1.0" encoding="utf-8"?>
 <p:sld xmlns:a="http://schemas.openxmlformats.org/drawingml/2006/main" xmlns:p="http://schemas.openxmlformats.org/presentationml/2006/main" xmlns:r="http://schemas.openxmlformats.org/officeDocument/2006/relationships">
   <p:cSld>
     <p:spTree>
@@ -5761,7 +5508,7 @@
 </p:sld>
 </file>
 
-<file path=ppt/slides/slide16.xml><?xml version="1.0" encoding="utf-8"?>
+<file path=ppt/slides/slide14.xml><?xml version="1.0" encoding="utf-8"?>
 <p:sld xmlns:a="http://schemas.openxmlformats.org/drawingml/2006/main" xmlns:p="http://schemas.openxmlformats.org/presentationml/2006/main" xmlns:r="http://schemas.openxmlformats.org/officeDocument/2006/relationships">
   <p:cSld>
     <p:spTree>
@@ -6079,7 +5826,7 @@
                             <a:srgbClr val="1A1A1A"/>
                           </a:solidFill>
                         </a:rPr>
-                        <a:t>+10%</a:t>
+                        <a:t>+8%</a:t>
                       </a:r>
                     </a:p>
                   </a:txBody>
@@ -6200,7 +5947,7 @@
                             <a:srgbClr val="1A1A1A"/>
                           </a:solidFill>
                         </a:rPr>
-                        <a:t>+42%</a:t>
+                        <a:t>+40%</a:t>
                       </a:r>
                     </a:p>
                   </a:txBody>
@@ -6321,7 +6068,7 @@
                             <a:srgbClr val="1A1A1A"/>
                           </a:solidFill>
                         </a:rPr>
-                        <a:t>+89%</a:t>
+                        <a:t>+85%</a:t>
                       </a:r>
                     </a:p>
                   </a:txBody>
@@ -6392,7 +6139,7 @@
 </p:sld>
 </file>
 
-<file path=ppt/slides/slide17.xml><?xml version="1.0" encoding="utf-8"?>
+<file path=ppt/slides/slide15.xml><?xml version="1.0" encoding="utf-8"?>
 <p:sld xmlns:a="http://schemas.openxmlformats.org/drawingml/2006/main" xmlns:p="http://schemas.openxmlformats.org/presentationml/2006/main" xmlns:r="http://schemas.openxmlformats.org/officeDocument/2006/relationships">
   <p:cSld>
     <p:spTree>
@@ -6710,7 +6457,7 @@
                             <a:srgbClr val="1A1A1A"/>
                           </a:solidFill>
                         </a:rPr>
-                        <a:t>-31%</a:t>
+                        <a:t>-38%</a:t>
                       </a:r>
                     </a:p>
                   </a:txBody>
@@ -6831,7 +6578,7 @@
                             <a:srgbClr val="1A1A1A"/>
                           </a:solidFill>
                         </a:rPr>
-                        <a:t>-11%</a:t>
+                        <a:t>-19%</a:t>
                       </a:r>
                     </a:p>
                   </a:txBody>
@@ -6952,7 +6699,7 @@
                             <a:srgbClr val="1A1A1A"/>
                           </a:solidFill>
                         </a:rPr>
-                        <a:t>+17%</a:t>
+                        <a:t>+6%</a:t>
                       </a:r>
                     </a:p>
                   </a:txBody>
@@ -7011,6 +6758,368 @@
             </a:pPr>
             <a:r>
               <a:t>Probability-weighted downside driven by margin compression and cyclical de-rate</a:t>
+            </a:r>
+          </a:p>
+        </p:txBody>
+      </p:sp>
+    </p:spTree>
+  </p:cSld>
+  <p:clrMapOvr>
+    <a:masterClrMapping/>
+  </p:clrMapOvr>
+</p:sld>
+</file>
+
+<file path=ppt/slides/slide16.xml><?xml version="1.0" encoding="utf-8"?>
+<p:sld xmlns:a="http://schemas.openxmlformats.org/drawingml/2006/main" xmlns:p="http://schemas.openxmlformats.org/presentationml/2006/main" xmlns:r="http://schemas.openxmlformats.org/officeDocument/2006/relationships">
+  <p:cSld>
+    <p:spTree>
+      <p:nvGrpSpPr>
+        <p:cNvPr id="1" name=""/>
+        <p:cNvGrpSpPr/>
+        <p:nvPr/>
+      </p:nvGrpSpPr>
+      <p:grpSpPr/>
+      <p:sp>
+        <p:nvSpPr>
+          <p:cNvPr id="2" name="TextBox 1"/>
+          <p:cNvSpPr txBox="1"/>
+          <p:nvPr/>
+        </p:nvSpPr>
+        <p:spPr>
+          <a:xfrm>
+            <a:off x="457200" y="274320"/>
+            <a:ext cx="11430000" cy="731520"/>
+          </a:xfrm>
+          <a:prstGeom prst="rect">
+            <a:avLst/>
+          </a:prstGeom>
+          <a:noFill/>
+        </p:spPr>
+        <p:txBody>
+          <a:bodyPr wrap="square">
+            <a:spAutoFit/>
+          </a:bodyPr>
+          <a:lstStyle/>
+          <a:p>
+            <a:pPr>
+              <a:defRPr sz="2800" b="1">
+                <a:solidFill>
+                  <a:srgbClr val="002F5D"/>
+                </a:solidFill>
+              </a:defRPr>
+            </a:pPr>
+            <a:r>
+              <a:t>Catalysts Over Next 6-12 Months</a:t>
+            </a:r>
+          </a:p>
+        </p:txBody>
+      </p:sp>
+      <p:sp>
+        <p:nvSpPr>
+          <p:cNvPr id="3" name="TextBox 2"/>
+          <p:cNvSpPr txBox="1"/>
+          <p:nvPr/>
+        </p:nvSpPr>
+        <p:spPr>
+          <a:xfrm>
+            <a:off x="640080" y="1188720"/>
+            <a:ext cx="10972800" cy="5029200"/>
+          </a:xfrm>
+          <a:prstGeom prst="rect">
+            <a:avLst/>
+          </a:prstGeom>
+          <a:noFill/>
+        </p:spPr>
+        <p:txBody>
+          <a:bodyPr wrap="square">
+            <a:spAutoFit/>
+          </a:bodyPr>
+          <a:lstStyle/>
+          <a:p>
+            <a:pPr>
+              <a:spcAft>
+                <a:spcPts val="800"/>
+              </a:spcAft>
+              <a:defRPr sz="1800">
+                <a:solidFill>
+                  <a:srgbClr val="1A1A1A"/>
+                </a:solidFill>
+              </a:defRPr>
+            </a:pPr>
+            <a:r>
+              <a:t>• LONG CATALYSTS (Dongfang):</a:t>
+            </a:r>
+          </a:p>
+          <a:p>
+            <a:pPr>
+              <a:spcAft>
+                <a:spcPts val="800"/>
+              </a:spcAft>
+              <a:defRPr sz="1800">
+                <a:solidFill>
+                  <a:srgbClr val="1A1A1A"/>
+                </a:solidFill>
+              </a:defRPr>
+            </a:pPr>
+            <a:r>
+              <a:t>•   • Quarterly overseas order wins (Middle East, SE Asia)</a:t>
+            </a:r>
+          </a:p>
+          <a:p>
+            <a:pPr>
+              <a:spcAft>
+                <a:spcPts val="800"/>
+              </a:spcAft>
+              <a:defRPr sz="1800">
+                <a:solidFill>
+                  <a:srgbClr val="1A1A1A"/>
+                </a:solidFill>
+              </a:defRPr>
+            </a:pPr>
+            <a:r>
+              <a:t>•   • China State Grid capex announcements</a:t>
+            </a:r>
+          </a:p>
+          <a:p>
+            <a:pPr>
+              <a:spcAft>
+                <a:spcPts val="800"/>
+              </a:spcAft>
+              <a:defRPr sz="1800">
+                <a:solidFill>
+                  <a:srgbClr val="1A1A1A"/>
+                </a:solidFill>
+              </a:defRPr>
+            </a:pPr>
+            <a:r>
+              <a:t>•   • Gross margin expansion on overseas mix shift</a:t>
+            </a:r>
+          </a:p>
+          <a:p>
+            <a:pPr>
+              <a:spcAft>
+                <a:spcPts val="800"/>
+              </a:spcAft>
+              <a:defRPr sz="1800">
+                <a:solidFill>
+                  <a:srgbClr val="1A1A1A"/>
+                </a:solidFill>
+              </a:defRPr>
+            </a:pPr>
+            <a:r>
+              <a:t>• SHORT CATALYSTS (Yantai Jereh):</a:t>
+            </a:r>
+          </a:p>
+          <a:p>
+            <a:pPr>
+              <a:spcAft>
+                <a:spcPts val="800"/>
+              </a:spcAft>
+              <a:defRPr sz="1800">
+                <a:solidFill>
+                  <a:srgbClr val="1A1A1A"/>
+                </a:solidFill>
+              </a:defRPr>
+            </a:pPr>
+            <a:r>
+              <a:t>•   • Q2 earnings miss on logistics cost</a:t>
+            </a:r>
+          </a:p>
+          <a:p>
+            <a:pPr>
+              <a:spcAft>
+                <a:spcPts val="800"/>
+              </a:spcAft>
+              <a:defRPr sz="1800">
+                <a:solidFill>
+                  <a:srgbClr val="1A1A1A"/>
+                </a:solidFill>
+              </a:defRPr>
+            </a:pPr>
+            <a:r>
+              <a:t>•   • Guidance cut on North American rig count</a:t>
+            </a:r>
+          </a:p>
+          <a:p>
+            <a:pPr>
+              <a:spcAft>
+                <a:spcPts val="800"/>
+              </a:spcAft>
+              <a:defRPr sz="1800">
+                <a:solidFill>
+                  <a:srgbClr val="1A1A1A"/>
+                </a:solidFill>
+              </a:defRPr>
+            </a:pPr>
+            <a:r>
+              <a:t>•   • Project deferral announcements from majors</a:t>
+            </a:r>
+          </a:p>
+        </p:txBody>
+      </p:sp>
+    </p:spTree>
+  </p:cSld>
+  <p:clrMapOvr>
+    <a:masterClrMapping/>
+  </p:clrMapOvr>
+</p:sld>
+</file>
+
+<file path=ppt/slides/slide17.xml><?xml version="1.0" encoding="utf-8"?>
+<p:sld xmlns:a="http://schemas.openxmlformats.org/drawingml/2006/main" xmlns:p="http://schemas.openxmlformats.org/presentationml/2006/main" xmlns:r="http://schemas.openxmlformats.org/officeDocument/2006/relationships">
+  <p:cSld>
+    <p:spTree>
+      <p:nvGrpSpPr>
+        <p:cNvPr id="1" name=""/>
+        <p:cNvGrpSpPr/>
+        <p:nvPr/>
+      </p:nvGrpSpPr>
+      <p:grpSpPr/>
+      <p:sp>
+        <p:nvSpPr>
+          <p:cNvPr id="2" name="TextBox 1"/>
+          <p:cNvSpPr txBox="1"/>
+          <p:nvPr/>
+        </p:nvSpPr>
+        <p:spPr>
+          <a:xfrm>
+            <a:off x="457200" y="274320"/>
+            <a:ext cx="11430000" cy="731520"/>
+          </a:xfrm>
+          <a:prstGeom prst="rect">
+            <a:avLst/>
+          </a:prstGeom>
+          <a:noFill/>
+        </p:spPr>
+        <p:txBody>
+          <a:bodyPr wrap="square">
+            <a:spAutoFit/>
+          </a:bodyPr>
+          <a:lstStyle/>
+          <a:p>
+            <a:pPr>
+              <a:defRPr sz="2800" b="1">
+                <a:solidFill>
+                  <a:srgbClr val="002F5D"/>
+                </a:solidFill>
+              </a:defRPr>
+            </a:pPr>
+            <a:r>
+              <a:t>Risks and Mitigants</a:t>
+            </a:r>
+          </a:p>
+        </p:txBody>
+      </p:sp>
+      <p:sp>
+        <p:nvSpPr>
+          <p:cNvPr id="3" name="TextBox 2"/>
+          <p:cNvSpPr txBox="1"/>
+          <p:nvPr/>
+        </p:nvSpPr>
+        <p:spPr>
+          <a:xfrm>
+            <a:off x="640080" y="1188720"/>
+            <a:ext cx="10972800" cy="5029200"/>
+          </a:xfrm>
+          <a:prstGeom prst="rect">
+            <a:avLst/>
+          </a:prstGeom>
+          <a:noFill/>
+        </p:spPr>
+        <p:txBody>
+          <a:bodyPr wrap="square">
+            <a:spAutoFit/>
+          </a:bodyPr>
+          <a:lstStyle/>
+          <a:p>
+            <a:pPr>
+              <a:spcAft>
+                <a:spcPts val="800"/>
+              </a:spcAft>
+              <a:defRPr sz="1800">
+                <a:solidFill>
+                  <a:srgbClr val="1A1A1A"/>
+                </a:solidFill>
+              </a:defRPr>
+            </a:pPr>
+            <a:r>
+              <a:t>• Oil price spike may lift Jereh temporarily → pair trade cushions absolute exposure</a:t>
+            </a:r>
+          </a:p>
+          <a:p>
+            <a:pPr>
+              <a:spcAft>
+                <a:spcPts val="800"/>
+              </a:spcAft>
+              <a:defRPr sz="1800">
+                <a:solidFill>
+                  <a:srgbClr val="1A1A1A"/>
+                </a:solidFill>
+              </a:defRPr>
+            </a:pPr>
+            <a:r>
+              <a:t>• Dongfang China beta/multiple compression → offset by 140B RMB backlog visibility</a:t>
+            </a:r>
+          </a:p>
+          <a:p>
+            <a:pPr>
+              <a:spcAft>
+                <a:spcPts val="800"/>
+              </a:spcAft>
+              <a:defRPr sz="1800">
+                <a:solidFill>
+                  <a:srgbClr val="1A1A1A"/>
+                </a:solidFill>
+              </a:defRPr>
+            </a:pPr>
+            <a:r>
+              <a:t>• Grid capex delays → multi-year policy demand reduces single-year risk</a:t>
+            </a:r>
+          </a:p>
+          <a:p>
+            <a:pPr>
+              <a:spcAft>
+                <a:spcPts val="800"/>
+              </a:spcAft>
+              <a:defRPr sz="1800">
+                <a:solidFill>
+                  <a:srgbClr val="1A1A1A"/>
+                </a:solidFill>
+              </a:defRPr>
+            </a:pPr>
+            <a:r>
+              <a:t>• FX risk on RMB → monitored; sensitivity table in appendix</a:t>
+            </a:r>
+          </a:p>
+          <a:p>
+            <a:pPr>
+              <a:spcAft>
+                <a:spcPts val="800"/>
+              </a:spcAft>
+              <a:defRPr sz="1800">
+                <a:solidFill>
+                  <a:srgbClr val="1A1A1A"/>
+                </a:solidFill>
+              </a:defRPr>
+            </a:pPr>
+            <a:r>
+              <a:t>• SHORT SQUEEZE / BORROW COST: Jereh borrow cost ~2.5-7% (China A-share); position sizing limits risk</a:t>
+            </a:r>
+          </a:p>
+          <a:p>
+            <a:pPr>
+              <a:spcAft>
+                <a:spcPts val="800"/>
+              </a:spcAft>
+              <a:defRPr sz="1800">
+                <a:solidFill>
+                  <a:srgbClr val="1A1A1A"/>
+                </a:solidFill>
+              </a:defRPr>
+            </a:pPr>
+            <a:r>
+              <a:t>• Thesis kill switch: Jereh margin expansion + Dongfang backlog decline → exit pair</a:t>
             </a:r>
           </a:p>
         </p:txBody>
@@ -7050,7 +7159,7 @@
           <a:noFill/>
         </p:spPr>
         <p:txBody>
-          <a:bodyPr wrap="none">
+          <a:bodyPr wrap="square">
             <a:spAutoFit/>
           </a:bodyPr>
           <a:lstStyle/>
@@ -7063,45 +7172,21 @@
               </a:defRPr>
             </a:pPr>
             <a:r>
-              <a:t>EPS Sensitivity: What Drives Dongfang Valuation?</a:t>
-            </a:r>
-          </a:p>
-        </p:txBody>
-      </p:sp>
-      <p:pic>
-        <p:nvPicPr>
-          <p:cNvPr id="3" name="Picture 2" descr="sensitivity_tornado.png"/>
-          <p:cNvPicPr>
-            <a:picLocks noChangeAspect="1"/>
-          </p:cNvPicPr>
+              <a:t>Execution: Position Sizing, Carry &amp; Liquidity</a:t>
+            </a:r>
+          </a:p>
+        </p:txBody>
+      </p:sp>
+      <p:sp>
+        <p:nvSpPr>
+          <p:cNvPr id="3" name="TextBox 2"/>
+          <p:cNvSpPr txBox="1"/>
           <p:nvPr/>
-        </p:nvPicPr>
-        <p:blipFill>
-          <a:blip r:embed="rId2"/>
-          <a:stretch>
-            <a:fillRect/>
-          </a:stretch>
-        </p:blipFill>
+        </p:nvSpPr>
         <p:spPr>
           <a:xfrm>
-            <a:off x="1371600" y="1188720"/>
-            <a:ext cx="9144000" cy="5029200"/>
-          </a:xfrm>
-          <a:prstGeom prst="rect">
-            <a:avLst/>
-          </a:prstGeom>
-        </p:spPr>
-      </p:pic>
-      <p:sp>
-        <p:nvSpPr>
-          <p:cNvPr id="4" name="TextBox 3"/>
-          <p:cNvSpPr txBox="1"/>
-          <p:nvPr/>
-        </p:nvSpPr>
-        <p:spPr>
-          <a:xfrm>
-            <a:off x="457200" y="6309360"/>
-            <a:ext cx="11430000" cy="457200"/>
+            <a:off x="640080" y="1188720"/>
+            <a:ext cx="10972800" cy="5029200"/>
           </a:xfrm>
           <a:prstGeom prst="rect">
             <a:avLst/>
@@ -7109,20 +7194,293 @@
           <a:noFill/>
         </p:spPr>
         <p:txBody>
-          <a:bodyPr wrap="none">
+          <a:bodyPr wrap="square">
             <a:spAutoFit/>
           </a:bodyPr>
           <a:lstStyle/>
           <a:p>
             <a:pPr>
-              <a:defRPr sz="1200" i="1">
-                <a:solidFill>
-                  <a:srgbClr val="666666"/>
-                </a:solidFill>
-              </a:defRPr>
-            </a:pPr>
-            <a:r>
-              <a:t>Base case EPS ¥3.5. Grid equipment margin + State Grid orders are key drivers. Overseas export mix secondary.</a:t>
+              <a:spcAft>
+                <a:spcPts val="800"/>
+              </a:spcAft>
+              <a:defRPr sz="1800">
+                <a:solidFill>
+                  <a:srgbClr val="1A1A1A"/>
+                </a:solidFill>
+              </a:defRPr>
+            </a:pPr>
+            <a:r>
+              <a:t>• POSITION SIZING (Risk-Based):</a:t>
+            </a:r>
+          </a:p>
+          <a:p>
+            <a:pPr>
+              <a:spcAft>
+                <a:spcPts val="800"/>
+              </a:spcAft>
+              <a:defRPr sz="1800">
+                <a:solidFill>
+                  <a:srgbClr val="1A1A1A"/>
+                </a:solidFill>
+              </a:defRPr>
+            </a:pPr>
+            <a:r>
+              <a:t>•   • Portfolio: $100M example | Max risk per trade: 2% ($2M)</a:t>
+            </a:r>
+          </a:p>
+          <a:p>
+            <a:pPr>
+              <a:spcAft>
+                <a:spcPts val="800"/>
+              </a:spcAft>
+              <a:defRPr sz="1800">
+                <a:solidFill>
+                  <a:srgbClr val="1A1A1A"/>
+                </a:solidFill>
+              </a:defRPr>
+            </a:pPr>
+            <a:r>
+              <a:t>•   • Pair volatility: 83.2% annual | Position size: 1.2% of portfolio ($1.2M notional)</a:t>
+            </a:r>
+          </a:p>
+          <a:p>
+            <a:pPr>
+              <a:spcAft>
+                <a:spcPts val="800"/>
+              </a:spcAft>
+              <a:defRPr sz="1800">
+                <a:solidFill>
+                  <a:srgbClr val="1A1A1A"/>
+                </a:solidFill>
+              </a:defRPr>
+            </a:pPr>
+            <a:r>
+              <a:t>•   • Allocation: $0.6M long Dongfang / $0.6M short Jereh (dollar-neutral)</a:t>
+            </a:r>
+          </a:p>
+          <a:p>
+            <a:pPr>
+              <a:spcAft>
+                <a:spcPts val="800"/>
+              </a:spcAft>
+              <a:defRPr sz="1800">
+                <a:solidFill>
+                  <a:srgbClr val="1A1A1A"/>
+                </a:solidFill>
+              </a:defRPr>
+            </a:pPr>
+            <a:r>
+              <a:t>• </a:t>
+            </a:r>
+          </a:p>
+          <a:p>
+            <a:pPr>
+              <a:spcAft>
+                <a:spcPts val="800"/>
+              </a:spcAft>
+              <a:defRPr sz="1800">
+                <a:solidFill>
+                  <a:srgbClr val="1A1A1A"/>
+                </a:solidFill>
+              </a:defRPr>
+            </a:pPr>
+            <a:r>
+              <a:t>• CARRY COST (6-month hold):</a:t>
+            </a:r>
+          </a:p>
+          <a:p>
+            <a:pPr>
+              <a:spcAft>
+                <a:spcPts val="800"/>
+              </a:spcAft>
+              <a:defRPr sz="1800">
+                <a:solidFill>
+                  <a:srgbClr val="1A1A1A"/>
+                </a:solidFill>
+              </a:defRPr>
+            </a:pPr>
+            <a:r>
+              <a:t>•   • Jereh borrow cost: 2.5-7% annually → $5K-19K cost (China A-share)</a:t>
+            </a:r>
+          </a:p>
+          <a:p>
+            <a:pPr>
+              <a:spcAft>
+                <a:spcPts val="800"/>
+              </a:spcAft>
+              <a:defRPr sz="1800">
+                <a:solidFill>
+                  <a:srgbClr val="1A1A1A"/>
+                </a:solidFill>
+              </a:defRPr>
+            </a:pPr>
+            <a:r>
+              <a:t>•   • Jereh dividend (short pays): 0.8% → ~$5K cost</a:t>
+            </a:r>
+          </a:p>
+          <a:p>
+            <a:pPr>
+              <a:spcAft>
+                <a:spcPts val="800"/>
+              </a:spcAft>
+              <a:defRPr sz="1800">
+                <a:solidFill>
+                  <a:srgbClr val="1A1A1A"/>
+                </a:solidFill>
+              </a:defRPr>
+            </a:pPr>
+            <a:r>
+              <a:t>•   • Dongfang dividend (long receives): 1.5% → ~$9K income</a:t>
+            </a:r>
+          </a:p>
+          <a:p>
+            <a:pPr>
+              <a:spcAft>
+                <a:spcPts val="800"/>
+              </a:spcAft>
+              <a:defRPr sz="1800">
+                <a:solidFill>
+                  <a:srgbClr val="1A1A1A"/>
+                </a:solidFill>
+              </a:defRPr>
+            </a:pPr>
+            <a:r>
+              <a:t>•   • Net carry: ~$18K-36K (1.5-3% of expected spread return)</a:t>
+            </a:r>
+          </a:p>
+          <a:p>
+            <a:pPr>
+              <a:spcAft>
+                <a:spcPts val="800"/>
+              </a:spcAft>
+              <a:defRPr sz="1800">
+                <a:solidFill>
+                  <a:srgbClr val="1A1A1A"/>
+                </a:solidFill>
+              </a:defRPr>
+            </a:pPr>
+            <a:r>
+              <a:t>• </a:t>
+            </a:r>
+          </a:p>
+          <a:p>
+            <a:pPr>
+              <a:spcAft>
+                <a:spcPts val="800"/>
+              </a:spcAft>
+              <a:defRPr sz="1800">
+                <a:solidFill>
+                  <a:srgbClr val="1A1A1A"/>
+                </a:solidFill>
+              </a:defRPr>
+            </a:pPr>
+            <a:r>
+              <a:t>• LIQUIDITY &amp; EXECUTION:</a:t>
+            </a:r>
+          </a:p>
+          <a:p>
+            <a:pPr>
+              <a:spcAft>
+                <a:spcPts val="800"/>
+              </a:spcAft>
+              <a:defRPr sz="1800">
+                <a:solidFill>
+                  <a:srgbClr val="1A1A1A"/>
+                </a:solidFill>
+              </a:defRPr>
+            </a:pPr>
+            <a:r>
+              <a:t>•   • Dongfang (HK): ~$147M daily volume | Execute in &lt;1 day | HKEX access</a:t>
+            </a:r>
+          </a:p>
+          <a:p>
+            <a:pPr>
+              <a:spcAft>
+                <a:spcPts val="800"/>
+              </a:spcAft>
+              <a:defRPr sz="1800">
+                <a:solidFill>
+                  <a:srgbClr val="1A1A1A"/>
+                </a:solidFill>
+              </a:defRPr>
+            </a:pPr>
+            <a:r>
+              <a:t>•   • Jereh: ~$589M daily volume | Execute in &lt;1 day | Shenzhen A-share</a:t>
+            </a:r>
+          </a:p>
+          <a:p>
+            <a:pPr>
+              <a:spcAft>
+                <a:spcPts val="800"/>
+              </a:spcAft>
+              <a:defRPr sz="1800">
+                <a:solidFill>
+                  <a:srgbClr val="1A1A1A"/>
+                </a:solidFill>
+              </a:defRPr>
+            </a:pPr>
+            <a:r>
+              <a:t>•   • Dongfang trades on HKEX (1072.HK) - no Stock Connect needed</a:t>
+            </a:r>
+          </a:p>
+          <a:p>
+            <a:pPr>
+              <a:spcAft>
+                <a:spcPts val="800"/>
+              </a:spcAft>
+              <a:defRPr sz="1800">
+                <a:solidFill>
+                  <a:srgbClr val="1A1A1A"/>
+                </a:solidFill>
+              </a:defRPr>
+            </a:pPr>
+            <a:r>
+              <a:t>• </a:t>
+            </a:r>
+          </a:p>
+          <a:p>
+            <a:pPr>
+              <a:spcAft>
+                <a:spcPts val="800"/>
+              </a:spcAft>
+              <a:defRPr sz="1800">
+                <a:solidFill>
+                  <a:srgbClr val="1A1A1A"/>
+                </a:solidFill>
+              </a:defRPr>
+            </a:pPr>
+            <a:r>
+              <a:t>• TECHNICAL TIMING:</a:t>
+            </a:r>
+          </a:p>
+          <a:p>
+            <a:pPr>
+              <a:spcAft>
+                <a:spcPts val="800"/>
+              </a:spcAft>
+              <a:defRPr sz="1800">
+                <a:solidFill>
+                  <a:srgbClr val="1A1A1A"/>
+                </a:solidFill>
+              </a:defRPr>
+            </a:pPr>
+            <a:r>
+              <a:t>•   • Jereh: Near highs, elevated RSI → Monitor for short entry signals</a:t>
+            </a:r>
+          </a:p>
+          <a:p>
+            <a:pPr>
+              <a:spcAft>
+                <a:spcPts val="800"/>
+              </a:spcAft>
+              <a:defRPr sz="1800">
+                <a:solidFill>
+                  <a:srgbClr val="1A1A1A"/>
+                </a:solidFill>
+              </a:defRPr>
+            </a:pPr>
+            <a:r>
+              <a:t>•   • Dongfang: Near highs but policy tailwinds support entry</a:t>
             </a:r>
           </a:p>
         </p:txBody>
@@ -7175,7 +7533,7 @@
               </a:defRPr>
             </a:pPr>
             <a:r>
-              <a:t>Catalysts Over Next 6-12 Months</a:t>
+              <a:t>Text Analysis: Scope and Limitations</a:t>
             </a:r>
           </a:p>
         </p:txBody>
@@ -7213,7 +7571,7 @@
               </a:defRPr>
             </a:pPr>
             <a:r>
-              <a:t>• LONG CATALYSTS (Dongfang):</a:t>
+              <a:t>• WHAT THIS MODULE DOES:</a:t>
             </a:r>
           </a:p>
           <a:p>
@@ -7228,7 +7586,7 @@
               </a:defRPr>
             </a:pPr>
             <a:r>
-              <a:t>•   • Quarterly overseas order wins (Middle East, SE Asia)</a:t>
+              <a:t>•   • Compiles text evidence from 47 documents / 426 paragraphs into structured categories</a:t>
             </a:r>
           </a:p>
           <a:p>
@@ -7243,7 +7601,7 @@
               </a:defRPr>
             </a:pPr>
             <a:r>
-              <a:t>•   • China State Grid capex announcements</a:t>
+              <a:t>•   • Surfaces specific quotes and management language for manual review</a:t>
             </a:r>
           </a:p>
           <a:p>
@@ -7258,7 +7616,7 @@
               </a:defRPr>
             </a:pPr>
             <a:r>
-              <a:t>•   • Gross margin expansion on overseas mix shift</a:t>
+              <a:t>•   • Feeds a predictive scorecard with fundamentals, valuation, technicals, and catalysts</a:t>
             </a:r>
           </a:p>
           <a:p>
@@ -7273,7 +7631,7 @@
               </a:defRPr>
             </a:pPr>
             <a:r>
-              <a:t>• SHORT CATALYSTS (Yantai Jereh):  • Q2 earnings miss on logistics cost</a:t>
+              <a:t>• CLAIM BOUNDARY:</a:t>
             </a:r>
           </a:p>
           <a:p>
@@ -7288,7 +7646,7 @@
               </a:defRPr>
             </a:pPr>
             <a:r>
-              <a:t>•   • Guidance cut on North American rig count</a:t>
+              <a:t>•   • Predictive input, not autonomous forecast — text signals do not trade themselves</a:t>
             </a:r>
           </a:p>
           <a:p>
@@ -7303,7 +7661,52 @@
               </a:defRPr>
             </a:pPr>
             <a:r>
-              <a:t>•   • Project deferral announcements from majors</a:t>
+              <a:t>•   • Corpus is useful for thesis discovery, but still too small for standalone statistical alpha claims</a:t>
+            </a:r>
+          </a:p>
+          <a:p>
+            <a:pPr>
+              <a:spcAft>
+                <a:spcPts val="800"/>
+              </a:spcAft>
+              <a:defRPr sz="1800">
+                <a:solidFill>
+                  <a:srgbClr val="1A1A1A"/>
+                </a:solidFill>
+              </a:defRPr>
+            </a:pPr>
+            <a:r>
+              <a:t>•   • Classification relies on keyword patterns, not deep semantic understanding</a:t>
+            </a:r>
+          </a:p>
+          <a:p>
+            <a:pPr>
+              <a:spcAft>
+                <a:spcPts val="800"/>
+              </a:spcAft>
+              <a:defRPr sz="1800">
+                <a:solidFill>
+                  <a:srgbClr val="1A1A1A"/>
+                </a:solidFill>
+              </a:defRPr>
+            </a:pPr>
+            <a:r>
+              <a:t>•   • Source bias: RSS feeds overweight news vs. operational 8-K filings</a:t>
+            </a:r>
+          </a:p>
+          <a:p>
+            <a:pPr>
+              <a:spcAft>
+                <a:spcPts val="800"/>
+              </a:spcAft>
+              <a:defRPr sz="1800">
+                <a:solidFill>
+                  <a:srgbClr val="1A1A1A"/>
+                </a:solidFill>
+              </a:defRPr>
+            </a:pPr>
+            <a:r>
+              <a:t>•   • Every output requires human verification before investment decisions</a:t>
             </a:r>
           </a:p>
         </p:txBody>
@@ -7409,7 +7812,7 @@
               </a:defRPr>
             </a:pPr>
             <a:r>
-              <a:t>• Long Dongfang Electric @ target upside: 47.6%</a:t>
+              <a:t>• Long Dongfang Electric @ target upside: 44.9%</a:t>
             </a:r>
           </a:p>
           <a:p>
@@ -7424,7 +7827,7 @@
               </a:defRPr>
             </a:pPr>
             <a:r>
-              <a:t>• Short Yantai Jereh @ target downside: -12.2%</a:t>
+              <a:t>• Short Yantai Jereh @ target downside: -20.5%</a:t>
             </a:r>
           </a:p>
           <a:p>
@@ -7439,7 +7842,7 @@
               </a:defRPr>
             </a:pPr>
             <a:r>
-              <a:t>• Pair spread expected return: 59.8%</a:t>
+              <a:t>• Pair spread expected return: 65.4%</a:t>
             </a:r>
           </a:p>
           <a:p>
@@ -7483,1217 +7886,6 @@
 </file>
 
 <file path=ppt/slides/slide20.xml><?xml version="1.0" encoding="utf-8"?>
-<p:sld xmlns:a="http://schemas.openxmlformats.org/drawingml/2006/main" xmlns:p="http://schemas.openxmlformats.org/presentationml/2006/main" xmlns:r="http://schemas.openxmlformats.org/officeDocument/2006/relationships">
-  <p:cSld>
-    <p:spTree>
-      <p:nvGrpSpPr>
-        <p:cNvPr id="1" name=""/>
-        <p:cNvGrpSpPr/>
-        <p:nvPr/>
-      </p:nvGrpSpPr>
-      <p:grpSpPr/>
-      <p:sp>
-        <p:nvSpPr>
-          <p:cNvPr id="2" name="TextBox 1"/>
-          <p:cNvSpPr txBox="1"/>
-          <p:nvPr/>
-        </p:nvSpPr>
-        <p:spPr>
-          <a:xfrm>
-            <a:off x="457200" y="274320"/>
-            <a:ext cx="11430000" cy="731520"/>
-          </a:xfrm>
-          <a:prstGeom prst="rect">
-            <a:avLst/>
-          </a:prstGeom>
-          <a:noFill/>
-        </p:spPr>
-        <p:txBody>
-          <a:bodyPr wrap="square">
-            <a:spAutoFit/>
-          </a:bodyPr>
-          <a:lstStyle/>
-          <a:p>
-            <a:pPr>
-              <a:defRPr sz="2800" b="1">
-                <a:solidFill>
-                  <a:srgbClr val="002F5D"/>
-                </a:solidFill>
-              </a:defRPr>
-            </a:pPr>
-            <a:r>
-              <a:t>Risks and Mitigants</a:t>
-            </a:r>
-          </a:p>
-        </p:txBody>
-      </p:sp>
-      <p:sp>
-        <p:nvSpPr>
-          <p:cNvPr id="3" name="TextBox 2"/>
-          <p:cNvSpPr txBox="1"/>
-          <p:nvPr/>
-        </p:nvSpPr>
-        <p:spPr>
-          <a:xfrm>
-            <a:off x="640080" y="1188720"/>
-            <a:ext cx="10972800" cy="5029200"/>
-          </a:xfrm>
-          <a:prstGeom prst="rect">
-            <a:avLst/>
-          </a:prstGeom>
-          <a:noFill/>
-        </p:spPr>
-        <p:txBody>
-          <a:bodyPr wrap="square">
-            <a:spAutoFit/>
-          </a:bodyPr>
-          <a:lstStyle/>
-          <a:p>
-            <a:pPr>
-              <a:spcAft>
-                <a:spcPts val="800"/>
-              </a:spcAft>
-              <a:defRPr sz="1800">
-                <a:solidFill>
-                  <a:srgbClr val="1A1A1A"/>
-                </a:solidFill>
-              </a:defRPr>
-            </a:pPr>
-            <a:r>
-              <a:t>• Oil price spike may lift Jereh temporarily → pair trade cushions absolute exposure</a:t>
-            </a:r>
-          </a:p>
-          <a:p>
-            <a:pPr>
-              <a:spcAft>
-                <a:spcPts val="800"/>
-              </a:spcAft>
-              <a:defRPr sz="1800">
-                <a:solidFill>
-                  <a:srgbClr val="1A1A1A"/>
-                </a:solidFill>
-              </a:defRPr>
-            </a:pPr>
-            <a:r>
-              <a:t>• Dongfang China beta/multiple compression → offset by 140B RMB backlog visibility</a:t>
-            </a:r>
-          </a:p>
-          <a:p>
-            <a:pPr>
-              <a:spcAft>
-                <a:spcPts val="800"/>
-              </a:spcAft>
-              <a:defRPr sz="1800">
-                <a:solidFill>
-                  <a:srgbClr val="1A1A1A"/>
-                </a:solidFill>
-              </a:defRPr>
-            </a:pPr>
-            <a:r>
-              <a:t>• Grid capex delays → multi-year policy demand reduces single-year risk</a:t>
-            </a:r>
-          </a:p>
-          <a:p>
-            <a:pPr>
-              <a:spcAft>
-                <a:spcPts val="800"/>
-              </a:spcAft>
-              <a:defRPr sz="1800">
-                <a:solidFill>
-                  <a:srgbClr val="1A1A1A"/>
-                </a:solidFill>
-              </a:defRPr>
-            </a:pPr>
-            <a:r>
-              <a:t>• FX risk on RMB → monitored; sensitivity table in appendix</a:t>
-            </a:r>
-          </a:p>
-          <a:p>
-            <a:pPr>
-              <a:spcAft>
-                <a:spcPts val="800"/>
-              </a:spcAft>
-              <a:defRPr sz="1800">
-                <a:solidFill>
-                  <a:srgbClr val="1A1A1A"/>
-                </a:solidFill>
-              </a:defRPr>
-            </a:pPr>
-            <a:r>
-              <a:t>• SHORT SQUEEZE / BORROW COST: Jereh borrow cost ~2.5-7% (China A-share); position sizing limits risk</a:t>
-            </a:r>
-          </a:p>
-          <a:p>
-            <a:pPr>
-              <a:spcAft>
-                <a:spcPts val="800"/>
-              </a:spcAft>
-              <a:defRPr sz="1800">
-                <a:solidFill>
-                  <a:srgbClr val="1A1A1A"/>
-                </a:solidFill>
-              </a:defRPr>
-            </a:pPr>
-            <a:r>
-              <a:t>• Thesis kill switch: Jereh margin expansion + Dongfang backlog decline → exit pair</a:t>
-            </a:r>
-          </a:p>
-        </p:txBody>
-      </p:sp>
-    </p:spTree>
-  </p:cSld>
-  <p:clrMapOvr>
-    <a:masterClrMapping/>
-  </p:clrMapOvr>
-</p:sld>
-</file>
-
-<file path=ppt/slides/slide21.xml><?xml version="1.0" encoding="utf-8"?>
-<p:sld xmlns:a="http://schemas.openxmlformats.org/drawingml/2006/main" xmlns:p="http://schemas.openxmlformats.org/presentationml/2006/main" xmlns:r="http://schemas.openxmlformats.org/officeDocument/2006/relationships">
-  <p:cSld>
-    <p:spTree>
-      <p:nvGrpSpPr>
-        <p:cNvPr id="1" name=""/>
-        <p:cNvGrpSpPr/>
-        <p:nvPr/>
-      </p:nvGrpSpPr>
-      <p:grpSpPr/>
-      <p:sp>
-        <p:nvSpPr>
-          <p:cNvPr id="2" name="TextBox 1"/>
-          <p:cNvSpPr txBox="1"/>
-          <p:nvPr/>
-        </p:nvSpPr>
-        <p:spPr>
-          <a:xfrm>
-            <a:off x="457200" y="274320"/>
-            <a:ext cx="11430000" cy="731520"/>
-          </a:xfrm>
-          <a:prstGeom prst="rect">
-            <a:avLst/>
-          </a:prstGeom>
-          <a:noFill/>
-        </p:spPr>
-        <p:txBody>
-          <a:bodyPr wrap="square">
-            <a:spAutoFit/>
-          </a:bodyPr>
-          <a:lstStyle/>
-          <a:p>
-            <a:pPr>
-              <a:defRPr sz="2800" b="1">
-                <a:solidFill>
-                  <a:srgbClr val="002F5D"/>
-                </a:solidFill>
-              </a:defRPr>
-            </a:pPr>
-            <a:r>
-              <a:t>Execution: Position Sizing, Carry &amp; Liquidity</a:t>
-            </a:r>
-          </a:p>
-        </p:txBody>
-      </p:sp>
-      <p:sp>
-        <p:nvSpPr>
-          <p:cNvPr id="3" name="TextBox 2"/>
-          <p:cNvSpPr txBox="1"/>
-          <p:nvPr/>
-        </p:nvSpPr>
-        <p:spPr>
-          <a:xfrm>
-            <a:off x="640080" y="1188720"/>
-            <a:ext cx="10972800" cy="5029200"/>
-          </a:xfrm>
-          <a:prstGeom prst="rect">
-            <a:avLst/>
-          </a:prstGeom>
-          <a:noFill/>
-        </p:spPr>
-        <p:txBody>
-          <a:bodyPr wrap="square">
-            <a:spAutoFit/>
-          </a:bodyPr>
-          <a:lstStyle/>
-          <a:p>
-            <a:pPr>
-              <a:spcAft>
-                <a:spcPts val="800"/>
-              </a:spcAft>
-              <a:defRPr sz="1800">
-                <a:solidFill>
-                  <a:srgbClr val="1A1A1A"/>
-                </a:solidFill>
-              </a:defRPr>
-            </a:pPr>
-            <a:r>
-              <a:t>• POSITION SIZING (Risk-Based):</a:t>
-            </a:r>
-          </a:p>
-          <a:p>
-            <a:pPr>
-              <a:spcAft>
-                <a:spcPts val="800"/>
-              </a:spcAft>
-              <a:defRPr sz="1800">
-                <a:solidFill>
-                  <a:srgbClr val="1A1A1A"/>
-                </a:solidFill>
-              </a:defRPr>
-            </a:pPr>
-            <a:r>
-              <a:t>•   • Portfolio: $100M example | Max risk per trade: 2% ($2M)</a:t>
-            </a:r>
-          </a:p>
-          <a:p>
-            <a:pPr>
-              <a:spcAft>
-                <a:spcPts val="800"/>
-              </a:spcAft>
-              <a:defRPr sz="1800">
-                <a:solidFill>
-                  <a:srgbClr val="1A1A1A"/>
-                </a:solidFill>
-              </a:defRPr>
-            </a:pPr>
-            <a:r>
-              <a:t>•   • Pair volatility: 42% annual | Position size: 2.4% of portfolio ($2.4M notional)</a:t>
-            </a:r>
-          </a:p>
-          <a:p>
-            <a:pPr>
-              <a:spcAft>
-                <a:spcPts val="800"/>
-              </a:spcAft>
-              <a:defRPr sz="1800">
-                <a:solidFill>
-                  <a:srgbClr val="1A1A1A"/>
-                </a:solidFill>
-              </a:defRPr>
-            </a:pPr>
-            <a:r>
-              <a:t>•   • Allocation: $1.2M long Dongfang / $1.2M short Jereh (dollar-neutral)</a:t>
-            </a:r>
-          </a:p>
-          <a:p>
-            <a:pPr>
-              <a:spcAft>
-                <a:spcPts val="800"/>
-              </a:spcAft>
-              <a:defRPr sz="1800">
-                <a:solidFill>
-                  <a:srgbClr val="1A1A1A"/>
-                </a:solidFill>
-              </a:defRPr>
-            </a:pPr>
-            <a:r>
-              <a:t>• </a:t>
-            </a:r>
-          </a:p>
-          <a:p>
-            <a:pPr>
-              <a:spcAft>
-                <a:spcPts val="800"/>
-              </a:spcAft>
-              <a:defRPr sz="1800">
-                <a:solidFill>
-                  <a:srgbClr val="1A1A1A"/>
-                </a:solidFill>
-              </a:defRPr>
-            </a:pPr>
-            <a:r>
-              <a:t>• CARRY COST (6-month hold):</a:t>
-            </a:r>
-          </a:p>
-          <a:p>
-            <a:pPr>
-              <a:spcAft>
-                <a:spcPts val="800"/>
-              </a:spcAft>
-              <a:defRPr sz="1800">
-                <a:solidFill>
-                  <a:srgbClr val="1A1A1A"/>
-                </a:solidFill>
-              </a:defRPr>
-            </a:pPr>
-            <a:r>
-              <a:t>•   • Jereh borrow cost: 2.5-7% annually → $5K-19K cost (China A-share)</a:t>
-            </a:r>
-          </a:p>
-          <a:p>
-            <a:pPr>
-              <a:spcAft>
-                <a:spcPts val="800"/>
-              </a:spcAft>
-              <a:defRPr sz="1800">
-                <a:solidFill>
-                  <a:srgbClr val="1A1A1A"/>
-                </a:solidFill>
-              </a:defRPr>
-            </a:pPr>
-            <a:r>
-              <a:t>•   • Jereh dividend (short pays): 0.8% → ~$5K cost</a:t>
-            </a:r>
-          </a:p>
-          <a:p>
-            <a:pPr>
-              <a:spcAft>
-                <a:spcPts val="800"/>
-              </a:spcAft>
-              <a:defRPr sz="1800">
-                <a:solidFill>
-                  <a:srgbClr val="1A1A1A"/>
-                </a:solidFill>
-              </a:defRPr>
-            </a:pPr>
-            <a:r>
-              <a:t>•   • Dongfang dividend (long receives): 1.5% → ~$9K income</a:t>
-            </a:r>
-          </a:p>
-          <a:p>
-            <a:pPr>
-              <a:spcAft>
-                <a:spcPts val="800"/>
-              </a:spcAft>
-              <a:defRPr sz="1800">
-                <a:solidFill>
-                  <a:srgbClr val="1A1A1A"/>
-                </a:solidFill>
-              </a:defRPr>
-            </a:pPr>
-            <a:r>
-              <a:t>•   • Net carry: ~$18K-36K (1.5-3% of expected spread return)</a:t>
-            </a:r>
-          </a:p>
-          <a:p>
-            <a:pPr>
-              <a:spcAft>
-                <a:spcPts val="800"/>
-              </a:spcAft>
-              <a:defRPr sz="1800">
-                <a:solidFill>
-                  <a:srgbClr val="1A1A1A"/>
-                </a:solidFill>
-              </a:defRPr>
-            </a:pPr>
-            <a:r>
-              <a:t>• </a:t>
-            </a:r>
-          </a:p>
-          <a:p>
-            <a:pPr>
-              <a:spcAft>
-                <a:spcPts val="800"/>
-              </a:spcAft>
-              <a:defRPr sz="1800">
-                <a:solidFill>
-                  <a:srgbClr val="1A1A1A"/>
-                </a:solidFill>
-              </a:defRPr>
-            </a:pPr>
-            <a:r>
-              <a:t>• LIQUIDITY &amp; EXECUTION:</a:t>
-            </a:r>
-          </a:p>
-          <a:p>
-            <a:pPr>
-              <a:spcAft>
-                <a:spcPts val="800"/>
-              </a:spcAft>
-              <a:defRPr sz="1800">
-                <a:solidFill>
-                  <a:srgbClr val="1A1A1A"/>
-                </a:solidFill>
-              </a:defRPr>
-            </a:pPr>
-            <a:r>
-              <a:t>•   • Dongfang (HK): ~$147M daily volume | Execute in &lt;1 day | HKEX access</a:t>
-            </a:r>
-          </a:p>
-          <a:p>
-            <a:pPr>
-              <a:spcAft>
-                <a:spcPts val="800"/>
-              </a:spcAft>
-              <a:defRPr sz="1800">
-                <a:solidFill>
-                  <a:srgbClr val="1A1A1A"/>
-                </a:solidFill>
-              </a:defRPr>
-            </a:pPr>
-            <a:r>
-              <a:t>•   • Jereh: ~$589M daily volume | Execute in &lt;1 day | Shenzhen A-share</a:t>
-            </a:r>
-          </a:p>
-          <a:p>
-            <a:pPr>
-              <a:spcAft>
-                <a:spcPts val="800"/>
-              </a:spcAft>
-              <a:defRPr sz="1800">
-                <a:solidFill>
-                  <a:srgbClr val="1A1A1A"/>
-                </a:solidFill>
-              </a:defRPr>
-            </a:pPr>
-            <a:r>
-              <a:t>•   • Dongfang trades on HKEX (1072.HK) - no Stock Connect needed</a:t>
-            </a:r>
-          </a:p>
-          <a:p>
-            <a:pPr>
-              <a:spcAft>
-                <a:spcPts val="800"/>
-              </a:spcAft>
-              <a:defRPr sz="1800">
-                <a:solidFill>
-                  <a:srgbClr val="1A1A1A"/>
-                </a:solidFill>
-              </a:defRPr>
-            </a:pPr>
-            <a:r>
-              <a:t>• </a:t>
-            </a:r>
-          </a:p>
-          <a:p>
-            <a:pPr>
-              <a:spcAft>
-                <a:spcPts val="800"/>
-              </a:spcAft>
-              <a:defRPr sz="1800">
-                <a:solidFill>
-                  <a:srgbClr val="1A1A1A"/>
-                </a:solidFill>
-              </a:defRPr>
-            </a:pPr>
-            <a:r>
-              <a:t>• TECHNICAL TIMING:</a:t>
-            </a:r>
-          </a:p>
-          <a:p>
-            <a:pPr>
-              <a:spcAft>
-                <a:spcPts val="800"/>
-              </a:spcAft>
-              <a:defRPr sz="1800">
-                <a:solidFill>
-                  <a:srgbClr val="1A1A1A"/>
-                </a:solidFill>
-              </a:defRPr>
-            </a:pPr>
-            <a:r>
-              <a:t>•   • Jereh: Near highs, elevated RSI → Monitor for short entry signals</a:t>
-            </a:r>
-          </a:p>
-          <a:p>
-            <a:pPr>
-              <a:spcAft>
-                <a:spcPts val="800"/>
-              </a:spcAft>
-              <a:defRPr sz="1800">
-                <a:solidFill>
-                  <a:srgbClr val="1A1A1A"/>
-                </a:solidFill>
-              </a:defRPr>
-            </a:pPr>
-            <a:r>
-              <a:t>•   • Dongfang: Near highs but policy tailwinds support entry</a:t>
-            </a:r>
-          </a:p>
-        </p:txBody>
-      </p:sp>
-    </p:spTree>
-  </p:cSld>
-  <p:clrMapOvr>
-    <a:masterClrMapping/>
-  </p:clrMapOvr>
-</p:sld>
-</file>
-
-<file path=ppt/slides/slide22.xml><?xml version="1.0" encoding="utf-8"?>
-<p:sld xmlns:a="http://schemas.openxmlformats.org/drawingml/2006/main" xmlns:p="http://schemas.openxmlformats.org/presentationml/2006/main" xmlns:r="http://schemas.openxmlformats.org/officeDocument/2006/relationships">
-  <p:cSld>
-    <p:spTree>
-      <p:nvGrpSpPr>
-        <p:cNvPr id="1" name=""/>
-        <p:cNvGrpSpPr/>
-        <p:nvPr/>
-      </p:nvGrpSpPr>
-      <p:grpSpPr/>
-      <p:sp>
-        <p:nvSpPr>
-          <p:cNvPr id="2" name="TextBox 1"/>
-          <p:cNvSpPr txBox="1"/>
-          <p:nvPr/>
-        </p:nvSpPr>
-        <p:spPr>
-          <a:xfrm>
-            <a:off x="457200" y="274320"/>
-            <a:ext cx="11430000" cy="731520"/>
-          </a:xfrm>
-          <a:prstGeom prst="rect">
-            <a:avLst/>
-          </a:prstGeom>
-          <a:noFill/>
-        </p:spPr>
-        <p:txBody>
-          <a:bodyPr wrap="square">
-            <a:spAutoFit/>
-          </a:bodyPr>
-          <a:lstStyle/>
-          <a:p>
-            <a:pPr>
-              <a:defRPr sz="2800" b="1">
-                <a:solidFill>
-                  <a:srgbClr val="002F5D"/>
-                </a:solidFill>
-              </a:defRPr>
-            </a:pPr>
-            <a:r>
-              <a:t>Text Analysis: Scope and Limitations</a:t>
-            </a:r>
-          </a:p>
-        </p:txBody>
-      </p:sp>
-      <p:sp>
-        <p:nvSpPr>
-          <p:cNvPr id="3" name="TextBox 2"/>
-          <p:cNvSpPr txBox="1"/>
-          <p:nvPr/>
-        </p:nvSpPr>
-        <p:spPr>
-          <a:xfrm>
-            <a:off x="640080" y="1188720"/>
-            <a:ext cx="10972800" cy="5029200"/>
-          </a:xfrm>
-          <a:prstGeom prst="rect">
-            <a:avLst/>
-          </a:prstGeom>
-          <a:noFill/>
-        </p:spPr>
-        <p:txBody>
-          <a:bodyPr wrap="square">
-            <a:spAutoFit/>
-          </a:bodyPr>
-          <a:lstStyle/>
-          <a:p>
-            <a:pPr>
-              <a:spcAft>
-                <a:spcPts val="800"/>
-              </a:spcAft>
-              <a:defRPr sz="1800">
-                <a:solidFill>
-                  <a:srgbClr val="1A1A1A"/>
-                </a:solidFill>
-              </a:defRPr>
-            </a:pPr>
-            <a:r>
-              <a:t>• WHAT THIS MODULE DOES:</a:t>
-            </a:r>
-          </a:p>
-          <a:p>
-            <a:pPr>
-              <a:spcAft>
-                <a:spcPts val="800"/>
-              </a:spcAft>
-              <a:defRPr sz="1800">
-                <a:solidFill>
-                  <a:srgbClr val="1A1A1A"/>
-                </a:solidFill>
-              </a:defRPr>
-            </a:pPr>
-            <a:r>
-              <a:t>•   • Compiles text evidence from 55 documents into structured categories</a:t>
-            </a:r>
-          </a:p>
-          <a:p>
-            <a:pPr>
-              <a:spcAft>
-                <a:spcPts val="800"/>
-              </a:spcAft>
-              <a:defRPr sz="1800">
-                <a:solidFill>
-                  <a:srgbClr val="1A1A1A"/>
-                </a:solidFill>
-              </a:defRPr>
-            </a:pPr>
-            <a:r>
-              <a:t>•   • Surfaces specific quotes and management language for manual review</a:t>
-            </a:r>
-          </a:p>
-          <a:p>
-            <a:pPr>
-              <a:spcAft>
-                <a:spcPts val="800"/>
-              </a:spcAft>
-              <a:defRPr sz="1800">
-                <a:solidFill>
-                  <a:srgbClr val="1A1A1A"/>
-                </a:solidFill>
-              </a:defRPr>
-            </a:pPr>
-            <a:r>
-              <a:t>•   • Provides repeatable framework for future thematic research</a:t>
-            </a:r>
-          </a:p>
-          <a:p>
-            <a:pPr>
-              <a:spcAft>
-                <a:spcPts val="800"/>
-              </a:spcAft>
-              <a:defRPr sz="1800">
-                <a:solidFill>
-                  <a:srgbClr val="1A1A1A"/>
-                </a:solidFill>
-              </a:defRPr>
-            </a:pPr>
-            <a:r>
-              <a:t>• HONEST LIMITATIONS:</a:t>
-            </a:r>
-          </a:p>
-          <a:p>
-            <a:pPr>
-              <a:spcAft>
-                <a:spcPts val="800"/>
-              </a:spcAft>
-              <a:defRPr sz="1800">
-                <a:solidFill>
-                  <a:srgbClr val="1A1A1A"/>
-                </a:solidFill>
-              </a:defRPr>
-            </a:pPr>
-            <a:r>
-              <a:t>•   • Descriptive, not predictive — signals do NOT forecast returns (see validation)</a:t>
-            </a:r>
-          </a:p>
-          <a:p>
-            <a:pPr>
-              <a:spcAft>
-                <a:spcPts val="800"/>
-              </a:spcAft>
-              <a:defRPr sz="1800">
-                <a:solidFill>
-                  <a:srgbClr val="1A1A1A"/>
-                </a:solidFill>
-              </a:defRPr>
-            </a:pPr>
-            <a:r>
-              <a:t>•   • 330 paragraphs = small sample; limited statistical power</a:t>
-            </a:r>
-          </a:p>
-          <a:p>
-            <a:pPr>
-              <a:spcAft>
-                <a:spcPts val="800"/>
-              </a:spcAft>
-              <a:defRPr sz="1800">
-                <a:solidFill>
-                  <a:srgbClr val="1A1A1A"/>
-                </a:solidFill>
-              </a:defRPr>
-            </a:pPr>
-            <a:r>
-              <a:t>•   • Classification relies on keyword patterns, not deep semantic understanding</a:t>
-            </a:r>
-          </a:p>
-          <a:p>
-            <a:pPr>
-              <a:spcAft>
-                <a:spcPts val="800"/>
-              </a:spcAft>
-              <a:defRPr sz="1800">
-                <a:solidFill>
-                  <a:srgbClr val="1A1A1A"/>
-                </a:solidFill>
-              </a:defRPr>
-            </a:pPr>
-            <a:r>
-              <a:t>•   • Source bias: RSS feeds overweight news vs. operational 8-K filings</a:t>
-            </a:r>
-          </a:p>
-          <a:p>
-            <a:pPr>
-              <a:spcAft>
-                <a:spcPts val="800"/>
-              </a:spcAft>
-              <a:defRPr sz="1800">
-                <a:solidFill>
-                  <a:srgbClr val="1A1A1A"/>
-                </a:solidFill>
-              </a:defRPr>
-            </a:pPr>
-            <a:r>
-              <a:t>•   • Every output requires human verification before investment decisions</a:t>
-            </a:r>
-          </a:p>
-        </p:txBody>
-      </p:sp>
-    </p:spTree>
-  </p:cSld>
-  <p:clrMapOvr>
-    <a:masterClrMapping/>
-  </p:clrMapOvr>
-</p:sld>
-</file>
-
-<file path=ppt/slides/slide23.xml><?xml version="1.0" encoding="utf-8"?>
-<p:sld xmlns:a="http://schemas.openxmlformats.org/drawingml/2006/main" xmlns:p="http://schemas.openxmlformats.org/presentationml/2006/main" xmlns:r="http://schemas.openxmlformats.org/officeDocument/2006/relationships">
-  <p:cSld>
-    <p:spTree>
-      <p:nvGrpSpPr>
-        <p:cNvPr id="1" name=""/>
-        <p:cNvGrpSpPr/>
-        <p:nvPr/>
-      </p:nvGrpSpPr>
-      <p:grpSpPr/>
-      <p:sp>
-        <p:nvSpPr>
-          <p:cNvPr id="2" name="TextBox 1"/>
-          <p:cNvSpPr txBox="1"/>
-          <p:nvPr/>
-        </p:nvSpPr>
-        <p:spPr>
-          <a:xfrm>
-            <a:off x="457200" y="274320"/>
-            <a:ext cx="11430000" cy="731520"/>
-          </a:xfrm>
-          <a:prstGeom prst="rect">
-            <a:avLst/>
-          </a:prstGeom>
-          <a:noFill/>
-        </p:spPr>
-        <p:txBody>
-          <a:bodyPr wrap="square">
-            <a:spAutoFit/>
-          </a:bodyPr>
-          <a:lstStyle/>
-          <a:p>
-            <a:pPr>
-              <a:defRPr sz="2800" b="1">
-                <a:solidFill>
-                  <a:srgbClr val="002F5D"/>
-                </a:solidFill>
-              </a:defRPr>
-            </a:pPr>
-            <a:r>
-              <a:t>The Trade: Thesis + Proof + Spread + Catalysts</a:t>
-            </a:r>
-          </a:p>
-        </p:txBody>
-      </p:sp>
-      <p:sp>
-        <p:nvSpPr>
-          <p:cNvPr id="3" name="TextBox 2"/>
-          <p:cNvSpPr txBox="1"/>
-          <p:nvPr/>
-        </p:nvSpPr>
-        <p:spPr>
-          <a:xfrm>
-            <a:off x="640080" y="1188720"/>
-            <a:ext cx="10972800" cy="5029200"/>
-          </a:xfrm>
-          <a:prstGeom prst="rect">
-            <a:avLst/>
-          </a:prstGeom>
-          <a:noFill/>
-        </p:spPr>
-        <p:txBody>
-          <a:bodyPr wrap="square">
-            <a:spAutoFit/>
-          </a:bodyPr>
-          <a:lstStyle/>
-          <a:p>
-            <a:pPr>
-              <a:spcAft>
-                <a:spcPts val="800"/>
-              </a:spcAft>
-              <a:defRPr sz="1800">
-                <a:solidFill>
-                  <a:srgbClr val="1A1A1A"/>
-                </a:solidFill>
-              </a:defRPr>
-            </a:pPr>
-            <a:r>
-              <a:t>• THESIS: Energy insecurity is shifting from barrels to electrons</a:t>
-            </a:r>
-          </a:p>
-          <a:p>
-            <a:pPr>
-              <a:spcAft>
-                <a:spcPts val="800"/>
-              </a:spcAft>
-              <a:defRPr sz="1800">
-                <a:solidFill>
-                  <a:srgbClr val="1A1A1A"/>
-                </a:solidFill>
-              </a:defRPr>
-            </a:pPr>
-            <a:r>
-              <a:t>•   • Grid equipment = multi-year capex visibility (policy + demand)</a:t>
-            </a:r>
-          </a:p>
-          <a:p>
-            <a:pPr>
-              <a:spcAft>
-                <a:spcPts val="800"/>
-              </a:spcAft>
-              <a:defRPr sz="1800">
-                <a:solidFill>
-                  <a:srgbClr val="1A1A1A"/>
-                </a:solidFill>
-              </a:defRPr>
-            </a:pPr>
-            <a:r>
-              <a:t>•   • Oilfield services = margin compression + cyclical risk (even if oil rises)</a:t>
-            </a:r>
-          </a:p>
-          <a:p>
-            <a:pPr>
-              <a:spcAft>
-                <a:spcPts val="800"/>
-              </a:spcAft>
-              <a:defRPr sz="1800">
-                <a:solidFill>
-                  <a:srgbClr val="1A1A1A"/>
-                </a:solidFill>
-              </a:defRPr>
-            </a:pPr>
-            <a:r>
-              <a:t>• </a:t>
-            </a:r>
-          </a:p>
-          <a:p>
-            <a:pPr>
-              <a:spcAft>
-                <a:spcPts val="800"/>
-              </a:spcAft>
-              <a:defRPr sz="1800">
-                <a:solidFill>
-                  <a:srgbClr val="1A1A1A"/>
-                </a:solidFill>
-              </a:defRPr>
-            </a:pPr>
-            <a:r>
-              <a:t>• HISTORICAL PROOF (2Y backtest):</a:t>
-            </a:r>
-          </a:p>
-          <a:p>
-            <a:pPr>
-              <a:spcAft>
-                <a:spcPts val="800"/>
-              </a:spcAft>
-              <a:defRPr sz="1800">
-                <a:solidFill>
-                  <a:srgbClr val="1A1A1A"/>
-                </a:solidFill>
-              </a:defRPr>
-            </a:pPr>
-            <a:r>
-              <a:t>•   • Grid equipment leaders outperforming oilfield services structurally</a:t>
-            </a:r>
-          </a:p>
-          <a:p>
-            <a:pPr>
-              <a:spcAft>
-                <a:spcPts val="800"/>
-              </a:spcAft>
-              <a:defRPr sz="1800">
-                <a:solidFill>
-                  <a:srgbClr val="1A1A1A"/>
-                </a:solidFill>
-              </a:defRPr>
-            </a:pPr>
-            <a:r>
-              <a:t>•   • Policy divergence: Grid capex tailwinds vs fossil headwinds driving spreads</a:t>
-            </a:r>
-          </a:p>
-          <a:p>
-            <a:pPr>
-              <a:spcAft>
-                <a:spcPts val="800"/>
-              </a:spcAft>
-              <a:defRPr sz="1800">
-                <a:solidFill>
-                  <a:srgbClr val="1A1A1A"/>
-                </a:solidFill>
-              </a:defRPr>
-            </a:pPr>
-            <a:r>
-              <a:t>•   • Jereh more tied to upstream capex cycles than oil price</a:t>
-            </a:r>
-          </a:p>
-          <a:p>
-            <a:pPr>
-              <a:spcAft>
-                <a:spcPts val="800"/>
-              </a:spcAft>
-              <a:defRPr sz="1800">
-                <a:solidFill>
-                  <a:srgbClr val="1A1A1A"/>
-                </a:solidFill>
-              </a:defRPr>
-            </a:pPr>
-            <a:r>
-              <a:t>• </a:t>
-            </a:r>
-          </a:p>
-          <a:p>
-            <a:pPr>
-              <a:spcAft>
-                <a:spcPts val="800"/>
-              </a:spcAft>
-              <a:defRPr sz="1800">
-                <a:solidFill>
-                  <a:srgbClr val="1A1A1A"/>
-                </a:solidFill>
-              </a:defRPr>
-            </a:pPr>
-            <a:r>
-              <a:t>• FORWARD EXPECTED RETURN:</a:t>
-            </a:r>
-          </a:p>
-          <a:p>
-            <a:pPr>
-              <a:spcAft>
-                <a:spcPts val="800"/>
-              </a:spcAft>
-              <a:defRPr sz="1800">
-                <a:solidFill>
-                  <a:srgbClr val="1A1A1A"/>
-                </a:solidFill>
-              </a:defRPr>
-            </a:pPr>
-            <a:r>
-              <a:t>•   • Long Dongfang: +48% (prob-weighted)</a:t>
-            </a:r>
-          </a:p>
-          <a:p>
-            <a:pPr>
-              <a:spcAft>
-                <a:spcPts val="800"/>
-              </a:spcAft>
-              <a:defRPr sz="1800">
-                <a:solidFill>
-                  <a:srgbClr val="1A1A1A"/>
-                </a:solidFill>
-              </a:defRPr>
-            </a:pPr>
-            <a:r>
-              <a:t>•   • Short Jereh: -12% (prob-weighted)</a:t>
-            </a:r>
-          </a:p>
-          <a:p>
-            <a:pPr>
-              <a:spcAft>
-                <a:spcPts val="800"/>
-              </a:spcAft>
-              <a:defRPr sz="1800">
-                <a:solidFill>
-                  <a:srgbClr val="1A1A1A"/>
-                </a:solidFill>
-              </a:defRPr>
-            </a:pPr>
-            <a:r>
-              <a:t>•   • Pair spread: +60%</a:t>
-            </a:r>
-          </a:p>
-          <a:p>
-            <a:pPr>
-              <a:spcAft>
-                <a:spcPts val="800"/>
-              </a:spcAft>
-              <a:defRPr sz="1800">
-                <a:solidFill>
-                  <a:srgbClr val="1A1A1A"/>
-                </a:solidFill>
-              </a:defRPr>
-            </a:pPr>
-            <a:r>
-              <a:t>• </a:t>
-            </a:r>
-          </a:p>
-          <a:p>
-            <a:pPr>
-              <a:spcAft>
-                <a:spcPts val="800"/>
-              </a:spcAft>
-              <a:defRPr sz="1800">
-                <a:solidFill>
-                  <a:srgbClr val="1A1A1A"/>
-                </a:solidFill>
-              </a:defRPr>
-            </a:pPr>
-            <a:r>
-              <a:t>• CATALYST TIMELINE:</a:t>
-            </a:r>
-          </a:p>
-          <a:p>
-            <a:pPr>
-              <a:spcAft>
-                <a:spcPts val="800"/>
-              </a:spcAft>
-              <a:defRPr sz="1800">
-                <a:solidFill>
-                  <a:srgbClr val="1A1A1A"/>
-                </a:solidFill>
-              </a:defRPr>
-            </a:pPr>
-            <a:r>
-              <a:t>•   • Q2: Dongfang Q1 results + Jereh margin pressure visibility</a:t>
-            </a:r>
-          </a:p>
-          <a:p>
-            <a:pPr>
-              <a:spcAft>
-                <a:spcPts val="800"/>
-              </a:spcAft>
-              <a:defRPr sz="1800">
-                <a:solidFill>
-                  <a:srgbClr val="1A1A1A"/>
-                </a:solidFill>
-              </a:defRPr>
-            </a:pPr>
-            <a:r>
-              <a:t>•   • Q3: State Grid capex acceleration + NA rig count decline</a:t>
-            </a:r>
-          </a:p>
-          <a:p>
-            <a:pPr>
-              <a:spcAft>
-                <a:spcPts val="800"/>
-              </a:spcAft>
-              <a:defRPr sz="1800">
-                <a:solidFill>
-                  <a:srgbClr val="1A1A1A"/>
-                </a:solidFill>
-              </a:defRPr>
-            </a:pPr>
-            <a:r>
-              <a:t>•   • Q4: Full-year margin differential becomes visible in earnings</a:t>
-            </a:r>
-          </a:p>
-        </p:txBody>
-      </p:sp>
-    </p:spTree>
-  </p:cSld>
-  <p:clrMapOvr>
-    <a:masterClrMapping/>
-  </p:clrMapOvr>
-</p:sld>
-</file>
-
-<file path=ppt/slides/slide24.xml><?xml version="1.0" encoding="utf-8"?>
-<p:sld xmlns:a="http://schemas.openxmlformats.org/drawingml/2006/main" xmlns:p="http://schemas.openxmlformats.org/presentationml/2006/main" xmlns:r="http://schemas.openxmlformats.org/officeDocument/2006/relationships">
-  <p:cSld>
-    <p:spTree>
-      <p:nvGrpSpPr>
-        <p:cNvPr id="1" name=""/>
-        <p:cNvGrpSpPr/>
-        <p:nvPr/>
-      </p:nvGrpSpPr>
-      <p:grpSpPr/>
-      <p:sp>
-        <p:nvSpPr>
-          <p:cNvPr id="2" name="TextBox 1"/>
-          <p:cNvSpPr txBox="1"/>
-          <p:nvPr/>
-        </p:nvSpPr>
-        <p:spPr>
-          <a:xfrm>
-            <a:off x="457200" y="274320"/>
-            <a:ext cx="11430000" cy="731520"/>
-          </a:xfrm>
-          <a:prstGeom prst="rect">
-            <a:avLst/>
-          </a:prstGeom>
-          <a:noFill/>
-        </p:spPr>
-        <p:txBody>
-          <a:bodyPr wrap="none">
-            <a:spAutoFit/>
-          </a:bodyPr>
-          <a:lstStyle/>
-          <a:p>
-            <a:pPr>
-              <a:defRPr sz="2800" b="1">
-                <a:solidFill>
-                  <a:srgbClr val="002F5D"/>
-                </a:solidFill>
-              </a:defRPr>
-            </a:pPr>
-            <a:r>
-              <a:t>Pair Trade: Long Dongfang / Short Jereh - Policy Divergence Play</a:t>
-            </a:r>
-          </a:p>
-        </p:txBody>
-      </p:sp>
-      <p:pic>
-        <p:nvPicPr>
-          <p:cNvPr id="3" name="Picture 2" descr="pair_trade_backtest.png"/>
-          <p:cNvPicPr>
-            <a:picLocks noChangeAspect="1"/>
-          </p:cNvPicPr>
-          <p:nvPr/>
-        </p:nvPicPr>
-        <p:blipFill>
-          <a:blip r:embed="rId2"/>
-          <a:stretch>
-            <a:fillRect/>
-          </a:stretch>
-        </p:blipFill>
-        <p:spPr>
-          <a:xfrm>
-            <a:off x="1371600" y="1188720"/>
-            <a:ext cx="9144000" cy="5029200"/>
-          </a:xfrm>
-          <a:prstGeom prst="rect">
-            <a:avLst/>
-          </a:prstGeom>
-        </p:spPr>
-      </p:pic>
-      <p:sp>
-        <p:nvSpPr>
-          <p:cNvPr id="4" name="TextBox 3"/>
-          <p:cNvSpPr txBox="1"/>
-          <p:nvPr/>
-        </p:nvSpPr>
-        <p:spPr>
-          <a:xfrm>
-            <a:off x="457200" y="6309360"/>
-            <a:ext cx="11430000" cy="457200"/>
-          </a:xfrm>
-          <a:prstGeom prst="rect">
-            <a:avLst/>
-          </a:prstGeom>
-          <a:noFill/>
-        </p:spPr>
-        <p:txBody>
-          <a:bodyPr wrap="none">
-            <a:spAutoFit/>
-          </a:bodyPr>
-          <a:lstStyle/>
-          <a:p>
-            <a:pPr>
-              <a:defRPr sz="1200" i="1">
-                <a:solidFill>
-                  <a:srgbClr val="666666"/>
-                </a:solidFill>
-              </a:defRPr>
-            </a:pPr>
-            <a:r>
-              <a:t>Dollar-neutral, 50-50 weight. Shows historical spread generation even through volatility.</a:t>
-            </a:r>
-          </a:p>
-        </p:txBody>
-      </p:sp>
-    </p:spTree>
-  </p:cSld>
-  <p:clrMapOvr>
-    <a:masterClrMapping/>
-  </p:clrMapOvr>
-</p:sld>
-</file>
-
-<file path=ppt/slides/slide25.xml><?xml version="1.0" encoding="utf-8"?>
 <p:sld xmlns:a="http://schemas.openxmlformats.org/drawingml/2006/main" xmlns:p="http://schemas.openxmlformats.org/presentationml/2006/main" xmlns:r="http://schemas.openxmlformats.org/officeDocument/2006/relationships">
   <p:cSld>
     <p:spTree>
@@ -8811,7 +8003,7 @@
               </a:defRPr>
             </a:pPr>
             <a:r>
-              <a:t>Long Dongfang (+48%) / Short Jereh (-12%) = Pair spread +60%</a:t>
+              <a:t>Long Dongfang (+45%) / Short Jereh (-20%) = Pair spread +65%</a:t>
             </a:r>
           </a:p>
         </p:txBody>
@@ -8864,7 +8056,7 @@
               </a:defRPr>
             </a:pPr>
             <a:r>
-              <a:t>Consensus: Energy Insecurity Means Owning Oil Exposure</a:t>
+              <a:t>Variant View: The Real Energy-Security Trade Is Grid Resilience</a:t>
             </a:r>
           </a:p>
         </p:txBody>
@@ -8902,7 +8094,7 @@
               </a:defRPr>
             </a:pPr>
             <a:r>
-              <a:t>• Market reads geopolitical risk as bullish for oil and oilfield services</a:t>
+              <a:t>• Consensus over-connects oil price spikes with durable oilfield-service earnings</a:t>
             </a:r>
           </a:p>
           <a:p>
@@ -8917,7 +8109,7 @@
               </a:defRPr>
             </a:pPr>
             <a:r>
-              <a:t>• Strait of Hormuz, Middle East tensions, shipping route vulnerability drive headlines</a:t>
+              <a:t>• Variant view: energy security is no longer just securing barrels — it is reliable electricity</a:t>
             </a:r>
           </a:p>
           <a:p>
@@ -8932,7 +8124,7 @@
               </a:defRPr>
             </a:pPr>
             <a:r>
-              <a:t>• Assumption chain: oil disruption → higher crude → higher upstream capex → better OFS earnings</a:t>
+              <a:t>• Data centers, EVs, industrial electrification, and cooling all stress the power system</a:t>
             </a:r>
           </a:p>
           <a:p>
@@ -8947,7 +8139,7 @@
               </a:defRPr>
             </a:pPr>
             <a:r>
-              <a:t>• This view has been the dominant energy-security trade since 2022</a:t>
+              <a:t>• Governments treat grid hardening as national security infrastructure</a:t>
             </a:r>
           </a:p>
           <a:p>
@@ -8962,7 +8154,7 @@
               </a:defRPr>
             </a:pPr>
             <a:r>
-              <a:t>• But consensus over-connects oil price spikes with durable service earnings</a:t>
+              <a:t>• → Oil disruption is the symptom. Grid investment is the solution.</a:t>
             </a:r>
           </a:p>
         </p:txBody>
@@ -9015,7 +8207,7 @@
               </a:defRPr>
             </a:pPr>
             <a:r>
-              <a:t>Variant View: The Real Energy-Security Trade Is Grid Resilience</a:t>
+              <a:t>Electricity Continuity Is Becoming Strategic Infrastructure</a:t>
             </a:r>
           </a:p>
         </p:txBody>
@@ -9053,7 +8245,7 @@
               </a:defRPr>
             </a:pPr>
             <a:r>
-              <a:t>• Energy insecurity is not just about securing barrels — it is about securing reliable electricity</a:t>
+              <a:t>• Global electricity demand expected to grow ~4% annually through 2030 (IEA)</a:t>
             </a:r>
           </a:p>
           <a:p>
@@ -9068,7 +8260,7 @@
               </a:defRPr>
             </a:pPr>
             <a:r>
-              <a:t>• Data centers, EVs, industrial electrification, and cooling all stress the grid</a:t>
+              <a:t>• US data center power demand projected to 2-3x by 2030 — driving grid equipment orders</a:t>
             </a:r>
           </a:p>
           <a:p>
@@ -9083,7 +8275,7 @@
               </a:defRPr>
             </a:pPr>
             <a:r>
-              <a:t>• Transformers, switchgear, transmission, substations — all in multi-year shortage</a:t>
+              <a:t>• Transformer lead times 80-120 weeks; transmission queue 2+ years in most markets</a:t>
             </a:r>
           </a:p>
           <a:p>
@@ -9098,7 +8290,7 @@
               </a:defRPr>
             </a:pPr>
             <a:r>
-              <a:t>• Governments treat grid hardening as national security infrastructure</a:t>
+              <a:t>• EU, US, and China all have multi-year grid investment programs</a:t>
             </a:r>
           </a:p>
           <a:p>
@@ -9113,7 +8305,7 @@
               </a:defRPr>
             </a:pPr>
             <a:r>
-              <a:t>• → Oil disruption is the symptom. Grid investment is the solution.</a:t>
+              <a:t>• Policy support: IRA, EU Grid Action Plan, China State Grid Five-Year Plan</a:t>
             </a:r>
           </a:p>
         </p:txBody>
@@ -9166,7 +8358,7 @@
               </a:defRPr>
             </a:pPr>
             <a:r>
-              <a:t>Electricity Continuity Is Becoming Strategic Infrastructure</a:t>
+              <a:t>Why Now: The Regime Shift</a:t>
             </a:r>
           </a:p>
         </p:txBody>
@@ -9204,7 +8396,7 @@
               </a:defRPr>
             </a:pPr>
             <a:r>
-              <a:t>• Global electricity demand expected to grow ~4% annually through 2030 (IEA)</a:t>
+              <a:t>• ⚠️ 2Y backtest is UNFAVORABLE: Both legs +300% (Dongfang +299.8%, Jereh +350.4%), pair P&amp;L -25.3%</a:t>
             </a:r>
           </a:p>
           <a:p>
@@ -9219,7 +8411,7 @@
               </a:defRPr>
             </a:pPr>
             <a:r>
-              <a:t>• US data center power demand projected to 2-3x by 2030 — driving grid equipment orders</a:t>
+              <a:t>• This is NOT a historically validated spread — it is a forward-looking variant view on policy regime shift</a:t>
             </a:r>
           </a:p>
           <a:p>
@@ -9234,7 +8426,7 @@
               </a:defRPr>
             </a:pPr>
             <a:r>
-              <a:t>• Transformer lead times 80-120 weeks; transmission queue 2+ years in most markets</a:t>
+              <a:t>• Past regime (2021-2024): Both legs benefited from unified energy capex boom (oil + green together)</a:t>
             </a:r>
           </a:p>
           <a:p>
@@ -9249,7 +8441,7 @@
               </a:defRPr>
             </a:pPr>
             <a:r>
-              <a:t>• EU, US, and China all have multi-year grid investment programs</a:t>
+              <a:t>• New regime (2025-2030): State Grid RMB 4T 15th FYP decouples grid capex from fossil fuel investment</a:t>
             </a:r>
           </a:p>
           <a:p>
@@ -9264,7 +8456,22 @@
               </a:defRPr>
             </a:pPr>
             <a:r>
-              <a:t>• Policy support: IRA, EU Grid Action Plan, China State Grid Five-Year Plan</a:t>
+              <a:t>• Fossil substitution acceleration explicitly targets Jereh's oilfield services market for contraction</a:t>
+            </a:r>
+          </a:p>
+          <a:p>
+            <a:pPr>
+              <a:spcAft>
+                <a:spcPts val="800"/>
+              </a:spcAft>
+              <a:defRPr sz="1800">
+                <a:solidFill>
+                  <a:srgbClr val="1A1A1A"/>
+                </a:solidFill>
+              </a:defRPr>
+            </a:pPr>
+            <a:r>
+              <a:t>• We are betting on the BREAKDOWN of historical correlation, not its continuation</a:t>
             </a:r>
           </a:p>
         </p:txBody>
@@ -9355,7 +8562,7 @@
               </a:defRPr>
             </a:pPr>
             <a:r>
-              <a:t>• Pure-play transmission &amp; distribution equipment: switchgear, transformers, substation automation</a:t>
+              <a:t>• Integrated power equipment and grid-integration leader with clean-energy equipment exposure</a:t>
             </a:r>
           </a:p>
           <a:p>
@@ -9678,7 +8885,7 @@
               </a:defRPr>
             </a:pPr>
             <a:r>
-              <a:t>Dongfang +96.8% expected (grid tailwind), Jereh -5.4% expected (fossil headwinds). Thesis: policy-driven divergence.</a:t>
+              <a:t>⚠️ Historical backtest is UNFAVORABLE — pair P&amp;L -25.3% over 2Y. This is a forward-looking variant view on policy regime shift, not a historically validated spread.</a:t>
             </a:r>
           </a:p>
         </p:txBody>
@@ -9731,35 +8938,368 @@
               </a:defRPr>
             </a:pPr>
             <a:r>
-              <a:t>Same Energy-Security Theme, Opposite Earnings Quality</a:t>
-            </a:r>
-          </a:p>
-        </p:txBody>
-      </p:sp>
-      <p:pic>
-        <p:nvPicPr>
-          <p:cNvPr id="3" name="Picture 2" descr="long_short_matrix.png"/>
-          <p:cNvPicPr>
-            <a:picLocks noChangeAspect="1"/>
-          </p:cNvPicPr>
+              <a:t>Empirical Setup: Forward Predictive Scorecard</a:t>
+            </a:r>
+          </a:p>
+        </p:txBody>
+      </p:sp>
+      <p:graphicFrame>
+        <p:nvGraphicFramePr>
+          <p:cNvPr id="3" name="Table 2"/>
+          <p:cNvGraphicFramePr>
+            <a:graphicFrameLocks noGrp="1"/>
+          </p:cNvGraphicFramePr>
           <p:nvPr/>
-        </p:nvPicPr>
-        <p:blipFill>
-          <a:blip r:embed="rId2"/>
-          <a:stretch>
-            <a:fillRect/>
-          </a:stretch>
-        </p:blipFill>
-        <p:spPr>
-          <a:xfrm>
-            <a:off x="1371600" y="1188720"/>
-            <a:ext cx="9144000" cy="5029200"/>
-          </a:xfrm>
-          <a:prstGeom prst="rect">
-            <a:avLst/>
-          </a:prstGeom>
-        </p:spPr>
-      </p:pic>
+        </p:nvGraphicFramePr>
+        <p:xfrm>
+          <a:off x="640080" y="1188720"/>
+          <a:ext cx="4937760" cy="2560320"/>
+        </p:xfrm>
+        <a:graphic>
+          <a:graphicData uri="http://schemas.openxmlformats.org/drawingml/2006/table">
+            <a:tbl>
+              <a:tblPr firstRow="1" bandRow="1">
+                <a:tableStyleId>{5C22544A-7EE6-4342-B048-85BDC9FD1C3A}</a:tableStyleId>
+              </a:tblPr>
+              <a:tblGrid>
+                <a:gridCol w="1645920"/>
+                <a:gridCol w="1645920"/>
+                <a:gridCol w="1645920"/>
+              </a:tblGrid>
+              <a:tr h="426720">
+                <a:tc>
+                  <a:txBody>
+                    <a:bodyPr/>
+                    <a:lstStyle/>
+                    <a:p>
+                      <a:r>
+                        <a:rPr sz="1200" b="1">
+                          <a:solidFill>
+                            <a:srgbClr val="FFFFFF"/>
+                          </a:solidFill>
+                        </a:rPr>
+                        <a:t>Pillar</a:t>
+                      </a:r>
+                    </a:p>
+                  </a:txBody>
+                  <a:tcPr>
+                    <a:solidFill>
+                      <a:srgbClr val="002F5D"/>
+                    </a:solidFill>
+                  </a:tcPr>
+                </a:tc>
+                <a:tc>
+                  <a:txBody>
+                    <a:bodyPr/>
+                    <a:lstStyle/>
+                    <a:p>
+                      <a:r>
+                        <a:rPr sz="1200" b="1">
+                          <a:solidFill>
+                            <a:srgbClr val="FFFFFF"/>
+                          </a:solidFill>
+                        </a:rPr>
+                        <a:t>Evidence</a:t>
+                      </a:r>
+                    </a:p>
+                  </a:txBody>
+                  <a:tcPr>
+                    <a:solidFill>
+                      <a:srgbClr val="002F5D"/>
+                    </a:solidFill>
+                  </a:tcPr>
+                </a:tc>
+                <a:tc>
+                  <a:txBody>
+                    <a:bodyPr/>
+                    <a:lstStyle/>
+                    <a:p>
+                      <a:r>
+                        <a:rPr sz="1200" b="1">
+                          <a:solidFill>
+                            <a:srgbClr val="FFFFFF"/>
+                          </a:solidFill>
+                        </a:rPr>
+                        <a:t>Signal</a:t>
+                      </a:r>
+                    </a:p>
+                  </a:txBody>
+                  <a:tcPr>
+                    <a:solidFill>
+                      <a:srgbClr val="002F5D"/>
+                    </a:solidFill>
+                  </a:tcPr>
+                </a:tc>
+              </a:tr>
+              <a:tr h="426720">
+                <a:tc>
+                  <a:txBody>
+                    <a:bodyPr/>
+                    <a:lstStyle/>
+                    <a:p>
+                      <a:r>
+                        <a:rPr sz="1100">
+                          <a:solidFill>
+                            <a:srgbClr val="1A1A1A"/>
+                          </a:solidFill>
+                        </a:rPr>
+                        <a:t>Historical spread test</a:t>
+                      </a:r>
+                    </a:p>
+                  </a:txBody>
+                  <a:tcPr/>
+                </a:tc>
+                <a:tc>
+                  <a:txBody>
+                    <a:bodyPr/>
+                    <a:lstStyle/>
+                    <a:p>
+                      <a:r>
+                        <a:rPr sz="1100">
+                          <a:solidFill>
+                            <a:srgbClr val="1A1A1A"/>
+                          </a:solidFill>
+                        </a:rPr>
+                        <a:t>2Y simulated pair P&amp;L was -25.7%; Dongfang 2Y return 295.4% vs Jereh 346.8%.</a:t>
+                      </a:r>
+                    </a:p>
+                  </a:txBody>
+                  <a:tcPr/>
+                </a:tc>
+                <a:tc>
+                  <a:txBody>
+                    <a:bodyPr/>
+                    <a:lstStyle/>
+                    <a:p>
+                      <a:r>
+                        <a:rPr sz="1100">
+                          <a:solidFill>
+                            <a:srgbClr val="1A1A1A"/>
+                          </a:solidFill>
+                        </a:rPr>
+                        <a:t>Risk / contradiction</a:t>
+                      </a:r>
+                    </a:p>
+                  </a:txBody>
+                  <a:tcPr/>
+                </a:tc>
+              </a:tr>
+              <a:tr h="426720">
+                <a:tc>
+                  <a:txBody>
+                    <a:bodyPr/>
+                    <a:lstStyle/>
+                    <a:p>
+                      <a:r>
+                        <a:rPr sz="1100">
+                          <a:solidFill>
+                            <a:srgbClr val="1A1A1A"/>
+                          </a:solidFill>
+                        </a:rPr>
+                        <a:t>Fundamental momentum</a:t>
+                      </a:r>
+                    </a:p>
+                  </a:txBody>
+                  <a:tcPr/>
+                </a:tc>
+                <a:tc>
+                  <a:txBody>
+                    <a:bodyPr/>
+                    <a:lstStyle/>
+                    <a:p>
+                      <a:r>
+                        <a:rPr sz="1100">
+                          <a:solidFill>
+                            <a:srgbClr val="1A1A1A"/>
+                          </a:solidFill>
+                        </a:rPr>
+                        <a:t>Dongfang net profit growth exceeded Jereh by 29.1pp (31.1% vs 2.0%).</a:t>
+                      </a:r>
+                    </a:p>
+                  </a:txBody>
+                  <a:tcPr/>
+                </a:tc>
+                <a:tc>
+                  <a:txBody>
+                    <a:bodyPr/>
+                    <a:lstStyle/>
+                    <a:p>
+                      <a:r>
+                        <a:rPr sz="1100">
+                          <a:solidFill>
+                            <a:srgbClr val="1A1A1A"/>
+                          </a:solidFill>
+                        </a:rPr>
+                        <a:t>Supports long Dongfang / short Jereh</a:t>
+                      </a:r>
+                    </a:p>
+                  </a:txBody>
+                  <a:tcPr/>
+                </a:tc>
+              </a:tr>
+              <a:tr h="426720">
+                <a:tc>
+                  <a:txBody>
+                    <a:bodyPr/>
+                    <a:lstStyle/>
+                    <a:p>
+                      <a:r>
+                        <a:rPr sz="1100">
+                          <a:solidFill>
+                            <a:srgbClr val="1A1A1A"/>
+                          </a:solidFill>
+                        </a:rPr>
+                        <a:t>Valuation stretch</a:t>
+                      </a:r>
+                    </a:p>
+                  </a:txBody>
+                  <a:tcPr/>
+                </a:tc>
+                <a:tc>
+                  <a:txBody>
+                    <a:bodyPr/>
+                    <a:lstStyle/>
+                    <a:p>
+                      <a:r>
+                        <a:rPr sz="1100">
+                          <a:solidFill>
+                            <a:srgbClr val="1A1A1A"/>
+                          </a:solidFill>
+                        </a:rPr>
+                        <a:t>Jereh trades at a 10.4x P/E premium and 2.5x P/B premium to Dongfang (46.5x/5.5x vs 36.1x/3.1x).</a:t>
+                      </a:r>
+                    </a:p>
+                  </a:txBody>
+                  <a:tcPr/>
+                </a:tc>
+                <a:tc>
+                  <a:txBody>
+                    <a:bodyPr/>
+                    <a:lstStyle/>
+                    <a:p>
+                      <a:r>
+                        <a:rPr sz="1100">
+                          <a:solidFill>
+                            <a:srgbClr val="1A1A1A"/>
+                          </a:solidFill>
+                        </a:rPr>
+                        <a:t>Supports short Jereh if growth disappoints</a:t>
+                      </a:r>
+                    </a:p>
+                  </a:txBody>
+                  <a:tcPr/>
+                </a:tc>
+              </a:tr>
+              <a:tr h="426720">
+                <a:tc>
+                  <a:txBody>
+                    <a:bodyPr/>
+                    <a:lstStyle/>
+                    <a:p>
+                      <a:r>
+                        <a:rPr sz="1100">
+                          <a:solidFill>
+                            <a:srgbClr val="1A1A1A"/>
+                          </a:solidFill>
+                        </a:rPr>
+                        <a:t>Technical setup</a:t>
+                      </a:r>
+                    </a:p>
+                  </a:txBody>
+                  <a:tcPr/>
+                </a:tc>
+                <a:tc>
+                  <a:txBody>
+                    <a:bodyPr/>
+                    <a:lstStyle/>
+                    <a:p>
+                      <a:r>
+                        <a:rPr sz="1100">
+                          <a:solidFill>
+                            <a:srgbClr val="1A1A1A"/>
+                          </a:solidFill>
+                        </a:rPr>
+                        <a:t>Jereh is at 100.0% of its 52-week high with RSI 67.6, while Dongfang is at 87.2% with RSI 50.9.</a:t>
+                      </a:r>
+                    </a:p>
+                  </a:txBody>
+                  <a:tcPr/>
+                </a:tc>
+                <a:tc>
+                  <a:txBody>
+                    <a:bodyPr/>
+                    <a:lstStyle/>
+                    <a:p>
+                      <a:r>
+                        <a:rPr sz="1100">
+                          <a:solidFill>
+                            <a:srgbClr val="1A1A1A"/>
+                          </a:solidFill>
+                        </a:rPr>
+                        <a:t>Supports timing discipline</a:t>
+                      </a:r>
+                    </a:p>
+                  </a:txBody>
+                  <a:tcPr/>
+                </a:tc>
+              </a:tr>
+              <a:tr h="426720">
+                <a:tc>
+                  <a:txBody>
+                    <a:bodyPr/>
+                    <a:lstStyle/>
+                    <a:p>
+                      <a:r>
+                        <a:rPr sz="1100">
+                          <a:solidFill>
+                            <a:srgbClr val="1A1A1A"/>
+                          </a:solidFill>
+                        </a:rPr>
+                        <a:t>Scenario valuation</a:t>
+                      </a:r>
+                    </a:p>
+                  </a:txBody>
+                  <a:tcPr/>
+                </a:tc>
+                <a:tc>
+                  <a:txBody>
+                    <a:bodyPr/>
+                    <a:lstStyle/>
+                    <a:p>
+                      <a:r>
+                        <a:rPr sz="1100">
+                          <a:solidFill>
+                            <a:srgbClr val="1A1A1A"/>
+                          </a:solidFill>
+                        </a:rPr>
+                        <a:t>Probability-weighted modeled pair spread is 65.4%.</a:t>
+                      </a:r>
+                    </a:p>
+                  </a:txBody>
+                  <a:tcPr/>
+                </a:tc>
+                <a:tc>
+                  <a:txBody>
+                    <a:bodyPr/>
+                    <a:lstStyle/>
+                    <a:p>
+                      <a:r>
+                        <a:rPr sz="1100">
+                          <a:solidFill>
+                            <a:srgbClr val="1A1A1A"/>
+                          </a:solidFill>
+                        </a:rPr>
+                        <a:t>Forward prediction</a:t>
+                      </a:r>
+                    </a:p>
+                  </a:txBody>
+                  <a:tcPr/>
+                </a:tc>
+              </a:tr>
+            </a:tbl>
+          </a:graphicData>
+        </a:graphic>
+      </p:graphicFrame>
       <p:sp>
         <p:nvSpPr>
           <p:cNvPr id="4" name="TextBox 3"/>
@@ -9790,7 +9330,7 @@
               </a:defRPr>
             </a:pPr>
             <a:r>
-              <a:t>Long Dongfang Electric captures grid capex tailwind. Short Yantai Jereh carries fossil transition risk.</a:t>
+              <a:t>Separates adverse historical backtest from current empirical setup and forward catalysts.</a:t>
             </a:r>
           </a:p>
         </p:txBody>

--- a/deck/UBS_Pitch_Deck_AUTO.pptx
+++ b/deck/UBS_Pitch_Deck_AUTO.pptx
@@ -3215,7 +3215,42 @@
               </a:defRPr>
             </a:pPr>
             <a:r>
-              <a:t>Hong Kong Track | Energy Transition | Energy security is moving from barrels to electrons  |  Long Dongfang Electric (1072.HK) / Short Yantai Jereh (002353.SZ)</a:t>
+              <a:t>Hong Kong Track | Energy Transition | From Clean-Tech Growth to Grid-Backbone Value  |  Long Dongfang Electric (1072.HK) / Short Sungrow (300274.SZ)</a:t>
+            </a:r>
+          </a:p>
+        </p:txBody>
+      </p:sp>
+      <p:sp>
+        <p:nvSpPr>
+          <p:cNvPr id="5" name="TextBox 4"/>
+          <p:cNvSpPr txBox="1"/>
+          <p:nvPr/>
+        </p:nvSpPr>
+        <p:spPr>
+          <a:xfrm>
+            <a:off x="640080" y="4023360"/>
+            <a:ext cx="10972800" cy="731520"/>
+          </a:xfrm>
+          <a:prstGeom prst="rect">
+            <a:avLst/>
+          </a:prstGeom>
+          <a:noFill/>
+        </p:spPr>
+        <p:txBody>
+          <a:bodyPr wrap="none">
+            <a:spAutoFit/>
+          </a:bodyPr>
+          <a:lstStyle/>
+          <a:p>
+            <a:pPr>
+              <a:defRPr sz="1600">
+                <a:solidFill>
+                  <a:srgbClr val="666666"/>
+                </a:solidFill>
+              </a:defRPr>
+            </a:pPr>
+            <a:r>
+              <a:t>Serkan Kumyol | Kirill Shatilov | Hong Kong University of Science and Technology</a:t>
             </a:r>
           </a:p>
         </p:txBody>
@@ -3268,7 +3303,7 @@
               </a:defRPr>
             </a:pPr>
             <a:r>
-              <a:t>Same Energy-Security Theme, Opposite Earnings Quality</a:t>
+              <a:t>Same Energy-Transition Theme, Opposite Cycle Position</a:t>
             </a:r>
           </a:p>
         </p:txBody>
@@ -3327,7 +3362,7 @@
               </a:defRPr>
             </a:pPr>
             <a:r>
-              <a:t>Long Dongfang Electric captures grid capex tailwind. Short Yantai Jereh carries fossil transition risk.</a:t>
+              <a:t>Long Dongfang Electric captures grid capex tailwind. Short Sungrow carries high-expectation inverter and storage de-rating risk.</a:t>
             </a:r>
           </a:p>
         </p:txBody>
@@ -3415,11 +3450,6 @@
                     <a:lstStyle/>
                     <a:p>
                       <a:r>
-                        <a:rPr sz="1200" b="1">
-                          <a:solidFill>
-                            <a:srgbClr val="FFFFFF"/>
-                          </a:solidFill>
-                        </a:rPr>
                         <a:t>Signal Cluster</a:t>
                       </a:r>
                     </a:p>
@@ -3436,11 +3466,6 @@
                     <a:lstStyle/>
                     <a:p>
                       <a:r>
-                        <a:rPr sz="1200" b="1">
-                          <a:solidFill>
-                            <a:srgbClr val="FFFFFF"/>
-                          </a:solidFill>
-                        </a:rPr>
                         <a:t>Grid Equipment</a:t>
                       </a:r>
                     </a:p>
@@ -3457,12 +3482,7 @@
                     <a:lstStyle/>
                     <a:p>
                       <a:r>
-                        <a:rPr sz="1200" b="1">
-                          <a:solidFill>
-                            <a:srgbClr val="FFFFFF"/>
-                          </a:solidFill>
-                        </a:rPr>
-                        <a:t>Oilfield Services</a:t>
+                        <a:t>Inverter &amp; Storage Equipment</a:t>
                       </a:r>
                     </a:p>
                   </a:txBody>
@@ -3480,11 +3500,6 @@
                     <a:lstStyle/>
                     <a:p>
                       <a:r>
-                        <a:rPr sz="1100">
-                          <a:solidFill>
-                            <a:srgbClr val="1A1A1A"/>
-                          </a:solidFill>
-                        </a:rPr>
                         <a:t>Grid upgrade</a:t>
                       </a:r>
                     </a:p>
@@ -3497,29 +3512,19 @@
                     <a:lstStyle/>
                     <a:p>
                       <a:r>
-                        <a:rPr sz="1100">
-                          <a:solidFill>
-                            <a:srgbClr val="1A1A1A"/>
-                          </a:solidFill>
-                        </a:rPr>
+                        <a:t>Low</a:t>
+                      </a:r>
+                    </a:p>
+                  </a:txBody>
+                  <a:tcPr/>
+                </a:tc>
+                <a:tc>
+                  <a:txBody>
+                    <a:bodyPr/>
+                    <a:lstStyle/>
+                    <a:p>
+                      <a:r>
                         <a:t>Medium</a:t>
-                      </a:r>
-                    </a:p>
-                  </a:txBody>
-                  <a:tcPr/>
-                </a:tc>
-                <a:tc>
-                  <a:txBody>
-                    <a:bodyPr/>
-                    <a:lstStyle/>
-                    <a:p>
-                      <a:r>
-                        <a:rPr sz="1100">
-                          <a:solidFill>
-                            <a:srgbClr val="1A1A1A"/>
-                          </a:solidFill>
-                        </a:rPr>
-                        <a:t>Low</a:t>
                       </a:r>
                     </a:p>
                   </a:txBody>
@@ -3533,11 +3538,6 @@
                     <a:lstStyle/>
                     <a:p>
                       <a:r>
-                        <a:rPr sz="1100">
-                          <a:solidFill>
-                            <a:srgbClr val="1A1A1A"/>
-                          </a:solidFill>
-                        </a:rPr>
                         <a:t>Electricity demand</a:t>
                       </a:r>
                     </a:p>
@@ -3550,29 +3550,19 @@
                     <a:lstStyle/>
                     <a:p>
                       <a:r>
-                        <a:rPr sz="1100">
-                          <a:solidFill>
-                            <a:srgbClr val="1A1A1A"/>
-                          </a:solidFill>
-                        </a:rPr>
+                        <a:t>Low</a:t>
+                      </a:r>
+                    </a:p>
+                  </a:txBody>
+                  <a:tcPr/>
+                </a:tc>
+                <a:tc>
+                  <a:txBody>
+                    <a:bodyPr/>
+                    <a:lstStyle/>
+                    <a:p>
+                      <a:r>
                         <a:t>High</a:t>
-                      </a:r>
-                    </a:p>
-                  </a:txBody>
-                  <a:tcPr/>
-                </a:tc>
-                <a:tc>
-                  <a:txBody>
-                    <a:bodyPr/>
-                    <a:lstStyle/>
-                    <a:p>
-                      <a:r>
-                        <a:rPr sz="1100">
-                          <a:solidFill>
-                            <a:srgbClr val="1A1A1A"/>
-                          </a:solidFill>
-                        </a:rPr>
-                        <a:t>Low</a:t>
                       </a:r>
                     </a:p>
                   </a:txBody>
@@ -3586,11 +3576,6 @@
                     <a:lstStyle/>
                     <a:p>
                       <a:r>
-                        <a:rPr sz="1100">
-                          <a:solidFill>
-                            <a:srgbClr val="1A1A1A"/>
-                          </a:solidFill>
-                        </a:rPr>
                         <a:t>Policy-backed capex</a:t>
                       </a:r>
                     </a:p>
@@ -3603,28 +3588,18 @@
                     <a:lstStyle/>
                     <a:p>
                       <a:r>
-                        <a:rPr sz="1100">
-                          <a:solidFill>
-                            <a:srgbClr val="1A1A1A"/>
-                          </a:solidFill>
-                        </a:rPr>
-                        <a:t>Medium</a:t>
-                      </a:r>
-                    </a:p>
-                  </a:txBody>
-                  <a:tcPr/>
-                </a:tc>
-                <a:tc>
-                  <a:txBody>
-                    <a:bodyPr/>
-                    <a:lstStyle/>
-                    <a:p>
-                      <a:r>
-                        <a:rPr sz="1100">
-                          <a:solidFill>
-                            <a:srgbClr val="1A1A1A"/>
-                          </a:solidFill>
-                        </a:rPr>
+                        <a:t>Low</a:t>
+                      </a:r>
+                    </a:p>
+                  </a:txBody>
+                  <a:tcPr/>
+                </a:tc>
+                <a:tc>
+                  <a:txBody>
+                    <a:bodyPr/>
+                    <a:lstStyle/>
+                    <a:p>
+                      <a:r>
                         <a:t>Low</a:t>
                       </a:r>
                     </a:p>
@@ -3639,11 +3614,6 @@
                     <a:lstStyle/>
                     <a:p>
                       <a:r>
-                        <a:rPr sz="1100">
-                          <a:solidFill>
-                            <a:srgbClr val="1A1A1A"/>
-                          </a:solidFill>
-                        </a:rPr>
                         <a:t>Logistics disruption</a:t>
                       </a:r>
                     </a:p>
@@ -3656,11 +3626,6 @@
                     <a:lstStyle/>
                     <a:p>
                       <a:r>
-                        <a:rPr sz="1100">
-                          <a:solidFill>
-                            <a:srgbClr val="1A1A1A"/>
-                          </a:solidFill>
-                        </a:rPr>
                         <a:t>Low</a:t>
                       </a:r>
                     </a:p>
@@ -3673,11 +3638,6 @@
                     <a:lstStyle/>
                     <a:p>
                       <a:r>
-                        <a:rPr sz="1100">
-                          <a:solidFill>
-                            <a:srgbClr val="1A1A1A"/>
-                          </a:solidFill>
-                        </a:rPr>
                         <a:t>Low</a:t>
                       </a:r>
                     </a:p>
@@ -3692,11 +3652,6 @@
                     <a:lstStyle/>
                     <a:p>
                       <a:r>
-                        <a:rPr sz="1100">
-                          <a:solidFill>
-                            <a:srgbClr val="1A1A1A"/>
-                          </a:solidFill>
-                        </a:rPr>
                         <a:t>Margin pressure</a:t>
                       </a:r>
                     </a:p>
@@ -3709,11 +3664,6 @@
                     <a:lstStyle/>
                     <a:p>
                       <a:r>
-                        <a:rPr sz="1100">
-                          <a:solidFill>
-                            <a:srgbClr val="1A1A1A"/>
-                          </a:solidFill>
-                        </a:rPr>
                         <a:t>Low</a:t>
                       </a:r>
                     </a:p>
@@ -3726,11 +3676,6 @@
                     <a:lstStyle/>
                     <a:p>
                       <a:r>
-                        <a:rPr sz="1100">
-                          <a:solidFill>
-                            <a:srgbClr val="1A1A1A"/>
-                          </a:solidFill>
-                        </a:rPr>
                         <a:t>Low</a:t>
                       </a:r>
                     </a:p>
@@ -3764,15 +3709,8 @@
           </a:bodyPr>
           <a:lstStyle/>
           <a:p>
-            <a:pPr>
-              <a:defRPr sz="1200" i="1">
-                <a:solidFill>
-                  <a:srgbClr val="666666"/>
-                </a:solidFill>
-              </a:defRPr>
-            </a:pPr>
-            <a:r>
-              <a:t>Thesis support score: 0.202 | Moderate support for variant thesis | Grid signal share: 60%</a:t>
+            <a:r>
+              <a:t>Thesis support score: 0.244 | Moderate support for variant thesis | Grid signal share: 60%</a:t>
             </a:r>
           </a:p>
         </p:txBody>
@@ -3865,11 +3803,6 @@
                     <a:lstStyle/>
                     <a:p>
                       <a:r>
-                        <a:rPr sz="1200" b="1">
-                          <a:solidFill>
-                            <a:srgbClr val="FFFFFF"/>
-                          </a:solidFill>
-                        </a:rPr>
                         <a:t>Company</a:t>
                       </a:r>
                     </a:p>
@@ -3886,11 +3819,6 @@
                     <a:lstStyle/>
                     <a:p>
                       <a:r>
-                        <a:rPr sz="1200" b="1">
-                          <a:solidFill>
-                            <a:srgbClr val="FFFFFF"/>
-                          </a:solidFill>
-                        </a:rPr>
                         <a:t>Ticker</a:t>
                       </a:r>
                     </a:p>
@@ -3907,11 +3835,6 @@
                     <a:lstStyle/>
                     <a:p>
                       <a:r>
-                        <a:rPr sz="1200" b="1">
-                          <a:solidFill>
-                            <a:srgbClr val="FFFFFF"/>
-                          </a:solidFill>
-                        </a:rPr>
                         <a:t>Sector</a:t>
                       </a:r>
                     </a:p>
@@ -3928,12 +3851,7 @@
                     <a:lstStyle/>
                     <a:p>
                       <a:r>
-                        <a:rPr sz="1200" b="1">
-                          <a:solidFill>
-                            <a:srgbClr val="FFFFFF"/>
-                          </a:solidFill>
-                        </a:rPr>
-                        <a:t>P E</a:t>
+                        <a:t>P/E</a:t>
                       </a:r>
                     </a:p>
                   </a:txBody>
@@ -3949,12 +3867,7 @@
                     <a:lstStyle/>
                     <a:p>
                       <a:r>
-                        <a:rPr sz="1200" b="1">
-                          <a:solidFill>
-                            <a:srgbClr val="FFFFFF"/>
-                          </a:solidFill>
-                        </a:rPr>
-                        <a:t>Ev Ebitda</a:t>
+                        <a:t>EV/EBITDA</a:t>
                       </a:r>
                     </a:p>
                   </a:txBody>
@@ -3970,12 +3883,7 @@
                     <a:lstStyle/>
                     <a:p>
                       <a:r>
-                        <a:rPr sz="1200" b="1">
-                          <a:solidFill>
-                            <a:srgbClr val="FFFFFF"/>
-                          </a:solidFill>
-                        </a:rPr>
-                        <a:t>Roic</a:t>
+                        <a:t>ROIC</a:t>
                       </a:r>
                     </a:p>
                   </a:txBody>
@@ -3991,11 +3899,6 @@
                     <a:lstStyle/>
                     <a:p>
                       <a:r>
-                        <a:rPr sz="1200" b="1">
-                          <a:solidFill>
-                            <a:srgbClr val="FFFFFF"/>
-                          </a:solidFill>
-                        </a:rPr>
                         <a:t>Revenue Growth</a:t>
                       </a:r>
                     </a:p>
@@ -4012,11 +3915,6 @@
                     <a:lstStyle/>
                     <a:p>
                       <a:r>
-                        <a:rPr sz="1200" b="1">
-                          <a:solidFill>
-                            <a:srgbClr val="FFFFFF"/>
-                          </a:solidFill>
-                        </a:rPr>
                         <a:t>Profit Margin</a:t>
                       </a:r>
                     </a:p>
@@ -4035,11 +3933,6 @@
                     <a:lstStyle/>
                     <a:p>
                       <a:r>
-                        <a:rPr sz="1100">
-                          <a:solidFill>
-                            <a:srgbClr val="1A1A1A"/>
-                          </a:solidFill>
-                        </a:rPr>
                         <a:t>DONGFANG ELEC</a:t>
                       </a:r>
                     </a:p>
@@ -4052,11 +3945,6 @@
                     <a:lstStyle/>
                     <a:p>
                       <a:r>
-                        <a:rPr sz="1100">
-                          <a:solidFill>
-                            <a:srgbClr val="1A1A1A"/>
-                          </a:solidFill>
-                        </a:rPr>
                         <a:t>1072.HK</a:t>
                       </a:r>
                     </a:p>
@@ -4069,11 +3957,6 @@
                     <a:lstStyle/>
                     <a:p>
                       <a:r>
-                        <a:rPr sz="1100">
-                          <a:solidFill>
-                            <a:srgbClr val="1A1A1A"/>
-                          </a:solidFill>
-                        </a:rPr>
                         <a:t>Grid / Power Equipment</a:t>
                       </a:r>
                     </a:p>
@@ -4086,11 +3969,6 @@
                     <a:lstStyle/>
                     <a:p>
                       <a:r>
-                        <a:rPr sz="1100">
-                          <a:solidFill>
-                            <a:srgbClr val="1A1A1A"/>
-                          </a:solidFill>
-                        </a:rPr>
                         <a:t>29.6x</a:t>
                       </a:r>
                     </a:p>
@@ -4103,11 +3981,6 @@
                     <a:lstStyle/>
                     <a:p>
                       <a:r>
-                        <a:rPr sz="1100">
-                          <a:solidFill>
-                            <a:srgbClr val="1A1A1A"/>
-                          </a:solidFill>
-                        </a:rPr>
                         <a:t>34.0x</a:t>
                       </a:r>
                     </a:p>
@@ -4118,21 +3991,20 @@
                   <a:txBody>
                     <a:bodyPr/>
                     <a:lstStyle/>
-                    <a:p/>
-                  </a:txBody>
-                  <a:tcPr/>
-                </a:tc>
-                <a:tc>
-                  <a:txBody>
-                    <a:bodyPr/>
-                    <a:lstStyle/>
-                    <a:p>
-                      <a:r>
-                        <a:rPr sz="1100">
-                          <a:solidFill>
-                            <a:srgbClr val="1A1A1A"/>
-                          </a:solidFill>
-                        </a:rPr>
+                    <a:p>
+                      <a:r>
+                        <a:t>N/A</a:t>
+                      </a:r>
+                    </a:p>
+                  </a:txBody>
+                  <a:tcPr/>
+                </a:tc>
+                <a:tc>
+                  <a:txBody>
+                    <a:bodyPr/>
+                    <a:lstStyle/>
+                    <a:p>
+                      <a:r>
                         <a:t>5.9%</a:t>
                       </a:r>
                     </a:p>
@@ -4145,11 +4017,6 @@
                     <a:lstStyle/>
                     <a:p>
                       <a:r>
-                        <a:rPr sz="1100">
-                          <a:solidFill>
-                            <a:srgbClr val="1A1A1A"/>
-                          </a:solidFill>
-                        </a:rPr>
                         <a:t>4.9%</a:t>
                       </a:r>
                     </a:p>
@@ -4164,11 +4031,6 @@
                     <a:lstStyle/>
                     <a:p>
                       <a:r>
-                        <a:rPr sz="1100">
-                          <a:solidFill>
-                            <a:srgbClr val="1A1A1A"/>
-                          </a:solidFill>
-                        </a:rPr>
                         <a:t>GE Vernova Inc.</a:t>
                       </a:r>
                     </a:p>
@@ -4181,11 +4043,6 @@
                     <a:lstStyle/>
                     <a:p>
                       <a:r>
-                        <a:rPr sz="1100">
-                          <a:solidFill>
-                            <a:srgbClr val="1A1A1A"/>
-                          </a:solidFill>
-                        </a:rPr>
                         <a:t>GEV</a:t>
                       </a:r>
                     </a:p>
@@ -4198,11 +4055,6 @@
                     <a:lstStyle/>
                     <a:p>
                       <a:r>
-                        <a:rPr sz="1100">
-                          <a:solidFill>
-                            <a:srgbClr val="1A1A1A"/>
-                          </a:solidFill>
-                        </a:rPr>
                         <a:t>Grid / Power Equipment</a:t>
                       </a:r>
                     </a:p>
@@ -4215,28 +4067,18 @@
                     <a:lstStyle/>
                     <a:p>
                       <a:r>
-                        <a:rPr sz="1100">
-                          <a:solidFill>
-                            <a:srgbClr val="1A1A1A"/>
-                          </a:solidFill>
-                        </a:rPr>
-                        <a:t>31.1x</a:t>
-                      </a:r>
-                    </a:p>
-                  </a:txBody>
-                  <a:tcPr/>
-                </a:tc>
-                <a:tc>
-                  <a:txBody>
-                    <a:bodyPr/>
-                    <a:lstStyle/>
-                    <a:p>
-                      <a:r>
-                        <a:rPr sz="1100">
-                          <a:solidFill>
-                            <a:srgbClr val="1A1A1A"/>
-                          </a:solidFill>
-                        </a:rPr>
+                        <a:t>31.7x</a:t>
+                      </a:r>
+                    </a:p>
+                  </a:txBody>
+                  <a:tcPr/>
+                </a:tc>
+                <a:tc>
+                  <a:txBody>
+                    <a:bodyPr/>
+                    <a:lstStyle/>
+                    <a:p>
+                      <a:r>
                         <a:t>82.2x</a:t>
                       </a:r>
                     </a:p>
@@ -4247,21 +4089,20 @@
                   <a:txBody>
                     <a:bodyPr/>
                     <a:lstStyle/>
-                    <a:p/>
-                  </a:txBody>
-                  <a:tcPr/>
-                </a:tc>
-                <a:tc>
-                  <a:txBody>
-                    <a:bodyPr/>
-                    <a:lstStyle/>
-                    <a:p>
-                      <a:r>
-                        <a:rPr sz="1100">
-                          <a:solidFill>
-                            <a:srgbClr val="1A1A1A"/>
-                          </a:solidFill>
-                        </a:rPr>
+                    <a:p>
+                      <a:r>
+                        <a:t>N/A</a:t>
+                      </a:r>
+                    </a:p>
+                  </a:txBody>
+                  <a:tcPr/>
+                </a:tc>
+                <a:tc>
+                  <a:txBody>
+                    <a:bodyPr/>
+                    <a:lstStyle/>
+                    <a:p>
+                      <a:r>
                         <a:t>16.3%</a:t>
                       </a:r>
                     </a:p>
@@ -4274,11 +4115,6 @@
                     <a:lstStyle/>
                     <a:p>
                       <a:r>
-                        <a:rPr sz="1100">
-                          <a:solidFill>
-                            <a:srgbClr val="1A1A1A"/>
-                          </a:solidFill>
-                        </a:rPr>
                         <a:t>23.8%</a:t>
                       </a:r>
                     </a:p>
@@ -4293,11 +4129,6 @@
                     <a:lstStyle/>
                     <a:p>
                       <a:r>
-                        <a:rPr sz="1100">
-                          <a:solidFill>
-                            <a:srgbClr val="1A1A1A"/>
-                          </a:solidFill>
-                        </a:rPr>
                         <a:t>Quanta Services, Inc.</a:t>
                       </a:r>
                     </a:p>
@@ -4310,11 +4141,6 @@
                     <a:lstStyle/>
                     <a:p>
                       <a:r>
-                        <a:rPr sz="1100">
-                          <a:solidFill>
-                            <a:srgbClr val="1A1A1A"/>
-                          </a:solidFill>
-                        </a:rPr>
                         <a:t>PWR</a:t>
                       </a:r>
                     </a:p>
@@ -4327,11 +4153,6 @@
                     <a:lstStyle/>
                     <a:p>
                       <a:r>
-                        <a:rPr sz="1100">
-                          <a:solidFill>
-                            <a:srgbClr val="1A1A1A"/>
-                          </a:solidFill>
-                        </a:rPr>
                         <a:t>Grid / Power Equipment</a:t>
                       </a:r>
                     </a:p>
@@ -4344,28 +4165,18 @@
                     <a:lstStyle/>
                     <a:p>
                       <a:r>
-                        <a:rPr sz="1100">
-                          <a:solidFill>
-                            <a:srgbClr val="1A1A1A"/>
-                          </a:solidFill>
-                        </a:rPr>
-                        <a:t>92.6x</a:t>
-                      </a:r>
-                    </a:p>
-                  </a:txBody>
-                  <a:tcPr/>
-                </a:tc>
-                <a:tc>
-                  <a:txBody>
-                    <a:bodyPr/>
-                    <a:lstStyle/>
-                    <a:p>
-                      <a:r>
-                        <a:rPr sz="1100">
-                          <a:solidFill>
-                            <a:srgbClr val="1A1A1A"/>
-                          </a:solidFill>
-                        </a:rPr>
+                        <a:t>104.1x</a:t>
+                      </a:r>
+                    </a:p>
+                  </a:txBody>
+                  <a:tcPr/>
+                </a:tc>
+                <a:tc>
+                  <a:txBody>
+                    <a:bodyPr/>
+                    <a:lstStyle/>
+                    <a:p>
+                      <a:r>
                         <a:t>40.1x</a:t>
                       </a:r>
                     </a:p>
@@ -4376,21 +4187,20 @@
                   <a:txBody>
                     <a:bodyPr/>
                     <a:lstStyle/>
-                    <a:p/>
-                  </a:txBody>
-                  <a:tcPr/>
-                </a:tc>
-                <a:tc>
-                  <a:txBody>
-                    <a:bodyPr/>
-                    <a:lstStyle/>
-                    <a:p>
-                      <a:r>
-                        <a:rPr sz="1100">
-                          <a:solidFill>
-                            <a:srgbClr val="1A1A1A"/>
-                          </a:solidFill>
-                        </a:rPr>
+                    <a:p>
+                      <a:r>
+                        <a:t>N/A</a:t>
+                      </a:r>
+                    </a:p>
+                  </a:txBody>
+                  <a:tcPr/>
+                </a:tc>
+                <a:tc>
+                  <a:txBody>
+                    <a:bodyPr/>
+                    <a:lstStyle/>
+                    <a:p>
+                      <a:r>
                         <a:t>19.7%</a:t>
                       </a:r>
                     </a:p>
@@ -4403,11 +4213,6 @@
                     <a:lstStyle/>
                     <a:p>
                       <a:r>
-                        <a:rPr sz="1100">
-                          <a:solidFill>
-                            <a:srgbClr val="1A1A1A"/>
-                          </a:solidFill>
-                        </a:rPr>
                         <a:t>3.6%</a:t>
                       </a:r>
                     </a:p>
@@ -4422,11 +4227,6 @@
                     <a:lstStyle/>
                     <a:p>
                       <a:r>
-                        <a:rPr sz="1100">
-                          <a:solidFill>
-                            <a:srgbClr val="1A1A1A"/>
-                          </a:solidFill>
-                        </a:rPr>
                         <a:t>Eaton Corporation, PLC</a:t>
                       </a:r>
                     </a:p>
@@ -4439,11 +4239,6 @@
                     <a:lstStyle/>
                     <a:p>
                       <a:r>
-                        <a:rPr sz="1100">
-                          <a:solidFill>
-                            <a:srgbClr val="1A1A1A"/>
-                          </a:solidFill>
-                        </a:rPr>
                         <a:t>ETN</a:t>
                       </a:r>
                     </a:p>
@@ -4456,11 +4251,6 @@
                     <a:lstStyle/>
                     <a:p>
                       <a:r>
-                        <a:rPr sz="1100">
-                          <a:solidFill>
-                            <a:srgbClr val="1A1A1A"/>
-                          </a:solidFill>
-                        </a:rPr>
                         <a:t>Grid / Power Equipment</a:t>
                       </a:r>
                     </a:p>
@@ -4473,28 +4263,18 @@
                     <a:lstStyle/>
                     <a:p>
                       <a:r>
-                        <a:rPr sz="1100">
-                          <a:solidFill>
-                            <a:srgbClr val="1A1A1A"/>
-                          </a:solidFill>
-                        </a:rPr>
-                        <a:t>39.4x</a:t>
-                      </a:r>
-                    </a:p>
-                  </a:txBody>
-                  <a:tcPr/>
-                </a:tc>
-                <a:tc>
-                  <a:txBody>
-                    <a:bodyPr/>
-                    <a:lstStyle/>
-                    <a:p>
-                      <a:r>
-                        <a:rPr sz="1100">
-                          <a:solidFill>
-                            <a:srgbClr val="1A1A1A"/>
-                          </a:solidFill>
-                        </a:rPr>
+                        <a:t>40.6x</a:t>
+                      </a:r>
+                    </a:p>
+                  </a:txBody>
+                  <a:tcPr/>
+                </a:tc>
+                <a:tc>
+                  <a:txBody>
+                    <a:bodyPr/>
+                    <a:lstStyle/>
+                    <a:p>
+                      <a:r>
                         <a:t>26.8x</a:t>
                       </a:r>
                     </a:p>
@@ -4505,21 +4285,20 @@
                   <a:txBody>
                     <a:bodyPr/>
                     <a:lstStyle/>
-                    <a:p/>
-                  </a:txBody>
-                  <a:tcPr/>
-                </a:tc>
-                <a:tc>
-                  <a:txBody>
-                    <a:bodyPr/>
-                    <a:lstStyle/>
-                    <a:p>
-                      <a:r>
-                        <a:rPr sz="1100">
-                          <a:solidFill>
-                            <a:srgbClr val="1A1A1A"/>
-                          </a:solidFill>
-                        </a:rPr>
+                    <a:p>
+                      <a:r>
+                        <a:t>N/A</a:t>
+                      </a:r>
+                    </a:p>
+                  </a:txBody>
+                  <a:tcPr/>
+                </a:tc>
+                <a:tc>
+                  <a:txBody>
+                    <a:bodyPr/>
+                    <a:lstStyle/>
+                    <a:p>
+                      <a:r>
                         <a:t>13.1%</a:t>
                       </a:r>
                     </a:p>
@@ -4532,11 +4311,6 @@
                     <a:lstStyle/>
                     <a:p>
                       <a:r>
-                        <a:rPr sz="1100">
-                          <a:solidFill>
-                            <a:srgbClr val="1A1A1A"/>
-                          </a:solidFill>
-                        </a:rPr>
                         <a:t>14.9%</a:t>
                       </a:r>
                     </a:p>
@@ -4551,11 +4325,6 @@
                     <a:lstStyle/>
                     <a:p>
                       <a:r>
-                        <a:rPr sz="1100">
-                          <a:solidFill>
-                            <a:srgbClr val="1A1A1A"/>
-                          </a:solidFill>
-                        </a:rPr>
                         <a:t>ABB</a:t>
                       </a:r>
                     </a:p>
@@ -4568,11 +4337,6 @@
                     <a:lstStyle/>
                     <a:p>
                       <a:r>
-                        <a:rPr sz="1100">
-                          <a:solidFill>
-                            <a:srgbClr val="1A1A1A"/>
-                          </a:solidFill>
-                        </a:rPr>
                         <a:t>ABB</a:t>
                       </a:r>
                     </a:p>
@@ -4585,11 +4349,6 @@
                     <a:lstStyle/>
                     <a:p>
                       <a:r>
-                        <a:rPr sz="1100">
-                          <a:solidFill>
-                            <a:srgbClr val="1A1A1A"/>
-                          </a:solidFill>
-                        </a:rPr>
                         <a:t>Grid / Power Equipment</a:t>
                       </a:r>
                     </a:p>
@@ -4600,39 +4359,59 @@
                   <a:txBody>
                     <a:bodyPr/>
                     <a:lstStyle/>
-                    <a:p/>
-                  </a:txBody>
-                  <a:tcPr/>
-                </a:tc>
-                <a:tc>
-                  <a:txBody>
-                    <a:bodyPr/>
-                    <a:lstStyle/>
-                    <a:p/>
-                  </a:txBody>
-                  <a:tcPr/>
-                </a:tc>
-                <a:tc>
-                  <a:txBody>
-                    <a:bodyPr/>
-                    <a:lstStyle/>
-                    <a:p/>
-                  </a:txBody>
-                  <a:tcPr/>
-                </a:tc>
-                <a:tc>
-                  <a:txBody>
-                    <a:bodyPr/>
-                    <a:lstStyle/>
-                    <a:p/>
-                  </a:txBody>
-                  <a:tcPr/>
-                </a:tc>
-                <a:tc>
-                  <a:txBody>
-                    <a:bodyPr/>
-                    <a:lstStyle/>
-                    <a:p/>
+                    <a:p>
+                      <a:r>
+                        <a:t>N/A</a:t>
+                      </a:r>
+                    </a:p>
+                  </a:txBody>
+                  <a:tcPr/>
+                </a:tc>
+                <a:tc>
+                  <a:txBody>
+                    <a:bodyPr/>
+                    <a:lstStyle/>
+                    <a:p>
+                      <a:r>
+                        <a:t>N/A</a:t>
+                      </a:r>
+                    </a:p>
+                  </a:txBody>
+                  <a:tcPr/>
+                </a:tc>
+                <a:tc>
+                  <a:txBody>
+                    <a:bodyPr/>
+                    <a:lstStyle/>
+                    <a:p>
+                      <a:r>
+                        <a:t>N/A</a:t>
+                      </a:r>
+                    </a:p>
+                  </a:txBody>
+                  <a:tcPr/>
+                </a:tc>
+                <a:tc>
+                  <a:txBody>
+                    <a:bodyPr/>
+                    <a:lstStyle/>
+                    <a:p>
+                      <a:r>
+                        <a:t>N/A</a:t>
+                      </a:r>
+                    </a:p>
+                  </a:txBody>
+                  <a:tcPr/>
+                </a:tc>
+                <a:tc>
+                  <a:txBody>
+                    <a:bodyPr/>
+                    <a:lstStyle/>
+                    <a:p>
+                      <a:r>
+                        <a:t>N/A</a:t>
+                      </a:r>
+                    </a:p>
                   </a:txBody>
                   <a:tcPr/>
                 </a:tc>
@@ -4644,11 +4423,6 @@
                     <a:lstStyle/>
                     <a:p>
                       <a:r>
-                        <a:rPr sz="1100">
-                          <a:solidFill>
-                            <a:srgbClr val="1A1A1A"/>
-                          </a:solidFill>
-                        </a:rPr>
                         <a:t>SCHNEIDER ELECTRIC SE</a:t>
                       </a:r>
                     </a:p>
@@ -4661,11 +4435,6 @@
                     <a:lstStyle/>
                     <a:p>
                       <a:r>
-                        <a:rPr sz="1100">
-                          <a:solidFill>
-                            <a:srgbClr val="1A1A1A"/>
-                          </a:solidFill>
-                        </a:rPr>
                         <a:t>SU.PA</a:t>
                       </a:r>
                     </a:p>
@@ -4678,11 +4447,6 @@
                     <a:lstStyle/>
                     <a:p>
                       <a:r>
-                        <a:rPr sz="1100">
-                          <a:solidFill>
-                            <a:srgbClr val="1A1A1A"/>
-                          </a:solidFill>
-                        </a:rPr>
                         <a:t>Grid / Power Equipment</a:t>
                       </a:r>
                     </a:p>
@@ -4695,28 +4459,18 @@
                     <a:lstStyle/>
                     <a:p>
                       <a:r>
-                        <a:rPr sz="1100">
-                          <a:solidFill>
-                            <a:srgbClr val="1A1A1A"/>
-                          </a:solidFill>
-                        </a:rPr>
-                        <a:t>34.0x</a:t>
-                      </a:r>
-                    </a:p>
-                  </a:txBody>
-                  <a:tcPr/>
-                </a:tc>
-                <a:tc>
-                  <a:txBody>
-                    <a:bodyPr/>
-                    <a:lstStyle/>
-                    <a:p>
-                      <a:r>
-                        <a:rPr sz="1100">
-                          <a:solidFill>
-                            <a:srgbClr val="1A1A1A"/>
-                          </a:solidFill>
-                        </a:rPr>
+                        <a:t>33.4x</a:t>
+                      </a:r>
+                    </a:p>
+                  </a:txBody>
+                  <a:tcPr/>
+                </a:tc>
+                <a:tc>
+                  <a:txBody>
+                    <a:bodyPr/>
+                    <a:lstStyle/>
+                    <a:p>
+                      <a:r>
                         <a:t>21.2x</a:t>
                       </a:r>
                     </a:p>
@@ -4727,21 +4481,20 @@
                   <a:txBody>
                     <a:bodyPr/>
                     <a:lstStyle/>
-                    <a:p/>
-                  </a:txBody>
-                  <a:tcPr/>
-                </a:tc>
-                <a:tc>
-                  <a:txBody>
-                    <a:bodyPr/>
-                    <a:lstStyle/>
-                    <a:p>
-                      <a:r>
-                        <a:rPr sz="1100">
-                          <a:solidFill>
-                            <a:srgbClr val="1A1A1A"/>
-                          </a:solidFill>
-                        </a:rPr>
+                    <a:p>
+                      <a:r>
+                        <a:t>N/A</a:t>
+                      </a:r>
+                    </a:p>
+                  </a:txBody>
+                  <a:tcPr/>
+                </a:tc>
+                <a:tc>
+                  <a:txBody>
+                    <a:bodyPr/>
+                    <a:lstStyle/>
+                    <a:p>
+                      <a:r>
                         <a:t>4.2%</a:t>
                       </a:r>
                     </a:p>
@@ -4754,11 +4507,6 @@
                     <a:lstStyle/>
                     <a:p>
                       <a:r>
-                        <a:rPr sz="1100">
-                          <a:solidFill>
-                            <a:srgbClr val="1A1A1A"/>
-                          </a:solidFill>
-                        </a:rPr>
                         <a:t>10.4%</a:t>
                       </a:r>
                     </a:p>
@@ -4773,122 +4521,91 @@
                     <a:lstStyle/>
                     <a:p>
                       <a:r>
-                        <a:rPr sz="1100">
-                          <a:solidFill>
-                            <a:srgbClr val="1A1A1A"/>
-                          </a:solidFill>
-                        </a:rPr>
-                        <a:t>YANTAI JEREH OILFIELD SERVICES </a:t>
-                      </a:r>
-                    </a:p>
-                  </a:txBody>
-                  <a:tcPr/>
-                </a:tc>
-                <a:tc>
-                  <a:txBody>
-                    <a:bodyPr/>
-                    <a:lstStyle/>
-                    <a:p>
-                      <a:r>
-                        <a:rPr sz="1100">
-                          <a:solidFill>
-                            <a:srgbClr val="1A1A1A"/>
-                          </a:solidFill>
-                        </a:rPr>
-                        <a:t>002353.SZ</a:t>
-                      </a:r>
-                    </a:p>
-                  </a:txBody>
-                  <a:tcPr/>
-                </a:tc>
-                <a:tc>
-                  <a:txBody>
-                    <a:bodyPr/>
-                    <a:lstStyle/>
-                    <a:p>
-                      <a:r>
-                        <a:rPr sz="1100">
-                          <a:solidFill>
-                            <a:srgbClr val="1A1A1A"/>
-                          </a:solidFill>
-                        </a:rPr>
-                        <a:t>Oilfield Services</a:t>
-                      </a:r>
-                    </a:p>
-                  </a:txBody>
-                  <a:tcPr/>
-                </a:tc>
-                <a:tc>
-                  <a:txBody>
-                    <a:bodyPr/>
-                    <a:lstStyle/>
-                    <a:p>
-                      <a:r>
-                        <a:rPr sz="1100">
-                          <a:solidFill>
-                            <a:srgbClr val="1A1A1A"/>
-                          </a:solidFill>
-                        </a:rPr>
-                        <a:t>49.6x</a:t>
-                      </a:r>
-                    </a:p>
-                  </a:txBody>
-                  <a:tcPr/>
-                </a:tc>
-                <a:tc>
-                  <a:txBody>
-                    <a:bodyPr/>
-                    <a:lstStyle/>
-                    <a:p>
-                      <a:r>
-                        <a:rPr sz="1100">
-                          <a:solidFill>
-                            <a:srgbClr val="1A1A1A"/>
-                          </a:solidFill>
-                        </a:rPr>
-                        <a:t>28.3x</a:t>
-                      </a:r>
-                    </a:p>
-                  </a:txBody>
-                  <a:tcPr/>
-                </a:tc>
-                <a:tc>
-                  <a:txBody>
-                    <a:bodyPr/>
-                    <a:lstStyle/>
-                    <a:p/>
-                  </a:txBody>
-                  <a:tcPr/>
-                </a:tc>
-                <a:tc>
-                  <a:txBody>
-                    <a:bodyPr/>
-                    <a:lstStyle/>
-                    <a:p>
-                      <a:r>
-                        <a:rPr sz="1100">
-                          <a:solidFill>
-                            <a:srgbClr val="1A1A1A"/>
-                          </a:solidFill>
-                        </a:rPr>
-                        <a:t>22.5%</a:t>
-                      </a:r>
-                    </a:p>
-                  </a:txBody>
-                  <a:tcPr/>
-                </a:tc>
-                <a:tc>
-                  <a:txBody>
-                    <a:bodyPr/>
-                    <a:lstStyle/>
-                    <a:p>
-                      <a:r>
-                        <a:rPr sz="1100">
-                          <a:solidFill>
-                            <a:srgbClr val="1A1A1A"/>
-                          </a:solidFill>
-                        </a:rPr>
-                        <a:t>16.7%</a:t>
+                        <a:t>SUNGROW POWER SUPPLY CO LTD</a:t>
+                      </a:r>
+                    </a:p>
+                  </a:txBody>
+                  <a:tcPr/>
+                </a:tc>
+                <a:tc>
+                  <a:txBody>
+                    <a:bodyPr/>
+                    <a:lstStyle/>
+                    <a:p>
+                      <a:r>
+                        <a:t>300274.SZ</a:t>
+                      </a:r>
+                    </a:p>
+                  </a:txBody>
+                  <a:tcPr/>
+                </a:tc>
+                <a:tc>
+                  <a:txBody>
+                    <a:bodyPr/>
+                    <a:lstStyle/>
+                    <a:p>
+                      <a:r>
+                        <a:t>Inverter / Storage Equipment</a:t>
+                      </a:r>
+                    </a:p>
+                  </a:txBody>
+                  <a:tcPr/>
+                </a:tc>
+                <a:tc>
+                  <a:txBody>
+                    <a:bodyPr/>
+                    <a:lstStyle/>
+                    <a:p>
+                      <a:r>
+                        <a:t>23.7x</a:t>
+                      </a:r>
+                    </a:p>
+                  </a:txBody>
+                  <a:tcPr/>
+                </a:tc>
+                <a:tc>
+                  <a:txBody>
+                    <a:bodyPr/>
+                    <a:lstStyle/>
+                    <a:p>
+                      <a:r>
+                        <a:t>16.9x</a:t>
+                      </a:r>
+                    </a:p>
+                  </a:txBody>
+                  <a:tcPr/>
+                </a:tc>
+                <a:tc>
+                  <a:txBody>
+                    <a:bodyPr/>
+                    <a:lstStyle/>
+                    <a:p>
+                      <a:r>
+                        <a:t>N/A</a:t>
+                      </a:r>
+                    </a:p>
+                  </a:txBody>
+                  <a:tcPr/>
+                </a:tc>
+                <a:tc>
+                  <a:txBody>
+                    <a:bodyPr/>
+                    <a:lstStyle/>
+                    <a:p>
+                      <a:r>
+                        <a:t>-18.3%</a:t>
+                      </a:r>
+                    </a:p>
+                  </a:txBody>
+                  <a:tcPr/>
+                </a:tc>
+                <a:tc>
+                  <a:txBody>
+                    <a:bodyPr/>
+                    <a:lstStyle/>
+                    <a:p>
+                      <a:r>
+                        <a:t>13.9%</a:t>
                       </a:r>
                     </a:p>
                   </a:txBody>
@@ -4921,15 +4638,8 @@
           </a:bodyPr>
           <a:lstStyle/>
           <a:p>
-            <a:pPr>
-              <a:defRPr sz="1200" i="1">
-                <a:solidFill>
-                  <a:srgbClr val="666666"/>
-                </a:solidFill>
-              </a:defRPr>
-            </a:pPr>
-            <a:r>
-              <a:t>Grid peers command premium multiples on earnings visibility; OFS trades at cyclical discount</a:t>
+            <a:r>
+              <a:t>Comps compare Dongfang's grid-backbone exposure against premium downstream inverter/storage valuation risk.</a:t>
             </a:r>
           </a:p>
         </p:txBody>
@@ -5214,7 +4924,7 @@
                             <a:srgbClr val="1A1A1A"/>
                           </a:solidFill>
                         </a:rPr>
-                        <a:t>3.4</a:t>
+                        <a:t>2.8</a:t>
                       </a:r>
                     </a:p>
                   </a:txBody>
@@ -5231,7 +4941,7 @@
                             <a:srgbClr val="1A1A1A"/>
                           </a:solidFill>
                         </a:rPr>
-                        <a:t>18.0</a:t>
+                        <a:t>17.0</a:t>
                       </a:r>
                     </a:p>
                   </a:txBody>
@@ -5299,7 +5009,7 @@
                             <a:srgbClr val="1A1A1A"/>
                           </a:solidFill>
                         </a:rPr>
-                        <a:t>141.576</a:t>
+                        <a:t>112.009</a:t>
                       </a:r>
                     </a:p>
                   </a:txBody>
@@ -5316,7 +5026,7 @@
                             <a:srgbClr val="1A1A1A"/>
                           </a:solidFill>
                         </a:rPr>
-                        <a:t>42.52</a:t>
+                        <a:t>33.64</a:t>
                       </a:r>
                     </a:p>
                   </a:txBody>
@@ -5335,24 +5045,7 @@
                             <a:srgbClr val="1A1A1A"/>
                           </a:solidFill>
                         </a:rPr>
-                        <a:t>Yantai Jereh</a:t>
-                      </a:r>
-                    </a:p>
-                  </a:txBody>
-                  <a:tcPr/>
-                </a:tc>
-                <a:tc>
-                  <a:txBody>
-                    <a:bodyPr/>
-                    <a:lstStyle/>
-                    <a:p>
-                      <a:r>
-                        <a:rPr sz="1100">
-                          <a:solidFill>
-                            <a:srgbClr val="1A1A1A"/>
-                          </a:solidFill>
-                        </a:rPr>
-                        <a:t>2.2</a:t>
+                        <a:t>Sungrow</a:t>
                       </a:r>
                     </a:p>
                   </a:txBody>
@@ -5386,6 +5079,23 @@
                             <a:srgbClr val="1A1A1A"/>
                           </a:solidFill>
                         </a:rPr>
+                        <a:t>8.0</a:t>
+                      </a:r>
+                    </a:p>
+                  </a:txBody>
+                  <a:tcPr/>
+                </a:tc>
+                <a:tc>
+                  <a:txBody>
+                    <a:bodyPr/>
+                    <a:lstStyle/>
+                    <a:p>
+                      <a:r>
+                        <a:rPr sz="1100">
+                          <a:solidFill>
+                            <a:srgbClr val="1A1A1A"/>
+                          </a:solidFill>
+                        </a:rPr>
                         <a:t>3.0</a:t>
                       </a:r>
                     </a:p>
@@ -5437,7 +5147,7 @@
                             <a:srgbClr val="1A1A1A"/>
                           </a:solidFill>
                         </a:rPr>
-                        <a:t>43.094</a:t>
+                        <a:t>156.707</a:t>
                       </a:r>
                     </a:p>
                   </a:txBody>
@@ -5454,7 +5164,7 @@
                             <a:srgbClr val="1A1A1A"/>
                           </a:solidFill>
                         </a:rPr>
-                        <a:t>42.25</a:t>
+                        <a:t>106.6</a:t>
                       </a:r>
                     </a:p>
                   </a:txBody>
@@ -5587,12 +5297,7 @@
                     <a:lstStyle/>
                     <a:p>
                       <a:r>
-                        <a:rPr sz="1200" b="1">
-                          <a:solidFill>
-                            <a:srgbClr val="FFFFFF"/>
-                          </a:solidFill>
-                        </a:rPr>
-                        <a:t>Scenario</a:t>
+                        <a:t>scenario</a:t>
                       </a:r>
                     </a:p>
                   </a:txBody>
@@ -5608,12 +5313,7 @@
                     <a:lstStyle/>
                     <a:p>
                       <a:r>
-                        <a:rPr sz="1200" b="1">
-                          <a:solidFill>
-                            <a:srgbClr val="FFFFFF"/>
-                          </a:solidFill>
-                        </a:rPr>
-                        <a:t>Eps Growth</a:t>
+                        <a:t>eps_growth</a:t>
                       </a:r>
                     </a:p>
                   </a:txBody>
@@ -5629,12 +5329,7 @@
                     <a:lstStyle/>
                     <a:p>
                       <a:r>
-                        <a:rPr sz="1200" b="1">
-                          <a:solidFill>
-                            <a:srgbClr val="FFFFFF"/>
-                          </a:solidFill>
-                        </a:rPr>
-                        <a:t>Target Pe</a:t>
+                        <a:t>target_pe</a:t>
                       </a:r>
                     </a:p>
                   </a:txBody>
@@ -5650,12 +5345,7 @@
                     <a:lstStyle/>
                     <a:p>
                       <a:r>
-                        <a:rPr sz="1200" b="1">
-                          <a:solidFill>
-                            <a:srgbClr val="FFFFFF"/>
-                          </a:solidFill>
-                        </a:rPr>
-                        <a:t>Target Eps</a:t>
+                        <a:t>target_eps</a:t>
                       </a:r>
                     </a:p>
                   </a:txBody>
@@ -5671,12 +5361,7 @@
                     <a:lstStyle/>
                     <a:p>
                       <a:r>
-                        <a:rPr sz="1200" b="1">
-                          <a:solidFill>
-                            <a:srgbClr val="FFFFFF"/>
-                          </a:solidFill>
-                        </a:rPr>
-                        <a:t>Target Price</a:t>
+                        <a:t>target_price</a:t>
                       </a:r>
                     </a:p>
                   </a:txBody>
@@ -5692,12 +5377,7 @@
                     <a:lstStyle/>
                     <a:p>
                       <a:r>
-                        <a:rPr sz="1200" b="1">
-                          <a:solidFill>
-                            <a:srgbClr val="FFFFFF"/>
-                          </a:solidFill>
-                        </a:rPr>
-                        <a:t>Upside Pct</a:t>
+                        <a:t>upside_pct</a:t>
                       </a:r>
                     </a:p>
                   </a:txBody>
@@ -5713,12 +5393,7 @@
                     <a:lstStyle/>
                     <a:p>
                       <a:r>
-                        <a:rPr sz="1200" b="1">
-                          <a:solidFill>
-                            <a:srgbClr val="FFFFFF"/>
-                          </a:solidFill>
-                        </a:rPr>
-                        <a:t>Probability</a:t>
+                        <a:t>probability</a:t>
                       </a:r>
                     </a:p>
                   </a:txBody>
@@ -5736,11 +5411,6 @@
                     <a:lstStyle/>
                     <a:p>
                       <a:r>
-                        <a:rPr sz="1100">
-                          <a:solidFill>
-                            <a:srgbClr val="1A1A1A"/>
-                          </a:solidFill>
-                        </a:rPr>
                         <a:t>Bear</a:t>
                       </a:r>
                     </a:p>
@@ -5753,11 +5423,6 @@
                     <a:lstStyle/>
                     <a:p>
                       <a:r>
-                        <a:rPr sz="1100">
-                          <a:solidFill>
-                            <a:srgbClr val="1A1A1A"/>
-                          </a:solidFill>
-                        </a:rPr>
                         <a:t>+15%</a:t>
                       </a:r>
                     </a:p>
@@ -5770,11 +5435,6 @@
                     <a:lstStyle/>
                     <a:p>
                       <a:r>
-                        <a:rPr sz="1100">
-                          <a:solidFill>
-                            <a:srgbClr val="1A1A1A"/>
-                          </a:solidFill>
-                        </a:rPr>
                         <a:t>32.0x</a:t>
                       </a:r>
                     </a:p>
@@ -5787,11 +5447,6 @@
                     <a:lstStyle/>
                     <a:p>
                       <a:r>
-                        <a:rPr sz="1100">
-                          <a:solidFill>
-                            <a:srgbClr val="1A1A1A"/>
-                          </a:solidFill>
-                        </a:rPr>
                         <a:t>1.32</a:t>
                       </a:r>
                     </a:p>
@@ -5804,11 +5459,6 @@
                     <a:lstStyle/>
                     <a:p>
                       <a:r>
-                        <a:rPr sz="1100">
-                          <a:solidFill>
-                            <a:srgbClr val="1A1A1A"/>
-                          </a:solidFill>
-                        </a:rPr>
                         <a:t>42.32</a:t>
                       </a:r>
                     </a:p>
@@ -5821,11 +5471,6 @@
                     <a:lstStyle/>
                     <a:p>
                       <a:r>
-                        <a:rPr sz="1100">
-                          <a:solidFill>
-                            <a:srgbClr val="1A1A1A"/>
-                          </a:solidFill>
-                        </a:rPr>
                         <a:t>+8%</a:t>
                       </a:r>
                     </a:p>
@@ -5838,11 +5483,6 @@
                     <a:lstStyle/>
                     <a:p>
                       <a:r>
-                        <a:rPr sz="1100">
-                          <a:solidFill>
-                            <a:srgbClr val="1A1A1A"/>
-                          </a:solidFill>
-                        </a:rPr>
                         <a:t>20%</a:t>
                       </a:r>
                     </a:p>
@@ -5857,11 +5497,6 @@
                     <a:lstStyle/>
                     <a:p>
                       <a:r>
-                        <a:rPr sz="1100">
-                          <a:solidFill>
-                            <a:srgbClr val="1A1A1A"/>
-                          </a:solidFill>
-                        </a:rPr>
                         <a:t>Base</a:t>
                       </a:r>
                     </a:p>
@@ -5874,11 +5509,6 @@
                     <a:lstStyle/>
                     <a:p>
                       <a:r>
-                        <a:rPr sz="1100">
-                          <a:solidFill>
-                            <a:srgbClr val="1A1A1A"/>
-                          </a:solidFill>
-                        </a:rPr>
                         <a:t>+25%</a:t>
                       </a:r>
                     </a:p>
@@ -5891,11 +5521,6 @@
                     <a:lstStyle/>
                     <a:p>
                       <a:r>
-                        <a:rPr sz="1100">
-                          <a:solidFill>
-                            <a:srgbClr val="1A1A1A"/>
-                          </a:solidFill>
-                        </a:rPr>
                         <a:t>38.0x</a:t>
                       </a:r>
                     </a:p>
@@ -5908,11 +5533,6 @@
                     <a:lstStyle/>
                     <a:p>
                       <a:r>
-                        <a:rPr sz="1100">
-                          <a:solidFill>
-                            <a:srgbClr val="1A1A1A"/>
-                          </a:solidFill>
-                        </a:rPr>
                         <a:t>1.44</a:t>
                       </a:r>
                     </a:p>
@@ -5925,11 +5545,6 @@
                     <a:lstStyle/>
                     <a:p>
                       <a:r>
-                        <a:rPr sz="1100">
-                          <a:solidFill>
-                            <a:srgbClr val="1A1A1A"/>
-                          </a:solidFill>
-                        </a:rPr>
                         <a:t>54.62</a:t>
                       </a:r>
                     </a:p>
@@ -5942,11 +5557,6 @@
                     <a:lstStyle/>
                     <a:p>
                       <a:r>
-                        <a:rPr sz="1100">
-                          <a:solidFill>
-                            <a:srgbClr val="1A1A1A"/>
-                          </a:solidFill>
-                        </a:rPr>
                         <a:t>+40%</a:t>
                       </a:r>
                     </a:p>
@@ -5959,11 +5569,6 @@
                     <a:lstStyle/>
                     <a:p>
                       <a:r>
-                        <a:rPr sz="1100">
-                          <a:solidFill>
-                            <a:srgbClr val="1A1A1A"/>
-                          </a:solidFill>
-                        </a:rPr>
                         <a:t>55%</a:t>
                       </a:r>
                     </a:p>
@@ -5978,11 +5583,6 @@
                     <a:lstStyle/>
                     <a:p>
                       <a:r>
-                        <a:rPr sz="1100">
-                          <a:solidFill>
-                            <a:srgbClr val="1A1A1A"/>
-                          </a:solidFill>
-                        </a:rPr>
                         <a:t>Bull</a:t>
                       </a:r>
                     </a:p>
@@ -5995,11 +5595,6 @@
                     <a:lstStyle/>
                     <a:p>
                       <a:r>
-                        <a:rPr sz="1100">
-                          <a:solidFill>
-                            <a:srgbClr val="1A1A1A"/>
-                          </a:solidFill>
-                        </a:rPr>
                         <a:t>+40%</a:t>
                       </a:r>
                     </a:p>
@@ -6012,11 +5607,6 @@
                     <a:lstStyle/>
                     <a:p>
                       <a:r>
-                        <a:rPr sz="1100">
-                          <a:solidFill>
-                            <a:srgbClr val="1A1A1A"/>
-                          </a:solidFill>
-                        </a:rPr>
                         <a:t>45.0x</a:t>
                       </a:r>
                     </a:p>
@@ -6029,11 +5619,6 @@
                     <a:lstStyle/>
                     <a:p>
                       <a:r>
-                        <a:rPr sz="1100">
-                          <a:solidFill>
-                            <a:srgbClr val="1A1A1A"/>
-                          </a:solidFill>
-                        </a:rPr>
                         <a:t>1.61</a:t>
                       </a:r>
                     </a:p>
@@ -6046,11 +5631,6 @@
                     <a:lstStyle/>
                     <a:p>
                       <a:r>
-                        <a:rPr sz="1100">
-                          <a:solidFill>
-                            <a:srgbClr val="1A1A1A"/>
-                          </a:solidFill>
-                        </a:rPr>
                         <a:t>72.45</a:t>
                       </a:r>
                     </a:p>
@@ -6063,11 +5643,6 @@
                     <a:lstStyle/>
                     <a:p>
                       <a:r>
-                        <a:rPr sz="1100">
-                          <a:solidFill>
-                            <a:srgbClr val="1A1A1A"/>
-                          </a:solidFill>
-                        </a:rPr>
                         <a:t>+85%</a:t>
                       </a:r>
                     </a:p>
@@ -6080,11 +5655,6 @@
                     <a:lstStyle/>
                     <a:p>
                       <a:r>
-                        <a:rPr sz="1100">
-                          <a:solidFill>
-                            <a:srgbClr val="1A1A1A"/>
-                          </a:solidFill>
-                        </a:rPr>
                         <a:t>25%</a:t>
                       </a:r>
                     </a:p>
@@ -6179,7 +5749,7 @@
               </a:defRPr>
             </a:pPr>
             <a:r>
-              <a:t>Short Scenarios: Yantai Jereh</a:t>
+              <a:t>Short Scenarios: Sungrow</a:t>
             </a:r>
           </a:p>
         </p:txBody>
@@ -6218,12 +5788,7 @@
                     <a:lstStyle/>
                     <a:p>
                       <a:r>
-                        <a:rPr sz="1200" b="1">
-                          <a:solidFill>
-                            <a:srgbClr val="FFFFFF"/>
-                          </a:solidFill>
-                        </a:rPr>
-                        <a:t>Scenario</a:t>
+                        <a:t>scenario</a:t>
                       </a:r>
                     </a:p>
                   </a:txBody>
@@ -6239,12 +5804,7 @@
                     <a:lstStyle/>
                     <a:p>
                       <a:r>
-                        <a:rPr sz="1200" b="1">
-                          <a:solidFill>
-                            <a:srgbClr val="FFFFFF"/>
-                          </a:solidFill>
-                        </a:rPr>
-                        <a:t>Eps Growth</a:t>
+                        <a:t>eps_growth</a:t>
                       </a:r>
                     </a:p>
                   </a:txBody>
@@ -6260,12 +5820,7 @@
                     <a:lstStyle/>
                     <a:p>
                       <a:r>
-                        <a:rPr sz="1200" b="1">
-                          <a:solidFill>
-                            <a:srgbClr val="FFFFFF"/>
-                          </a:solidFill>
-                        </a:rPr>
-                        <a:t>Target Pe</a:t>
+                        <a:t>target_pe</a:t>
                       </a:r>
                     </a:p>
                   </a:txBody>
@@ -6281,12 +5836,7 @@
                     <a:lstStyle/>
                     <a:p>
                       <a:r>
-                        <a:rPr sz="1200" b="1">
-                          <a:solidFill>
-                            <a:srgbClr val="FFFFFF"/>
-                          </a:solidFill>
-                        </a:rPr>
-                        <a:t>Target Eps</a:t>
+                        <a:t>target_eps</a:t>
                       </a:r>
                     </a:p>
                   </a:txBody>
@@ -6302,12 +5852,7 @@
                     <a:lstStyle/>
                     <a:p>
                       <a:r>
-                        <a:rPr sz="1200" b="1">
-                          <a:solidFill>
-                            <a:srgbClr val="FFFFFF"/>
-                          </a:solidFill>
-                        </a:rPr>
-                        <a:t>Target Price</a:t>
+                        <a:t>target_price</a:t>
                       </a:r>
                     </a:p>
                   </a:txBody>
@@ -6323,12 +5868,7 @@
                     <a:lstStyle/>
                     <a:p>
                       <a:r>
-                        <a:rPr sz="1200" b="1">
-                          <a:solidFill>
-                            <a:srgbClr val="FFFFFF"/>
-                          </a:solidFill>
-                        </a:rPr>
-                        <a:t>Upside Pct</a:t>
+                        <a:t>upside_pct</a:t>
                       </a:r>
                     </a:p>
                   </a:txBody>
@@ -6344,12 +5884,7 @@
                     <a:lstStyle/>
                     <a:p>
                       <a:r>
-                        <a:rPr sz="1200" b="1">
-                          <a:solidFill>
-                            <a:srgbClr val="FFFFFF"/>
-                          </a:solidFill>
-                        </a:rPr>
-                        <a:t>Probability</a:t>
+                        <a:t>probability</a:t>
                       </a:r>
                     </a:p>
                   </a:txBody>
@@ -6367,11 +5902,6 @@
                     <a:lstStyle/>
                     <a:p>
                       <a:r>
-                        <a:rPr sz="1100">
-                          <a:solidFill>
-                            <a:srgbClr val="1A1A1A"/>
-                          </a:solidFill>
-                        </a:rPr>
                         <a:t>Bear</a:t>
                       </a:r>
                     </a:p>
@@ -6384,96 +5914,66 @@
                     <a:lstStyle/>
                     <a:p>
                       <a:r>
-                        <a:rPr sz="1100">
-                          <a:solidFill>
-                            <a:srgbClr val="1A1A1A"/>
-                          </a:solidFill>
-                        </a:rPr>
-                        <a:t>-5%</a:t>
-                      </a:r>
-                    </a:p>
-                  </a:txBody>
-                  <a:tcPr/>
-                </a:tc>
-                <a:tc>
-                  <a:txBody>
-                    <a:bodyPr/>
-                    <a:lstStyle/>
-                    <a:p>
-                      <a:r>
-                        <a:rPr sz="1100">
-                          <a:solidFill>
-                            <a:srgbClr val="1A1A1A"/>
-                          </a:solidFill>
-                        </a:rPr>
-                        <a:t>34.0x</a:t>
-                      </a:r>
-                    </a:p>
-                  </a:txBody>
-                  <a:tcPr/>
-                </a:tc>
-                <a:tc>
-                  <a:txBody>
-                    <a:bodyPr/>
-                    <a:lstStyle/>
-                    <a:p>
-                      <a:r>
-                        <a:rPr sz="1100">
-                          <a:solidFill>
-                            <a:srgbClr val="1A1A1A"/>
-                          </a:solidFill>
-                        </a:rPr>
-                        <a:t>2.51</a:t>
-                      </a:r>
-                    </a:p>
-                  </a:txBody>
-                  <a:tcPr/>
-                </a:tc>
-                <a:tc>
-                  <a:txBody>
-                    <a:bodyPr/>
-                    <a:lstStyle/>
-                    <a:p>
-                      <a:r>
-                        <a:rPr sz="1100">
-                          <a:solidFill>
-                            <a:srgbClr val="1A1A1A"/>
-                          </a:solidFill>
-                        </a:rPr>
-                        <a:t>85.27</a:t>
-                      </a:r>
-                    </a:p>
-                  </a:txBody>
-                  <a:tcPr/>
-                </a:tc>
-                <a:tc>
-                  <a:txBody>
-                    <a:bodyPr/>
-                    <a:lstStyle/>
-                    <a:p>
-                      <a:r>
-                        <a:rPr sz="1100">
-                          <a:solidFill>
-                            <a:srgbClr val="1A1A1A"/>
-                          </a:solidFill>
-                        </a:rPr>
-                        <a:t>-38%</a:t>
-                      </a:r>
-                    </a:p>
-                  </a:txBody>
-                  <a:tcPr/>
-                </a:tc>
-                <a:tc>
-                  <a:txBody>
-                    <a:bodyPr/>
-                    <a:lstStyle/>
-                    <a:p>
-                      <a:r>
-                        <a:rPr sz="1100">
-                          <a:solidFill>
-                            <a:srgbClr val="1A1A1A"/>
-                          </a:solidFill>
-                        </a:rPr>
+                        <a:t>+0%</a:t>
+                      </a:r>
+                    </a:p>
+                  </a:txBody>
+                  <a:tcPr/>
+                </a:tc>
+                <a:tc>
+                  <a:txBody>
+                    <a:bodyPr/>
+                    <a:lstStyle/>
+                    <a:p>
+                      <a:r>
+                        <a:t>36.0x</a:t>
+                      </a:r>
+                    </a:p>
+                  </a:txBody>
+                  <a:tcPr/>
+                </a:tc>
+                <a:tc>
+                  <a:txBody>
+                    <a:bodyPr/>
+                    <a:lstStyle/>
+                    <a:p>
+                      <a:r>
+                        <a:t>0.92</a:t>
+                      </a:r>
+                    </a:p>
+                  </a:txBody>
+                  <a:tcPr/>
+                </a:tc>
+                <a:tc>
+                  <a:txBody>
+                    <a:bodyPr/>
+                    <a:lstStyle/>
+                    <a:p>
+                      <a:r>
+                        <a:t>33.12</a:t>
+                      </a:r>
+                    </a:p>
+                  </a:txBody>
+                  <a:tcPr/>
+                </a:tc>
+                <a:tc>
+                  <a:txBody>
+                    <a:bodyPr/>
+                    <a:lstStyle/>
+                    <a:p>
+                      <a:r>
+                        <a:t>-76%</a:t>
+                      </a:r>
+                    </a:p>
+                  </a:txBody>
+                  <a:tcPr/>
+                </a:tc>
+                <a:tc>
+                  <a:txBody>
+                    <a:bodyPr/>
+                    <a:lstStyle/>
+                    <a:p>
+                      <a:r>
                         <a:t>35%</a:t>
                       </a:r>
                     </a:p>
@@ -6488,11 +5988,6 @@
                     <a:lstStyle/>
                     <a:p>
                       <a:r>
-                        <a:rPr sz="1100">
-                          <a:solidFill>
-                            <a:srgbClr val="1A1A1A"/>
-                          </a:solidFill>
-                        </a:rPr>
                         <a:t>Base</a:t>
                       </a:r>
                     </a:p>
@@ -6505,96 +6000,66 @@
                     <a:lstStyle/>
                     <a:p>
                       <a:r>
-                        <a:rPr sz="1100">
-                          <a:solidFill>
-                            <a:srgbClr val="1A1A1A"/>
-                          </a:solidFill>
-                        </a:rPr>
-                        <a:t>+5%</a:t>
-                      </a:r>
-                    </a:p>
-                  </a:txBody>
-                  <a:tcPr/>
-                </a:tc>
-                <a:tc>
-                  <a:txBody>
-                    <a:bodyPr/>
-                    <a:lstStyle/>
-                    <a:p>
-                      <a:r>
-                        <a:rPr sz="1100">
-                          <a:solidFill>
-                            <a:srgbClr val="1A1A1A"/>
-                          </a:solidFill>
-                        </a:rPr>
-                        <a:t>40.0x</a:t>
-                      </a:r>
-                    </a:p>
-                  </a:txBody>
-                  <a:tcPr/>
-                </a:tc>
-                <a:tc>
-                  <a:txBody>
-                    <a:bodyPr/>
-                    <a:lstStyle/>
-                    <a:p>
-                      <a:r>
-                        <a:rPr sz="1100">
-                          <a:solidFill>
-                            <a:srgbClr val="1A1A1A"/>
-                          </a:solidFill>
-                        </a:rPr>
-                        <a:t>2.77</a:t>
-                      </a:r>
-                    </a:p>
-                  </a:txBody>
-                  <a:tcPr/>
-                </a:tc>
-                <a:tc>
-                  <a:txBody>
-                    <a:bodyPr/>
-                    <a:lstStyle/>
-                    <a:p>
-                      <a:r>
-                        <a:rPr sz="1100">
-                          <a:solidFill>
-                            <a:srgbClr val="1A1A1A"/>
-                          </a:solidFill>
-                        </a:rPr>
-                        <a:t>110.88</a:t>
-                      </a:r>
-                    </a:p>
-                  </a:txBody>
-                  <a:tcPr/>
-                </a:tc>
-                <a:tc>
-                  <a:txBody>
-                    <a:bodyPr/>
-                    <a:lstStyle/>
-                    <a:p>
-                      <a:r>
-                        <a:rPr sz="1100">
-                          <a:solidFill>
-                            <a:srgbClr val="1A1A1A"/>
-                          </a:solidFill>
-                        </a:rPr>
-                        <a:t>-19%</a:t>
-                      </a:r>
-                    </a:p>
-                  </a:txBody>
-                  <a:tcPr/>
-                </a:tc>
-                <a:tc>
-                  <a:txBody>
-                    <a:bodyPr/>
-                    <a:lstStyle/>
-                    <a:p>
-                      <a:r>
-                        <a:rPr sz="1100">
-                          <a:solidFill>
-                            <a:srgbClr val="1A1A1A"/>
-                          </a:solidFill>
-                        </a:rPr>
+                        <a:t>+8%</a:t>
+                      </a:r>
+                    </a:p>
+                  </a:txBody>
+                  <a:tcPr/>
+                </a:tc>
+                <a:tc>
+                  <a:txBody>
+                    <a:bodyPr/>
+                    <a:lstStyle/>
+                    <a:p>
+                      <a:r>
+                        <a:t>44.0x</a:t>
+                      </a:r>
+                    </a:p>
+                  </a:txBody>
+                  <a:tcPr/>
+                </a:tc>
+                <a:tc>
+                  <a:txBody>
+                    <a:bodyPr/>
+                    <a:lstStyle/>
+                    <a:p>
+                      <a:r>
+                        <a:t>0.99</a:t>
+                      </a:r>
+                    </a:p>
+                  </a:txBody>
+                  <a:tcPr/>
+                </a:tc>
+                <a:tc>
+                  <a:txBody>
+                    <a:bodyPr/>
+                    <a:lstStyle/>
+                    <a:p>
+                      <a:r>
+                        <a:t>43.72</a:t>
+                      </a:r>
+                    </a:p>
+                  </a:txBody>
+                  <a:tcPr/>
+                </a:tc>
+                <a:tc>
+                  <a:txBody>
+                    <a:bodyPr/>
+                    <a:lstStyle/>
+                    <a:p>
+                      <a:r>
+                        <a:t>-68%</a:t>
+                      </a:r>
+                    </a:p>
+                  </a:txBody>
+                  <a:tcPr/>
+                </a:tc>
+                <a:tc>
+                  <a:txBody>
+                    <a:bodyPr/>
+                    <a:lstStyle/>
+                    <a:p>
+                      <a:r>
                         <a:t>45%</a:t>
                       </a:r>
                     </a:p>
@@ -6609,11 +6074,6 @@
                     <a:lstStyle/>
                     <a:p>
                       <a:r>
-                        <a:rPr sz="1100">
-                          <a:solidFill>
-                            <a:srgbClr val="1A1A1A"/>
-                          </a:solidFill>
-                        </a:rPr>
                         <a:t>Bull</a:t>
                       </a:r>
                     </a:p>
@@ -6626,96 +6086,66 @@
                     <a:lstStyle/>
                     <a:p>
                       <a:r>
-                        <a:rPr sz="1100">
-                          <a:solidFill>
-                            <a:srgbClr val="1A1A1A"/>
-                          </a:solidFill>
-                        </a:rPr>
-                        <a:t>+20%</a:t>
-                      </a:r>
-                    </a:p>
-                  </a:txBody>
-                  <a:tcPr/>
-                </a:tc>
-                <a:tc>
-                  <a:txBody>
-                    <a:bodyPr/>
-                    <a:lstStyle/>
-                    <a:p>
-                      <a:r>
-                        <a:rPr sz="1100">
-                          <a:solidFill>
-                            <a:srgbClr val="1A1A1A"/>
-                          </a:solidFill>
-                        </a:rPr>
-                        <a:t>46.0x</a:t>
-                      </a:r>
-                    </a:p>
-                  </a:txBody>
-                  <a:tcPr/>
-                </a:tc>
-                <a:tc>
-                  <a:txBody>
-                    <a:bodyPr/>
-                    <a:lstStyle/>
-                    <a:p>
-                      <a:r>
-                        <a:rPr sz="1100">
-                          <a:solidFill>
-                            <a:srgbClr val="1A1A1A"/>
-                          </a:solidFill>
-                        </a:rPr>
-                        <a:t>3.17</a:t>
-                      </a:r>
-                    </a:p>
-                  </a:txBody>
-                  <a:tcPr/>
-                </a:tc>
-                <a:tc>
-                  <a:txBody>
-                    <a:bodyPr/>
-                    <a:lstStyle/>
-                    <a:p>
-                      <a:r>
-                        <a:rPr sz="1100">
-                          <a:solidFill>
-                            <a:srgbClr val="1A1A1A"/>
-                          </a:solidFill>
-                        </a:rPr>
-                        <a:t>145.73</a:t>
-                      </a:r>
-                    </a:p>
-                  </a:txBody>
-                  <a:tcPr/>
-                </a:tc>
-                <a:tc>
-                  <a:txBody>
-                    <a:bodyPr/>
-                    <a:lstStyle/>
-                    <a:p>
-                      <a:r>
-                        <a:rPr sz="1100">
-                          <a:solidFill>
-                            <a:srgbClr val="1A1A1A"/>
-                          </a:solidFill>
-                        </a:rPr>
-                        <a:t>+6%</a:t>
-                      </a:r>
-                    </a:p>
-                  </a:txBody>
-                  <a:tcPr/>
-                </a:tc>
-                <a:tc>
-                  <a:txBody>
-                    <a:bodyPr/>
-                    <a:lstStyle/>
-                    <a:p>
-                      <a:r>
-                        <a:rPr sz="1100">
-                          <a:solidFill>
-                            <a:srgbClr val="1A1A1A"/>
-                          </a:solidFill>
-                        </a:rPr>
+                        <a:t>+25%</a:t>
+                      </a:r>
+                    </a:p>
+                  </a:txBody>
+                  <a:tcPr/>
+                </a:tc>
+                <a:tc>
+                  <a:txBody>
+                    <a:bodyPr/>
+                    <a:lstStyle/>
+                    <a:p>
+                      <a:r>
+                        <a:t>58.0x</a:t>
+                      </a:r>
+                    </a:p>
+                  </a:txBody>
+                  <a:tcPr/>
+                </a:tc>
+                <a:tc>
+                  <a:txBody>
+                    <a:bodyPr/>
+                    <a:lstStyle/>
+                    <a:p>
+                      <a:r>
+                        <a:t>1.15</a:t>
+                      </a:r>
+                    </a:p>
+                  </a:txBody>
+                  <a:tcPr/>
+                </a:tc>
+                <a:tc>
+                  <a:txBody>
+                    <a:bodyPr/>
+                    <a:lstStyle/>
+                    <a:p>
+                      <a:r>
+                        <a:t>66.7</a:t>
+                      </a:r>
+                    </a:p>
+                  </a:txBody>
+                  <a:tcPr/>
+                </a:tc>
+                <a:tc>
+                  <a:txBody>
+                    <a:bodyPr/>
+                    <a:lstStyle/>
+                    <a:p>
+                      <a:r>
+                        <a:t>-51%</a:t>
+                      </a:r>
+                    </a:p>
+                  </a:txBody>
+                  <a:tcPr/>
+                </a:tc>
+                <a:tc>
+                  <a:txBody>
+                    <a:bodyPr/>
+                    <a:lstStyle/>
+                    <a:p>
+                      <a:r>
                         <a:t>20%</a:t>
                       </a:r>
                     </a:p>
@@ -6757,7 +6187,7 @@
               </a:defRPr>
             </a:pPr>
             <a:r>
-              <a:t>Probability-weighted downside driven by margin compression and cyclical de-rate</a:t>
+              <a:t>Probability-weighted downside driven by thin margins and multiple compression</a:t>
             </a:r>
           </a:p>
         </p:txBody>
@@ -6908,7 +6338,7 @@
               </a:defRPr>
             </a:pPr>
             <a:r>
-              <a:t>• SHORT CATALYSTS (Yantai Jereh):</a:t>
+              <a:t>• SHORT CATALYSTS (Sungrow):</a:t>
             </a:r>
           </a:p>
           <a:p>
@@ -6923,7 +6353,7 @@
               </a:defRPr>
             </a:pPr>
             <a:r>
-              <a:t>•   • Q2 earnings miss on logistics cost</a:t>
+              <a:t>•   • Margin recovery falls short of expectations</a:t>
             </a:r>
           </a:p>
           <a:p>
@@ -6938,7 +6368,7 @@
               </a:defRPr>
             </a:pPr>
             <a:r>
-              <a:t>•   • Guidance cut on North American rig count</a:t>
+              <a:t>•   • Inverter/storage pricing pressure persists</a:t>
             </a:r>
           </a:p>
           <a:p>
@@ -6953,7 +6383,7 @@
               </a:defRPr>
             </a:pPr>
             <a:r>
-              <a:t>•   • Project deferral announcements from majors</a:t>
+              <a:t>•   • Investors de-rate premium clean-tech expectations vs backlog-backed grid exposure</a:t>
             </a:r>
           </a:p>
         </p:txBody>
@@ -7044,7 +6474,7 @@
               </a:defRPr>
             </a:pPr>
             <a:r>
-              <a:t>• Oil price spike may lift Jereh temporarily → pair trade cushions absolute exposure</a:t>
+              <a:t>• Broad power-equipment rally may lift Sungrow temporarily → position sizing limits risk</a:t>
             </a:r>
           </a:p>
           <a:p>
@@ -7104,7 +6534,7 @@
               </a:defRPr>
             </a:pPr>
             <a:r>
-              <a:t>• SHORT SQUEEZE / BORROW COST: Jereh borrow cost ~2.5-7% (China A-share); position sizing limits risk</a:t>
+              <a:t>• SHORT SQUEEZE / BORROW COST: Sungrow borrow cost assumed ~2.5-7%; position sizing limits risk</a:t>
             </a:r>
           </a:p>
           <a:p>
@@ -7119,7 +6549,7 @@
               </a:defRPr>
             </a:pPr>
             <a:r>
-              <a:t>• Thesis kill switch: Jereh margin expansion + Dongfang backlog decline → exit pair</a:t>
+              <a:t>• Thesis kill switch: Sungrow margin expansion + Dongfang backlog decline → exit pair</a:t>
             </a:r>
           </a:p>
         </p:txBody>
@@ -7199,288 +6629,98 @@
           </a:bodyPr>
           <a:lstStyle/>
           <a:p>
-            <a:pPr>
-              <a:spcAft>
-                <a:spcPts val="800"/>
-              </a:spcAft>
-              <a:defRPr sz="1800">
-                <a:solidFill>
-                  <a:srgbClr val="1A1A1A"/>
-                </a:solidFill>
-              </a:defRPr>
-            </a:pPr>
             <a:r>
               <a:t>• POSITION SIZING (Risk-Based):</a:t>
             </a:r>
           </a:p>
           <a:p>
-            <a:pPr>
-              <a:spcAft>
-                <a:spcPts val="800"/>
-              </a:spcAft>
-              <a:defRPr sz="1800">
-                <a:solidFill>
-                  <a:srgbClr val="1A1A1A"/>
-                </a:solidFill>
-              </a:defRPr>
-            </a:pPr>
             <a:r>
               <a:t>•   • Portfolio: $100M example | Max risk per trade: 2% ($2M)</a:t>
             </a:r>
           </a:p>
           <a:p>
-            <a:pPr>
-              <a:spcAft>
-                <a:spcPts val="800"/>
-              </a:spcAft>
-              <a:defRPr sz="1800">
-                <a:solidFill>
-                  <a:srgbClr val="1A1A1A"/>
-                </a:solidFill>
-              </a:defRPr>
-            </a:pPr>
-            <a:r>
-              <a:t>•   • Pair volatility: 83.2% annual | Position size: 1.2% of portfolio ($1.2M notional)</a:t>
-            </a:r>
-          </a:p>
-          <a:p>
-            <a:pPr>
-              <a:spcAft>
-                <a:spcPts val="800"/>
-              </a:spcAft>
-              <a:defRPr sz="1800">
-                <a:solidFill>
-                  <a:srgbClr val="1A1A1A"/>
-                </a:solidFill>
-              </a:defRPr>
-            </a:pPr>
-            <a:r>
-              <a:t>•   • Allocation: $0.6M long Dongfang / $0.6M short Jereh (dollar-neutral)</a:t>
-            </a:r>
-          </a:p>
-          <a:p>
-            <a:pPr>
-              <a:spcAft>
-                <a:spcPts val="800"/>
-              </a:spcAft>
-              <a:defRPr sz="1800">
-                <a:solidFill>
-                  <a:srgbClr val="1A1A1A"/>
-                </a:solidFill>
-              </a:defRPr>
-            </a:pPr>
+            <a:r>
+              <a:t>•   • Pair volatility: 80.3% annual | Position size: 1.2% of portfolio ($1.2M notional)</a:t>
+            </a:r>
+          </a:p>
+          <a:p>
+            <a:r>
+              <a:t>•   • Allocation: $0.6M long Dongfang / $0.6M short Sungrow (dollar-neutral)</a:t>
+            </a:r>
+          </a:p>
+          <a:p>
             <a:r>
               <a:t>• </a:t>
             </a:r>
           </a:p>
           <a:p>
-            <a:pPr>
-              <a:spcAft>
-                <a:spcPts val="800"/>
-              </a:spcAft>
-              <a:defRPr sz="1800">
-                <a:solidFill>
-                  <a:srgbClr val="1A1A1A"/>
-                </a:solidFill>
-              </a:defRPr>
-            </a:pPr>
             <a:r>
               <a:t>• CARRY COST (6-month hold):</a:t>
             </a:r>
           </a:p>
           <a:p>
-            <a:pPr>
-              <a:spcAft>
-                <a:spcPts val="800"/>
-              </a:spcAft>
-              <a:defRPr sz="1800">
-                <a:solidFill>
-                  <a:srgbClr val="1A1A1A"/>
-                </a:solidFill>
-              </a:defRPr>
-            </a:pPr>
-            <a:r>
-              <a:t>•   • Jereh borrow cost: 2.5-7% annually → $5K-19K cost (China A-share)</a:t>
-            </a:r>
-          </a:p>
-          <a:p>
-            <a:pPr>
-              <a:spcAft>
-                <a:spcPts val="800"/>
-              </a:spcAft>
-              <a:defRPr sz="1800">
-                <a:solidFill>
-                  <a:srgbClr val="1A1A1A"/>
-                </a:solidFill>
-              </a:defRPr>
-            </a:pPr>
-            <a:r>
-              <a:t>•   • Jereh dividend (short pays): 0.8% → ~$5K cost</a:t>
-            </a:r>
-          </a:p>
-          <a:p>
-            <a:pPr>
-              <a:spcAft>
-                <a:spcPts val="800"/>
-              </a:spcAft>
-              <a:defRPr sz="1800">
-                <a:solidFill>
-                  <a:srgbClr val="1A1A1A"/>
-                </a:solidFill>
-              </a:defRPr>
-            </a:pPr>
+            <a:r>
+              <a:t>•   • Sungrow borrow cost: 2.5-7% annually</a:t>
+            </a:r>
+          </a:p>
+          <a:p>
+            <a:r>
+              <a:t>•   • Sungrow dividend/carry checked before execution</a:t>
+            </a:r>
+          </a:p>
+          <a:p>
             <a:r>
               <a:t>•   • Dongfang dividend (long receives): 1.5% → ~$9K income</a:t>
             </a:r>
           </a:p>
           <a:p>
-            <a:pPr>
-              <a:spcAft>
-                <a:spcPts val="800"/>
-              </a:spcAft>
-              <a:defRPr sz="1800">
-                <a:solidFill>
-                  <a:srgbClr val="1A1A1A"/>
-                </a:solidFill>
-              </a:defRPr>
-            </a:pPr>
-            <a:r>
-              <a:t>•   • Net carry: ~$18K-36K (1.5-3% of expected spread return)</a:t>
-            </a:r>
-          </a:p>
-          <a:p>
-            <a:pPr>
-              <a:spcAft>
-                <a:spcPts val="800"/>
-              </a:spcAft>
-              <a:defRPr sz="1800">
-                <a:solidFill>
-                  <a:srgbClr val="1A1A1A"/>
-                </a:solidFill>
-              </a:defRPr>
-            </a:pPr>
+            <a:r>
+              <a:t>•   • Net carry: ~$13K-27K based on current trader analysis</a:t>
+            </a:r>
+          </a:p>
+          <a:p>
             <a:r>
               <a:t>• </a:t>
             </a:r>
           </a:p>
           <a:p>
-            <a:pPr>
-              <a:spcAft>
-                <a:spcPts val="800"/>
-              </a:spcAft>
-              <a:defRPr sz="1800">
-                <a:solidFill>
-                  <a:srgbClr val="1A1A1A"/>
-                </a:solidFill>
-              </a:defRPr>
-            </a:pPr>
             <a:r>
               <a:t>• LIQUIDITY &amp; EXECUTION:</a:t>
             </a:r>
           </a:p>
           <a:p>
-            <a:pPr>
-              <a:spcAft>
-                <a:spcPts val="800"/>
-              </a:spcAft>
-              <a:defRPr sz="1800">
-                <a:solidFill>
-                  <a:srgbClr val="1A1A1A"/>
-                </a:solidFill>
-              </a:defRPr>
-            </a:pPr>
-            <a:r>
-              <a:t>•   • Dongfang (HK): ~$147M daily volume | Execute in &lt;1 day | HKEX access</a:t>
-            </a:r>
-          </a:p>
-          <a:p>
-            <a:pPr>
-              <a:spcAft>
-                <a:spcPts val="800"/>
-              </a:spcAft>
-              <a:defRPr sz="1800">
-                <a:solidFill>
-                  <a:srgbClr val="1A1A1A"/>
-                </a:solidFill>
-              </a:defRPr>
-            </a:pPr>
-            <a:r>
-              <a:t>•   • Jereh: ~$589M daily volume | Execute in &lt;1 day | Shenzhen A-share</a:t>
-            </a:r>
-          </a:p>
-          <a:p>
-            <a:pPr>
-              <a:spcAft>
-                <a:spcPts val="800"/>
-              </a:spcAft>
-              <a:defRPr sz="1800">
-                <a:solidFill>
-                  <a:srgbClr val="1A1A1A"/>
-                </a:solidFill>
-              </a:defRPr>
-            </a:pPr>
+            <a:r>
+              <a:t>•   • Dongfang (HK): ~$148M daily volume | Execute in &lt;1 day | HKEX access</a:t>
+            </a:r>
+          </a:p>
+          <a:p>
+            <a:r>
+              <a:t>•   • Sungrow: highly liquid A-share leg; execute in slices after borrow is confirmed</a:t>
+            </a:r>
+          </a:p>
+          <a:p>
             <a:r>
               <a:t>•   • Dongfang trades on HKEX (1072.HK) - no Stock Connect needed</a:t>
             </a:r>
           </a:p>
           <a:p>
-            <a:pPr>
-              <a:spcAft>
-                <a:spcPts val="800"/>
-              </a:spcAft>
-              <a:defRPr sz="1800">
-                <a:solidFill>
-                  <a:srgbClr val="1A1A1A"/>
-                </a:solidFill>
-              </a:defRPr>
-            </a:pPr>
             <a:r>
               <a:t>• </a:t>
             </a:r>
           </a:p>
           <a:p>
-            <a:pPr>
-              <a:spcAft>
-                <a:spcPts val="800"/>
-              </a:spcAft>
-              <a:defRPr sz="1800">
-                <a:solidFill>
-                  <a:srgbClr val="1A1A1A"/>
-                </a:solidFill>
-              </a:defRPr>
-            </a:pPr>
             <a:r>
               <a:t>• TECHNICAL TIMING:</a:t>
             </a:r>
           </a:p>
           <a:p>
-            <a:pPr>
-              <a:spcAft>
-                <a:spcPts val="800"/>
-              </a:spcAft>
-              <a:defRPr sz="1800">
-                <a:solidFill>
-                  <a:srgbClr val="1A1A1A"/>
-                </a:solidFill>
-              </a:defRPr>
-            </a:pPr>
-            <a:r>
-              <a:t>•   • Jereh: Near highs, elevated RSI → Monitor for short entry signals</a:t>
-            </a:r>
-          </a:p>
-          <a:p>
-            <a:pPr>
-              <a:spcAft>
-                <a:spcPts val="800"/>
-              </a:spcAft>
-              <a:defRPr sz="1800">
-                <a:solidFill>
-                  <a:srgbClr val="1A1A1A"/>
-                </a:solidFill>
-              </a:defRPr>
-            </a:pPr>
-            <a:r>
-              <a:t>•   • Dongfang: Near highs but policy tailwinds support entry</a:t>
+            <a:r>
+              <a:t>•   • Sungrow: RSI 59.3 | 66.9% of 52-week high</a:t>
+            </a:r>
+          </a:p>
+          <a:p>
+            <a:r>
+              <a:t>•   • Dongfang: RSI 50.9 | 87.2% of 52-week high</a:t>
             </a:r>
           </a:p>
         </p:txBody>
@@ -7586,7 +6826,7 @@
               </a:defRPr>
             </a:pPr>
             <a:r>
-              <a:t>•   • Compiles text evidence from 47 documents / 426 paragraphs into structured categories</a:t>
+              <a:t>•   • Compiles text evidence from 59 documents / 455 paragraphs into structured categories</a:t>
             </a:r>
           </a:p>
           <a:p>
@@ -7786,93 +7026,33 @@
           </a:bodyPr>
           <a:lstStyle/>
           <a:p>
-            <a:pPr>
-              <a:spcAft>
-                <a:spcPts val="800"/>
-              </a:spcAft>
-              <a:defRPr sz="1800">
-                <a:solidFill>
-                  <a:srgbClr val="1A1A1A"/>
-                </a:solidFill>
-              </a:defRPr>
-            </a:pPr>
             <a:r>
               <a:t>• Thesis: Own grid integration leader capturing State Grid RMB 4T capex + synchronous condenser breakthrough</a:t>
             </a:r>
           </a:p>
           <a:p>
-            <a:pPr>
-              <a:spcAft>
-                <a:spcPts val="800"/>
-              </a:spcAft>
-              <a:defRPr sz="1800">
-                <a:solidFill>
-                  <a:srgbClr val="1A1A1A"/>
-                </a:solidFill>
-              </a:defRPr>
-            </a:pPr>
             <a:r>
               <a:t>• Long Dongfang Electric @ target upside: 44.9%</a:t>
             </a:r>
           </a:p>
           <a:p>
-            <a:pPr>
-              <a:spcAft>
-                <a:spcPts val="800"/>
-              </a:spcAft>
-              <a:defRPr sz="1800">
-                <a:solidFill>
-                  <a:srgbClr val="1A1A1A"/>
-                </a:solidFill>
-              </a:defRPr>
-            </a:pPr>
-            <a:r>
-              <a:t>• Short Yantai Jereh @ target downside: -20.5%</a:t>
-            </a:r>
-          </a:p>
-          <a:p>
-            <a:pPr>
-              <a:spcAft>
-                <a:spcPts val="800"/>
-              </a:spcAft>
-              <a:defRPr sz="1800">
-                <a:solidFill>
-                  <a:srgbClr val="1A1A1A"/>
-                </a:solidFill>
-              </a:defRPr>
-            </a:pPr>
-            <a:r>
-              <a:t>• Pair spread expected return: 65.4%</a:t>
-            </a:r>
-          </a:p>
-          <a:p>
-            <a:pPr>
-              <a:spcAft>
-                <a:spcPts val="800"/>
-              </a:spcAft>
-              <a:defRPr sz="1800">
-                <a:solidFill>
-                  <a:srgbClr val="1A1A1A"/>
-                </a:solidFill>
-              </a:defRPr>
-            </a:pPr>
-            <a:r>
-              <a:t>• 3 pillars: (1) Structural electricity demand (2) Grid capex visibility (3) Oilfield cost pressure</a:t>
-            </a:r>
-          </a:p>
-          <a:p>
-            <a:pPr>
-              <a:spcAft>
-                <a:spcPts val="800"/>
-              </a:spcAft>
-              <a:defRPr sz="1800">
-                <a:solidFill>
-                  <a:srgbClr val="1A1A1A"/>
-                </a:solidFill>
-              </a:defRPr>
-            </a:pPr>
-            <a:r>
-              <a:t>• Key catalysts: State Grid 4T RMB capex, Dongfang synchronous condenser orders, Jereh margin pressure</a:t>
+            <a:r>
+              <a:t>• Short Sungrow @ target downside: -67.5%</a:t>
+            </a:r>
+          </a:p>
+          <a:p>
+            <a:r>
+              <a:t>• Pair spread expected return: 112.4%</a:t>
+            </a:r>
+          </a:p>
+          <a:p>
+            <a:r>
+              <a:t>• 3 pillars: (1) Structural electricity demand (2) Grid capex visibility (3) Earnings-quality divergence</a:t>
+            </a:r>
+          </a:p>
+          <a:p>
+            <a:r>
+              <a:t>• Key catalysts: State Grid 4T RMB capex, Dongfang synchronous condenser orders, Sungrow margin scrutiny</a:t>
             </a:r>
           </a:p>
         </p:txBody>
@@ -7995,15 +7175,8 @@
           </a:bodyPr>
           <a:lstStyle/>
           <a:p>
-            <a:pPr>
-              <a:defRPr sz="2200">
-                <a:solidFill>
-                  <a:srgbClr val="666666"/>
-                </a:solidFill>
-              </a:defRPr>
-            </a:pPr>
-            <a:r>
-              <a:t>Long Dongfang (+45%) / Short Jereh (-20%) = Pair spread +65%</a:t>
+            <a:r>
+              <a:t>Long Dongfang (+45%) / Short Sungrow (-68%) = Pair spread +112%</a:t>
             </a:r>
           </a:p>
         </p:txBody>
@@ -8094,7 +7267,7 @@
               </a:defRPr>
             </a:pPr>
             <a:r>
-              <a:t>• Consensus over-connects oil price spikes with durable oilfield-service earnings</a:t>
+              <a:t>• Consensus treats energy-transition equipment winners as interchangeable</a:t>
             </a:r>
           </a:p>
           <a:p>
@@ -8234,78 +7407,28 @@
           </a:bodyPr>
           <a:lstStyle/>
           <a:p>
-            <a:pPr>
-              <a:spcAft>
-                <a:spcPts val="800"/>
-              </a:spcAft>
-              <a:defRPr sz="1800">
-                <a:solidFill>
-                  <a:srgbClr val="1A1A1A"/>
-                </a:solidFill>
-              </a:defRPr>
-            </a:pPr>
-            <a:r>
-              <a:t>• Global electricity demand expected to grow ~4% annually through 2030 (IEA)</a:t>
-            </a:r>
-          </a:p>
-          <a:p>
-            <a:pPr>
-              <a:spcAft>
-                <a:spcPts val="800"/>
-              </a:spcAft>
-              <a:defRPr sz="1800">
-                <a:solidFill>
-                  <a:srgbClr val="1A1A1A"/>
-                </a:solidFill>
-              </a:defRPr>
-            </a:pPr>
-            <a:r>
-              <a:t>• US data center power demand projected to 2-3x by 2030 — driving grid equipment orders</a:t>
-            </a:r>
-          </a:p>
-          <a:p>
-            <a:pPr>
-              <a:spcAft>
-                <a:spcPts val="800"/>
-              </a:spcAft>
-              <a:defRPr sz="1800">
-                <a:solidFill>
-                  <a:srgbClr val="1A1A1A"/>
-                </a:solidFill>
-              </a:defRPr>
-            </a:pPr>
-            <a:r>
-              <a:t>• Transformer lead times 80-120 weeks; transmission queue 2+ years in most markets</a:t>
-            </a:r>
-          </a:p>
-          <a:p>
-            <a:pPr>
-              <a:spcAft>
-                <a:spcPts val="800"/>
-              </a:spcAft>
-              <a:defRPr sz="1800">
-                <a:solidFill>
-                  <a:srgbClr val="1A1A1A"/>
-                </a:solidFill>
-              </a:defRPr>
-            </a:pPr>
-            <a:r>
-              <a:t>• EU, US, and China all have multi-year grid investment programs</a:t>
-            </a:r>
-          </a:p>
-          <a:p>
-            <a:pPr>
-              <a:spcAft>
-                <a:spcPts val="800"/>
-              </a:spcAft>
-              <a:defRPr sz="1800">
-                <a:solidFill>
-                  <a:srgbClr val="1A1A1A"/>
-                </a:solidFill>
-              </a:defRPr>
-            </a:pPr>
-            <a:r>
-              <a:t>• Policy support: IRA, EU Grid Action Plan, China State Grid Five-Year Plan</a:t>
+            <a:r>
+              <a:t>• China's 15th FYP shifts the bottleneck from generation buildout to system reliability and grid integration</a:t>
+            </a:r>
+          </a:p>
+          <a:p>
+            <a:r>
+              <a:t>• State Grid plans RMB 4 trillion of fixed-asset investment across 2026-2030, a step-up versus the prior cycle</a:t>
+            </a:r>
+          </a:p>
+          <a:p>
+            <a:r>
+              <a:t>• New-type power system priorities include source-grid-load-storage coordination and grid flexibility</a:t>
+            </a:r>
+          </a:p>
+          <a:p>
+            <a:r>
+              <a:t>• Dongfang is directly exposed to synchronous condensers, transmission equipment, and grid-supporting power equipment</a:t>
+            </a:r>
+          </a:p>
+          <a:p>
+            <a:r>
+              <a:t>• This makes China grid capex, not generic global clean-tech beta, the key macro driver for the pair</a:t>
             </a:r>
           </a:p>
         </p:txBody>
@@ -8396,7 +7519,7 @@
               </a:defRPr>
             </a:pPr>
             <a:r>
-              <a:t>• ⚠️ 2Y backtest is UNFAVORABLE: Both legs +300% (Dongfang +299.8%, Jereh +350.4%), pair P&amp;L -25.3%</a:t>
+              <a:t>• ⚠️ 2Y backtest can be unfavorable because broad energy-transition winners often rerated together</a:t>
             </a:r>
           </a:p>
           <a:p>
@@ -8411,7 +7534,7 @@
               </a:defRPr>
             </a:pPr>
             <a:r>
-              <a:t>• This is NOT a historically validated spread — it is a forward-looking variant view on policy regime shift</a:t>
+              <a:t>• This is NOT a historically validated spread — it is a forward-looking variant view on regime shift</a:t>
             </a:r>
           </a:p>
           <a:p>
@@ -8426,7 +7549,7 @@
               </a:defRPr>
             </a:pPr>
             <a:r>
-              <a:t>• Past regime (2021-2024): Both legs benefited from unified energy capex boom (oil + green together)</a:t>
+              <a:t>• Past regime (2021-2024): Broad clean-tech beta lifted inverter and equipment winners together</a:t>
             </a:r>
           </a:p>
           <a:p>
@@ -8441,7 +7564,7 @@
               </a:defRPr>
             </a:pPr>
             <a:r>
-              <a:t>• New regime (2025-2030): State Grid RMB 4T 15th FYP decouples grid capex from fossil fuel investment</a:t>
+              <a:t>• New regime (2025-2030): Grid infrastructure durability beats high-growth clean-tech valuation risk</a:t>
             </a:r>
           </a:p>
           <a:p>
@@ -8456,7 +7579,7 @@
               </a:defRPr>
             </a:pPr>
             <a:r>
-              <a:t>• Fossil substitution acceleration explicitly targets Jereh's oilfield services market for contraction</a:t>
+              <a:t>• Stock-pool compliance: Dongfang is the pool anchor; Sungrow is the non-pool same-sector short</a:t>
             </a:r>
           </a:p>
           <a:p>
@@ -8675,7 +7798,7 @@
               </a:defRPr>
             </a:pPr>
             <a:r>
-              <a:t>Yantai Jereh: Fossil-Cyclical with Policy Headwinds</a:t>
+              <a:t>Sungrow: High-Expectation Inverter Leader Facing Demand Normalization</a:t>
             </a:r>
           </a:p>
         </p:txBody>
@@ -8713,7 +7836,7 @@
               </a:defRPr>
             </a:pPr>
             <a:r>
-              <a:t>• Revenue tied to upstream capex cycles — North America, Middle East, offshore</a:t>
+              <a:t>• High-expectation inverter and storage leader facing demand normalization</a:t>
             </a:r>
           </a:p>
           <a:p>
@@ -8728,7 +7851,7 @@
               </a:defRPr>
             </a:pPr>
             <a:r>
-              <a:t>• Cost pressure: logistics, materials, labor compressing margins</a:t>
+              <a:t>• 2025 strong results (Revenue RMB 89.2bn, +14.6%; Net Profit RMB 13.5bn, +22.0%)</a:t>
             </a:r>
           </a:p>
           <a:p>
@@ -8743,7 +7866,7 @@
               </a:defRPr>
             </a:pPr>
             <a:r>
-              <a:t>• Project delays and capex caution during geopolitical uncertainty</a:t>
+              <a:t>• Q1 2026 shows clear slowdown: Revenue -18.3% YoY, Net Profit -40.1% YoY</a:t>
             </a:r>
           </a:p>
           <a:p>
@@ -8758,7 +7881,7 @@
               </a:defRPr>
             </a:pPr>
             <a:r>
-              <a:t>• Rig count volatility = utilization risk outside company control</a:t>
+              <a:t>• Premium multiple vulnerable to inverter/storage price compression and margin pressure</a:t>
             </a:r>
           </a:p>
           <a:p>
@@ -8773,7 +7896,7 @@
               </a:defRPr>
             </a:pPr>
             <a:r>
-              <a:t>• Higher oil prices ≠ higher service earnings (historical disconnect in disruption periods)</a:t>
+              <a:t>• Short thesis is valuation de-rating as growth expectations normalize, not business failure</a:t>
             </a:r>
           </a:p>
         </p:txBody>
@@ -8826,14 +7949,14 @@
               </a:defRPr>
             </a:pPr>
             <a:r>
-              <a:t>Historical Divergence: Market vs Dongfang Electric vs Yantai Jereh (2Y)</a:t>
+              <a:t>Historical Divergence: Market vs Dongfang Electric vs Sungrow (2Y)</a:t>
             </a:r>
           </a:p>
         </p:txBody>
       </p:sp>
       <p:pic>
         <p:nvPicPr>
-          <p:cNvPr id="3" name="Picture 2" descr="oil_jereh_correlation.png"/>
+          <p:cNvPr id="3" name="Picture 2" descr="oil_sungrow_correlation.png"/>
           <p:cNvPicPr>
             <a:picLocks noChangeAspect="1"/>
           </p:cNvPicPr>
@@ -8885,7 +8008,7 @@
               </a:defRPr>
             </a:pPr>
             <a:r>
-              <a:t>⚠️ Historical backtest is UNFAVORABLE — pair P&amp;L -25.3% over 2Y. This is a forward-looking variant view on policy regime shift, not a historically validated spread.</a:t>
+              <a:t>Historical result is a risk check, not proof. Forward case depends on grid infrastructure durability outperforming high-growth clean-tech valuation risk.</a:t>
             </a:r>
           </a:p>
         </p:txBody>
@@ -8973,11 +8096,6 @@
                     <a:lstStyle/>
                     <a:p>
                       <a:r>
-                        <a:rPr sz="1200" b="1">
-                          <a:solidFill>
-                            <a:srgbClr val="FFFFFF"/>
-                          </a:solidFill>
-                        </a:rPr>
                         <a:t>Pillar</a:t>
                       </a:r>
                     </a:p>
@@ -8994,11 +8112,6 @@
                     <a:lstStyle/>
                     <a:p>
                       <a:r>
-                        <a:rPr sz="1200" b="1">
-                          <a:solidFill>
-                            <a:srgbClr val="FFFFFF"/>
-                          </a:solidFill>
-                        </a:rPr>
                         <a:t>Evidence</a:t>
                       </a:r>
                     </a:p>
@@ -9015,11 +8128,6 @@
                     <a:lstStyle/>
                     <a:p>
                       <a:r>
-                        <a:rPr sz="1200" b="1">
-                          <a:solidFill>
-                            <a:srgbClr val="FFFFFF"/>
-                          </a:solidFill>
-                        </a:rPr>
                         <a:t>Signal</a:t>
                       </a:r>
                     </a:p>
@@ -9038,11 +8146,6 @@
                     <a:lstStyle/>
                     <a:p>
                       <a:r>
-                        <a:rPr sz="1100">
-                          <a:solidFill>
-                            <a:srgbClr val="1A1A1A"/>
-                          </a:solidFill>
-                        </a:rPr>
                         <a:t>Historical spread test</a:t>
                       </a:r>
                     </a:p>
@@ -9055,28 +8158,18 @@
                     <a:lstStyle/>
                     <a:p>
                       <a:r>
-                        <a:rPr sz="1100">
-                          <a:solidFill>
-                            <a:srgbClr val="1A1A1A"/>
-                          </a:solidFill>
-                        </a:rPr>
-                        <a:t>2Y simulated pair P&amp;L was -25.7%; Dongfang 2Y return 295.4% vs Jereh 346.8%.</a:t>
-                      </a:r>
-                    </a:p>
-                  </a:txBody>
-                  <a:tcPr/>
-                </a:tc>
-                <a:tc>
-                  <a:txBody>
-                    <a:bodyPr/>
-                    <a:lstStyle/>
-                    <a:p>
-                      <a:r>
-                        <a:rPr sz="1100">
-                          <a:solidFill>
-                            <a:srgbClr val="1A1A1A"/>
-                          </a:solidFill>
-                        </a:rPr>
+                        <a:t>2Y simulated pair P&amp;L was 101.4%; Dongfang Electric 2Y return 295.4% vs Sungrow 92.5%.</a:t>
+                      </a:r>
+                    </a:p>
+                  </a:txBody>
+                  <a:tcPr/>
+                </a:tc>
+                <a:tc>
+                  <a:txBody>
+                    <a:bodyPr/>
+                    <a:lstStyle/>
+                    <a:p>
+                      <a:r>
                         <a:t>Risk / contradiction</a:t>
                       </a:r>
                     </a:p>
@@ -9091,46 +8184,31 @@
                     <a:lstStyle/>
                     <a:p>
                       <a:r>
-                        <a:rPr sz="1100">
-                          <a:solidFill>
-                            <a:srgbClr val="1A1A1A"/>
-                          </a:solidFill>
-                        </a:rPr>
-                        <a:t>Fundamental momentum</a:t>
-                      </a:r>
-                    </a:p>
-                  </a:txBody>
-                  <a:tcPr/>
-                </a:tc>
-                <a:tc>
-                  <a:txBody>
-                    <a:bodyPr/>
-                    <a:lstStyle/>
-                    <a:p>
-                      <a:r>
-                        <a:rPr sz="1100">
-                          <a:solidFill>
-                            <a:srgbClr val="1A1A1A"/>
-                          </a:solidFill>
-                        </a:rPr>
-                        <a:t>Dongfang net profit growth exceeded Jereh by 29.1pp (31.1% vs 2.0%).</a:t>
-                      </a:r>
-                    </a:p>
-                  </a:txBody>
-                  <a:tcPr/>
-                </a:tc>
-                <a:tc>
-                  <a:txBody>
-                    <a:bodyPr/>
-                    <a:lstStyle/>
-                    <a:p>
-                      <a:r>
-                        <a:rPr sz="1100">
-                          <a:solidFill>
-                            <a:srgbClr val="1A1A1A"/>
-                          </a:solidFill>
-                        </a:rPr>
-                        <a:t>Supports long Dongfang / short Jereh</a:t>
+                        <a:t>Earnings durability</a:t>
+                      </a:r>
+                    </a:p>
+                  </a:txBody>
+                  <a:tcPr/>
+                </a:tc>
+                <a:tc>
+                  <a:txBody>
+                    <a:bodyPr/>
+                    <a:lstStyle/>
+                    <a:p>
+                      <a:r>
+                        <a:t>Dongfang Electric delivered 2025 net profit growth of 31.1% on 12.8% revenue growth, backed by order visibility, while Sungrow moved from +22.0% full-year profit growth to -40.1% YoY in Q1 2026.</a:t>
+                      </a:r>
+                    </a:p>
+                  </a:txBody>
+                  <a:tcPr/>
+                </a:tc>
+                <a:tc>
+                  <a:txBody>
+                    <a:bodyPr/>
+                    <a:lstStyle/>
+                    <a:p>
+                      <a:r>
+                        <a:t>Supports long Dongfang Electric / short Sungrow</a:t>
                       </a:r>
                     </a:p>
                   </a:txBody>
@@ -9144,11 +8222,6 @@
                     <a:lstStyle/>
                     <a:p>
                       <a:r>
-                        <a:rPr sz="1100">
-                          <a:solidFill>
-                            <a:srgbClr val="1A1A1A"/>
-                          </a:solidFill>
-                        </a:rPr>
                         <a:t>Valuation stretch</a:t>
                       </a:r>
                     </a:p>
@@ -9161,29 +8234,19 @@
                     <a:lstStyle/>
                     <a:p>
                       <a:r>
-                        <a:rPr sz="1100">
-                          <a:solidFill>
-                            <a:srgbClr val="1A1A1A"/>
-                          </a:solidFill>
-                        </a:rPr>
-                        <a:t>Jereh trades at a 10.4x P/E premium and 2.5x P/B premium to Dongfang (46.5x/5.5x vs 36.1x/3.1x).</a:t>
-                      </a:r>
-                    </a:p>
-                  </a:txBody>
-                  <a:tcPr/>
-                </a:tc>
-                <a:tc>
-                  <a:txBody>
-                    <a:bodyPr/>
-                    <a:lstStyle/>
-                    <a:p>
-                      <a:r>
-                        <a:rPr sz="1100">
-                          <a:solidFill>
-                            <a:srgbClr val="1A1A1A"/>
-                          </a:solidFill>
-                        </a:rPr>
-                        <a:t>Supports short Jereh if growth disappoints</a:t>
+                        <a:t>Sungrow trades at a 8.9x P/E premium and 5.4x P/B gap to Dongfang Electric (45.0x/8.5x vs 36.1x/3.1x).</a:t>
+                      </a:r>
+                    </a:p>
+                  </a:txBody>
+                  <a:tcPr/>
+                </a:tc>
+                <a:tc>
+                  <a:txBody>
+                    <a:bodyPr/>
+                    <a:lstStyle/>
+                    <a:p>
+                      <a:r>
+                        <a:t>Supports short Sungrow if margin recovery disappoints</a:t>
                       </a:r>
                     </a:p>
                   </a:txBody>
@@ -9197,11 +8260,6 @@
                     <a:lstStyle/>
                     <a:p>
                       <a:r>
-                        <a:rPr sz="1100">
-                          <a:solidFill>
-                            <a:srgbClr val="1A1A1A"/>
-                          </a:solidFill>
-                        </a:rPr>
                         <a:t>Technical setup</a:t>
                       </a:r>
                     </a:p>
@@ -9214,28 +8272,18 @@
                     <a:lstStyle/>
                     <a:p>
                       <a:r>
-                        <a:rPr sz="1100">
-                          <a:solidFill>
-                            <a:srgbClr val="1A1A1A"/>
-                          </a:solidFill>
-                        </a:rPr>
-                        <a:t>Jereh is at 100.0% of its 52-week high with RSI 67.6, while Dongfang is at 87.2% with RSI 50.9.</a:t>
-                      </a:r>
-                    </a:p>
-                  </a:txBody>
-                  <a:tcPr/>
-                </a:tc>
-                <a:tc>
-                  <a:txBody>
-                    <a:bodyPr/>
-                    <a:lstStyle/>
-                    <a:p>
-                      <a:r>
-                        <a:rPr sz="1100">
-                          <a:solidFill>
-                            <a:srgbClr val="1A1A1A"/>
-                          </a:solidFill>
-                        </a:rPr>
+                        <a:t>Sungrow is at 66.9% of its 52-week high with RSI 59.3, while Dongfang Electric is at 87.2% with RSI 50.9.</a:t>
+                      </a:r>
+                    </a:p>
+                  </a:txBody>
+                  <a:tcPr/>
+                </a:tc>
+                <a:tc>
+                  <a:txBody>
+                    <a:bodyPr/>
+                    <a:lstStyle/>
+                    <a:p>
+                      <a:r>
                         <a:t>Supports timing discipline</a:t>
                       </a:r>
                     </a:p>
@@ -9250,11 +8298,6 @@
                     <a:lstStyle/>
                     <a:p>
                       <a:r>
-                        <a:rPr sz="1100">
-                          <a:solidFill>
-                            <a:srgbClr val="1A1A1A"/>
-                          </a:solidFill>
-                        </a:rPr>
                         <a:t>Scenario valuation</a:t>
                       </a:r>
                     </a:p>
@@ -9267,28 +8310,18 @@
                     <a:lstStyle/>
                     <a:p>
                       <a:r>
-                        <a:rPr sz="1100">
-                          <a:solidFill>
-                            <a:srgbClr val="1A1A1A"/>
-                          </a:solidFill>
-                        </a:rPr>
-                        <a:t>Probability-weighted modeled pair spread is 65.4%.</a:t>
-                      </a:r>
-                    </a:p>
-                  </a:txBody>
-                  <a:tcPr/>
-                </a:tc>
-                <a:tc>
-                  <a:txBody>
-                    <a:bodyPr/>
-                    <a:lstStyle/>
-                    <a:p>
-                      <a:r>
-                        <a:rPr sz="1100">
-                          <a:solidFill>
-                            <a:srgbClr val="1A1A1A"/>
-                          </a:solidFill>
-                        </a:rPr>
+                        <a:t>Probability-weighted modeled pair spread is 112.4%.</a:t>
+                      </a:r>
+                    </a:p>
+                  </a:txBody>
+                  <a:tcPr/>
+                </a:tc>
+                <a:tc>
+                  <a:txBody>
+                    <a:bodyPr/>
+                    <a:lstStyle/>
+                    <a:p>
+                      <a:r>
                         <a:t>Forward prediction</a:t>
                       </a:r>
                     </a:p>
